--- a/Bremsstrahlung Measurements of VENUS 3rd-Generation ECR Ion Source.pptx
+++ b/Bremsstrahlung Measurements of VENUS 3rd-Generation ECR Ion Source.pptx
@@ -199,6 +199,452 @@
 </p:presentation>
 </file>
 
+<file path=ppt/charts/chart1.xml><?xml version="1.0" encoding="utf-8"?>
+<c:chartSpace xmlns:c="http://schemas.openxmlformats.org/drawingml/2006/chart" xmlns:a="http://schemas.openxmlformats.org/drawingml/2006/main" xmlns:r="http://schemas.openxmlformats.org/officeDocument/2006/relationships" xmlns:c16r2="http://schemas.microsoft.com/office/drawing/2015/06/chart">
+  <c:date1904 val="0"/>
+  <c:lang val="en-US"/>
+  <c:roundedCorners val="0"/>
+  <mc:AlternateContent xmlns:mc="http://schemas.openxmlformats.org/markup-compatibility/2006">
+    <mc:Choice xmlns:c14="http://schemas.microsoft.com/office/drawing/2007/8/2/chart" Requires="c14">
+      <c14:style val="102"/>
+    </mc:Choice>
+    <mc:Fallback>
+      <c:style val="2"/>
+    </mc:Fallback>
+  </mc:AlternateContent>
+  <c:chart>
+    <c:autoTitleDeleted val="0"/>
+    <c:plotArea>
+      <c:layout>
+        <c:manualLayout>
+          <c:layoutTarget val="inner"/>
+          <c:xMode val="edge"/>
+          <c:yMode val="edge"/>
+          <c:x val="0.1390439632545932"/>
+          <c:y val="6.5289442986293383E-2"/>
+          <c:w val="0.67329068241469892"/>
+          <c:h val="0.73444808982210552"/>
+        </c:manualLayout>
+      </c:layout>
+      <c:scatterChart>
+        <c:scatterStyle val="lineMarker"/>
+        <c:varyColors val="0"/>
+        <c:ser>
+          <c:idx val="0"/>
+          <c:order val="0"/>
+          <c:tx>
+            <c:v>1850W</c:v>
+          </c:tx>
+          <c:spPr>
+            <a:ln w="6350">
+              <a:solidFill>
+                <a:schemeClr val="accent2">
+                  <a:lumMod val="40000"/>
+                  <a:lumOff val="60000"/>
+                </a:schemeClr>
+              </a:solidFill>
+            </a:ln>
+          </c:spPr>
+          <c:marker>
+            <c:symbol val="circle"/>
+            <c:size val="7"/>
+            <c:spPr>
+              <a:solidFill>
+                <a:schemeClr val="accent2">
+                  <a:lumMod val="40000"/>
+                  <a:lumOff val="60000"/>
+                </a:schemeClr>
+              </a:solidFill>
+              <a:ln w="6350">
+                <a:solidFill>
+                  <a:schemeClr val="accent2">
+                    <a:lumMod val="40000"/>
+                    <a:lumOff val="60000"/>
+                  </a:schemeClr>
+                </a:solidFill>
+              </a:ln>
+            </c:spPr>
+          </c:marker>
+          <c:xVal>
+            <c:numRef>
+              <c:f>'C:\Users\intwa\Downloads\[microwaveLeakageTest5.xlsx]Sheet2'!$B$51:$B$54</c:f>
+              <c:numCache>
+                <c:formatCode>General</c:formatCode>
+                <c:ptCount val="4"/>
+                <c:pt idx="0">
+                  <c:v>11.333333333333334</c:v>
+                </c:pt>
+                <c:pt idx="1">
+                  <c:v>6.4</c:v>
+                </c:pt>
+                <c:pt idx="2">
+                  <c:v>8.2249999999999996</c:v>
+                </c:pt>
+                <c:pt idx="3">
+                  <c:v>5.166666666666667</c:v>
+                </c:pt>
+              </c:numCache>
+            </c:numRef>
+          </c:xVal>
+          <c:yVal>
+            <c:numRef>
+              <c:f>'C:\Users\intwa\Downloads\[microwaveLeakageTest5.xlsx]Sheet2'!$E$51:$E$54</c:f>
+              <c:numCache>
+                <c:formatCode>General</c:formatCode>
+                <c:ptCount val="4"/>
+                <c:pt idx="0">
+                  <c:v>1320</c:v>
+                </c:pt>
+                <c:pt idx="1">
+                  <c:v>1345</c:v>
+                </c:pt>
+                <c:pt idx="2">
+                  <c:v>1327</c:v>
+                </c:pt>
+                <c:pt idx="3">
+                  <c:v>1327</c:v>
+                </c:pt>
+              </c:numCache>
+            </c:numRef>
+          </c:yVal>
+          <c:smooth val="0"/>
+          <c:extLst>
+            <c:ext xmlns:c16="http://schemas.microsoft.com/office/drawing/2014/chart" uri="{C3380CC4-5D6E-409C-BE32-E72D297353CC}">
+              <c16:uniqueId val="{00000000-2512-4F8C-BDDB-7AF32B0C53BB}"/>
+            </c:ext>
+          </c:extLst>
+        </c:ser>
+        <c:ser>
+          <c:idx val="1"/>
+          <c:order val="1"/>
+          <c:tx>
+            <c:v>640W</c:v>
+          </c:tx>
+          <c:spPr>
+            <a:ln w="6350">
+              <a:solidFill>
+                <a:schemeClr val="accent2"/>
+              </a:solidFill>
+            </a:ln>
+          </c:spPr>
+          <c:marker>
+            <c:symbol val="circle"/>
+            <c:size val="7"/>
+            <c:spPr>
+              <a:solidFill>
+                <a:schemeClr val="accent2"/>
+              </a:solidFill>
+              <a:ln>
+                <a:solidFill>
+                  <a:schemeClr val="accent2"/>
+                </a:solidFill>
+              </a:ln>
+            </c:spPr>
+          </c:marker>
+          <c:xVal>
+            <c:numRef>
+              <c:f>'C:\Users\intwa\Downloads\[microwaveLeakageTest5.xlsx]Sheet2'!$B$55:$B$58</c:f>
+              <c:numCache>
+                <c:formatCode>General</c:formatCode>
+                <c:ptCount val="4"/>
+                <c:pt idx="0">
+                  <c:v>2.2000000000000002</c:v>
+                </c:pt>
+                <c:pt idx="1">
+                  <c:v>1.9090909090909092</c:v>
+                </c:pt>
+                <c:pt idx="2">
+                  <c:v>2.5555555555555554</c:v>
+                </c:pt>
+                <c:pt idx="3">
+                  <c:v>2.657142857142857</c:v>
+                </c:pt>
+              </c:numCache>
+            </c:numRef>
+          </c:xVal>
+          <c:yVal>
+            <c:numRef>
+              <c:f>'C:\Users\intwa\Downloads\[microwaveLeakageTest5.xlsx]Sheet2'!$E$55:$E$58</c:f>
+              <c:numCache>
+                <c:formatCode>General</c:formatCode>
+                <c:ptCount val="4"/>
+                <c:pt idx="0">
+                  <c:v>600</c:v>
+                </c:pt>
+                <c:pt idx="1">
+                  <c:v>590</c:v>
+                </c:pt>
+                <c:pt idx="2">
+                  <c:v>590</c:v>
+                </c:pt>
+                <c:pt idx="3">
+                  <c:v>590</c:v>
+                </c:pt>
+              </c:numCache>
+            </c:numRef>
+          </c:yVal>
+          <c:smooth val="0"/>
+          <c:extLst>
+            <c:ext xmlns:c16="http://schemas.microsoft.com/office/drawing/2014/chart" uri="{C3380CC4-5D6E-409C-BE32-E72D297353CC}">
+              <c16:uniqueId val="{00000001-2512-4F8C-BDDB-7AF32B0C53BB}"/>
+            </c:ext>
+          </c:extLst>
+        </c:ser>
+        <c:ser>
+          <c:idx val="2"/>
+          <c:order val="2"/>
+          <c:tx>
+            <c:v>1152W</c:v>
+          </c:tx>
+          <c:spPr>
+            <a:ln w="6350">
+              <a:solidFill>
+                <a:schemeClr val="accent2">
+                  <a:lumMod val="60000"/>
+                  <a:lumOff val="40000"/>
+                </a:schemeClr>
+              </a:solidFill>
+            </a:ln>
+          </c:spPr>
+          <c:marker>
+            <c:symbol val="circle"/>
+            <c:size val="7"/>
+            <c:spPr>
+              <a:solidFill>
+                <a:srgbClr val="EE2E57"/>
+              </a:solidFill>
+              <a:ln w="6350">
+                <a:solidFill>
+                  <a:srgbClr val="EE2E57"/>
+                </a:solidFill>
+              </a:ln>
+            </c:spPr>
+          </c:marker>
+          <c:xVal>
+            <c:numRef>
+              <c:f>'C:\Users\intwa\Downloads\[microwaveLeakageTest5.xlsx]Sheet2'!$B$59:$B$62</c:f>
+              <c:numCache>
+                <c:formatCode>General</c:formatCode>
+                <c:ptCount val="4"/>
+                <c:pt idx="0">
+                  <c:v>2.2000000000000002</c:v>
+                </c:pt>
+                <c:pt idx="1">
+                  <c:v>2.84</c:v>
+                </c:pt>
+                <c:pt idx="2">
+                  <c:v>4.7029702970297027</c:v>
+                </c:pt>
+                <c:pt idx="3">
+                  <c:v>6.5789473684210522</c:v>
+                </c:pt>
+              </c:numCache>
+            </c:numRef>
+          </c:xVal>
+          <c:yVal>
+            <c:numRef>
+              <c:f>'C:\Users\intwa\Downloads\[microwaveLeakageTest5.xlsx]Sheet2'!$E$59:$E$62</c:f>
+              <c:numCache>
+                <c:formatCode>General</c:formatCode>
+                <c:ptCount val="4"/>
+                <c:pt idx="0">
+                  <c:v>1020</c:v>
+                </c:pt>
+                <c:pt idx="1">
+                  <c:v>1015</c:v>
+                </c:pt>
+                <c:pt idx="2">
+                  <c:v>1015</c:v>
+                </c:pt>
+                <c:pt idx="3">
+                  <c:v>1013</c:v>
+                </c:pt>
+              </c:numCache>
+            </c:numRef>
+          </c:yVal>
+          <c:smooth val="0"/>
+          <c:extLst>
+            <c:ext xmlns:c16="http://schemas.microsoft.com/office/drawing/2014/chart" uri="{C3380CC4-5D6E-409C-BE32-E72D297353CC}">
+              <c16:uniqueId val="{00000002-2512-4F8C-BDDB-7AF32B0C53BB}"/>
+            </c:ext>
+          </c:extLst>
+        </c:ser>
+        <c:ser>
+          <c:idx val="3"/>
+          <c:order val="3"/>
+          <c:tx>
+            <c:v>1350W</c:v>
+          </c:tx>
+          <c:spPr>
+            <a:ln w="6350">
+              <a:solidFill>
+                <a:srgbClr val="C0504D">
+                  <a:lumMod val="75000"/>
+                </a:srgbClr>
+              </a:solidFill>
+            </a:ln>
+          </c:spPr>
+          <c:marker>
+            <c:symbol val="circle"/>
+            <c:size val="7"/>
+            <c:spPr>
+              <a:solidFill>
+                <a:schemeClr val="accent2">
+                  <a:lumMod val="75000"/>
+                </a:schemeClr>
+              </a:solidFill>
+              <a:ln>
+                <a:solidFill>
+                  <a:schemeClr val="accent2">
+                    <a:lumMod val="75000"/>
+                  </a:schemeClr>
+                </a:solidFill>
+              </a:ln>
+            </c:spPr>
+          </c:marker>
+          <c:xVal>
+            <c:numRef>
+              <c:f>'C:\Users\intwa\Downloads\[microwaveLeakageTest5.xlsx]Sheet2'!$B$63:$B$65</c:f>
+              <c:numCache>
+                <c:formatCode>General</c:formatCode>
+                <c:ptCount val="3"/>
+                <c:pt idx="0">
+                  <c:v>8</c:v>
+                </c:pt>
+                <c:pt idx="1">
+                  <c:v>12.5</c:v>
+                </c:pt>
+                <c:pt idx="2">
+                  <c:v>2.8571428571428572</c:v>
+                </c:pt>
+              </c:numCache>
+            </c:numRef>
+          </c:xVal>
+          <c:yVal>
+            <c:numRef>
+              <c:f>'C:\Users\intwa\Downloads\[microwaveLeakageTest5.xlsx]Sheet2'!$E$63:$E$65</c:f>
+              <c:numCache>
+                <c:formatCode>General</c:formatCode>
+                <c:ptCount val="3"/>
+                <c:pt idx="0">
+                  <c:v>1100</c:v>
+                </c:pt>
+                <c:pt idx="1">
+                  <c:v>1093</c:v>
+                </c:pt>
+                <c:pt idx="2">
+                  <c:v>1106</c:v>
+                </c:pt>
+              </c:numCache>
+            </c:numRef>
+          </c:yVal>
+          <c:smooth val="0"/>
+          <c:extLst>
+            <c:ext xmlns:c16="http://schemas.microsoft.com/office/drawing/2014/chart" uri="{C3380CC4-5D6E-409C-BE32-E72D297353CC}">
+              <c16:uniqueId val="{00000003-2512-4F8C-BDDB-7AF32B0C53BB}"/>
+            </c:ext>
+          </c:extLst>
+        </c:ser>
+        <c:dLbls>
+          <c:showLegendKey val="0"/>
+          <c:showVal val="0"/>
+          <c:showCatName val="0"/>
+          <c:showSerName val="0"/>
+          <c:showPercent val="0"/>
+          <c:showBubbleSize val="0"/>
+        </c:dLbls>
+        <c:axId val="89700608"/>
+        <c:axId val="89715456"/>
+      </c:scatterChart>
+      <c:valAx>
+        <c:axId val="89700608"/>
+        <c:scaling>
+          <c:orientation val="minMax"/>
+        </c:scaling>
+        <c:delete val="0"/>
+        <c:axPos val="b"/>
+        <c:title>
+          <c:tx>
+            <c:rich>
+              <a:bodyPr/>
+              <a:lstStyle/>
+              <a:p>
+                <a:pPr>
+                  <a:defRPr/>
+                </a:pPr>
+                <a:r>
+                  <a:rPr lang="en-US"/>
+                  <a:t>28/18 Power Ratio</a:t>
+                </a:r>
+              </a:p>
+            </c:rich>
+          </c:tx>
+          <c:overlay val="0"/>
+        </c:title>
+        <c:numFmt formatCode="General" sourceLinked="1"/>
+        <c:majorTickMark val="out"/>
+        <c:minorTickMark val="none"/>
+        <c:tickLblPos val="nextTo"/>
+        <c:crossAx val="89715456"/>
+        <c:crosses val="autoZero"/>
+        <c:crossBetween val="midCat"/>
+      </c:valAx>
+      <c:valAx>
+        <c:axId val="89715456"/>
+        <c:scaling>
+          <c:orientation val="minMax"/>
+        </c:scaling>
+        <c:delete val="0"/>
+        <c:axPos val="l"/>
+        <c:majorGridlines/>
+        <c:title>
+          <c:tx>
+            <c:rich>
+              <a:bodyPr rot="-5400000" vert="horz"/>
+              <a:lstStyle/>
+              <a:p>
+                <a:pPr>
+                  <a:defRPr/>
+                </a:pPr>
+                <a:r>
+                  <a:rPr lang="en-US"/>
+                  <a:t>O6+</a:t>
+                </a:r>
+              </a:p>
+            </c:rich>
+          </c:tx>
+          <c:overlay val="0"/>
+        </c:title>
+        <c:numFmt formatCode="General" sourceLinked="1"/>
+        <c:majorTickMark val="out"/>
+        <c:minorTickMark val="none"/>
+        <c:tickLblPos val="nextTo"/>
+        <c:crossAx val="89700608"/>
+        <c:crosses val="autoZero"/>
+        <c:crossBetween val="midCat"/>
+      </c:valAx>
+    </c:plotArea>
+    <c:legend>
+      <c:legendPos val="r"/>
+      <c:overlay val="0"/>
+    </c:legend>
+    <c:plotVisOnly val="1"/>
+    <c:dispBlanksAs val="gap"/>
+    <c:showDLblsOverMax val="0"/>
+  </c:chart>
+  <c:spPr>
+    <a:ln w="34925">
+      <a:solidFill>
+        <a:schemeClr val="accent2"/>
+      </a:solidFill>
+    </a:ln>
+  </c:spPr>
+  <c:externalData r:id="rId1">
+    <c:autoUpdate val="0"/>
+  </c:externalData>
+</c:chartSpace>
+</file>
+
 <file path=ppt/handoutMasters/handoutMaster1.xml><?xml version="1.0" encoding="utf-8"?>
 <p:handoutMaster xmlns:a="http://schemas.openxmlformats.org/drawingml/2006/main" xmlns:r="http://schemas.openxmlformats.org/officeDocument/2006/relationships" xmlns:p="http://schemas.openxmlformats.org/presentationml/2006/main">
   <p:cSld>
@@ -8899,6 +9345,469 @@
       </p:grpSpPr>
       <p:sp>
         <p:nvSpPr>
+          <p:cNvPr id="46" name="Text Placeholder 45">
+            <a:extLst>
+              <a:ext uri="{FF2B5EF4-FFF2-40B4-BE49-F238E27FC236}">
+                <a16:creationId xmlns:a16="http://schemas.microsoft.com/office/drawing/2014/main" id="{286114AB-30D5-D34A-B576-BF5D187AF412}"/>
+              </a:ext>
+            </a:extLst>
+          </p:cNvPr>
+          <p:cNvSpPr>
+            <a:spLocks noGrp="1"/>
+          </p:cNvSpPr>
+          <p:nvPr>
+            <p:ph type="body" sz="quarter" idx="11"/>
+          </p:nvPr>
+        </p:nvSpPr>
+        <p:spPr>
+          <a:xfrm>
+            <a:off x="635200" y="15525810"/>
+            <a:ext cx="6908601" cy="891334"/>
+          </a:xfrm>
+        </p:spPr>
+        <p:txBody>
+          <a:bodyPr/>
+          <a:lstStyle/>
+          <a:p>
+            <a:r>
+              <a:rPr lang="en-US" dirty="0"/>
+              <a:t>Introduction</a:t>
+            </a:r>
+          </a:p>
+        </p:txBody>
+      </p:sp>
+      <p:sp>
+        <p:nvSpPr>
+          <p:cNvPr id="47" name="Text Placeholder 46">
+            <a:extLst>
+              <a:ext uri="{FF2B5EF4-FFF2-40B4-BE49-F238E27FC236}">
+                <a16:creationId xmlns:a16="http://schemas.microsoft.com/office/drawing/2014/main" id="{5D056A5A-9064-4741-AE18-8DC417A52AF6}"/>
+              </a:ext>
+            </a:extLst>
+          </p:cNvPr>
+          <p:cNvSpPr>
+            <a:spLocks noGrp="1"/>
+          </p:cNvSpPr>
+          <p:nvPr>
+            <p:ph type="body" sz="quarter" idx="20"/>
+          </p:nvPr>
+        </p:nvSpPr>
+        <p:spPr/>
+        <p:txBody>
+          <a:bodyPr/>
+          <a:lstStyle/>
+          <a:p>
+            <a:r>
+              <a:rPr lang="en-US" dirty="0"/>
+              <a:t>Methodology</a:t>
+            </a:r>
+          </a:p>
+        </p:txBody>
+      </p:sp>
+      <p:sp>
+        <p:nvSpPr>
+          <p:cNvPr id="48" name="Text Placeholder 47">
+            <a:extLst>
+              <a:ext uri="{FF2B5EF4-FFF2-40B4-BE49-F238E27FC236}">
+                <a16:creationId xmlns:a16="http://schemas.microsoft.com/office/drawing/2014/main" id="{EE3DF84C-8A0A-2040-8842-5800319B346D}"/>
+              </a:ext>
+            </a:extLst>
+          </p:cNvPr>
+          <p:cNvSpPr>
+            <a:spLocks noGrp="1"/>
+          </p:cNvSpPr>
+          <p:nvPr>
+            <p:ph type="body" sz="quarter" idx="21"/>
+          </p:nvPr>
+        </p:nvSpPr>
+        <p:spPr>
+          <a:xfrm>
+            <a:off x="7966175" y="16613087"/>
+            <a:ext cx="12198751" cy="800197"/>
+          </a:xfrm>
+        </p:spPr>
+        <p:txBody>
+          <a:bodyPr/>
+          <a:lstStyle/>
+          <a:p>
+            <a:endParaRPr lang="en-US" dirty="0"/>
+          </a:p>
+        </p:txBody>
+      </p:sp>
+      <p:sp>
+        <p:nvSpPr>
+          <p:cNvPr id="49" name="Text Placeholder 48">
+            <a:extLst>
+              <a:ext uri="{FF2B5EF4-FFF2-40B4-BE49-F238E27FC236}">
+                <a16:creationId xmlns:a16="http://schemas.microsoft.com/office/drawing/2014/main" id="{F019DC3C-02A0-B140-9422-95A8BF7C064F}"/>
+              </a:ext>
+            </a:extLst>
+          </p:cNvPr>
+          <p:cNvSpPr>
+            <a:spLocks noGrp="1"/>
+          </p:cNvSpPr>
+          <p:nvPr>
+            <p:ph type="body" sz="quarter" idx="22"/>
+          </p:nvPr>
+        </p:nvSpPr>
+        <p:spPr>
+          <a:xfrm>
+            <a:off x="8011771" y="18811280"/>
+            <a:ext cx="14246124" cy="891334"/>
+          </a:xfrm>
+        </p:spPr>
+        <p:txBody>
+          <a:bodyPr/>
+          <a:lstStyle/>
+          <a:p>
+            <a:r>
+              <a:rPr lang="en-US" dirty="0"/>
+              <a:t>Power Ratio Results</a:t>
+            </a:r>
+          </a:p>
+        </p:txBody>
+      </p:sp>
+      <p:sp>
+        <p:nvSpPr>
+          <p:cNvPr id="50" name="Text Placeholder 49">
+            <a:extLst>
+              <a:ext uri="{FF2B5EF4-FFF2-40B4-BE49-F238E27FC236}">
+                <a16:creationId xmlns:a16="http://schemas.microsoft.com/office/drawing/2014/main" id="{E20E3472-4D95-F848-BA65-8A6EE060C235}"/>
+              </a:ext>
+            </a:extLst>
+          </p:cNvPr>
+          <p:cNvSpPr>
+            <a:spLocks noGrp="1"/>
+          </p:cNvSpPr>
+          <p:nvPr>
+            <p:ph type="body" sz="quarter" idx="23"/>
+          </p:nvPr>
+        </p:nvSpPr>
+        <p:spPr>
+          <a:xfrm>
+            <a:off x="7966174" y="30889399"/>
+            <a:ext cx="6908601" cy="830975"/>
+          </a:xfrm>
+        </p:spPr>
+        <p:txBody>
+          <a:bodyPr/>
+          <a:lstStyle/>
+          <a:p>
+            <a:endParaRPr lang="en-US" dirty="0"/>
+          </a:p>
+        </p:txBody>
+      </p:sp>
+      <p:sp>
+        <p:nvSpPr>
+          <p:cNvPr id="51" name="Text Placeholder 50">
+            <a:extLst>
+              <a:ext uri="{FF2B5EF4-FFF2-40B4-BE49-F238E27FC236}">
+                <a16:creationId xmlns:a16="http://schemas.microsoft.com/office/drawing/2014/main" id="{0A779AD3-032F-EB41-8895-AF29183B78D7}"/>
+              </a:ext>
+            </a:extLst>
+          </p:cNvPr>
+          <p:cNvSpPr>
+            <a:spLocks noGrp="1"/>
+          </p:cNvSpPr>
+          <p:nvPr>
+            <p:ph type="body" sz="quarter" idx="24"/>
+          </p:nvPr>
+        </p:nvSpPr>
+        <p:spPr>
+          <a:xfrm>
+            <a:off x="7966176" y="8019680"/>
+            <a:ext cx="21551586" cy="891334"/>
+          </a:xfrm>
+        </p:spPr>
+        <p:txBody>
+          <a:bodyPr/>
+          <a:lstStyle/>
+          <a:p>
+            <a:r>
+              <a:rPr lang="en-US" dirty="0"/>
+              <a:t>Experimental Setup</a:t>
+            </a:r>
+          </a:p>
+        </p:txBody>
+      </p:sp>
+      <p:sp>
+        <p:nvSpPr>
+          <p:cNvPr id="52" name="Text Placeholder 51">
+            <a:extLst>
+              <a:ext uri="{FF2B5EF4-FFF2-40B4-BE49-F238E27FC236}">
+                <a16:creationId xmlns:a16="http://schemas.microsoft.com/office/drawing/2014/main" id="{3C97E0B7-B816-8947-B695-D3F4DF9A1D0D}"/>
+              </a:ext>
+            </a:extLst>
+          </p:cNvPr>
+          <p:cNvSpPr>
+            <a:spLocks noGrp="1"/>
+          </p:cNvSpPr>
+          <p:nvPr>
+            <p:ph type="body" sz="quarter" idx="25"/>
+          </p:nvPr>
+        </p:nvSpPr>
+        <p:spPr>
+          <a:xfrm>
+            <a:off x="22698566" y="18818023"/>
+            <a:ext cx="6907325" cy="891334"/>
+          </a:xfrm>
+        </p:spPr>
+        <p:txBody>
+          <a:bodyPr/>
+          <a:lstStyle/>
+          <a:p>
+            <a:r>
+              <a:rPr lang="en-US" dirty="0"/>
+              <a:t>Conclusion</a:t>
+            </a:r>
+          </a:p>
+        </p:txBody>
+      </p:sp>
+      <p:sp>
+        <p:nvSpPr>
+          <p:cNvPr id="53" name="Text Placeholder 52">
+            <a:extLst>
+              <a:ext uri="{FF2B5EF4-FFF2-40B4-BE49-F238E27FC236}">
+                <a16:creationId xmlns:a16="http://schemas.microsoft.com/office/drawing/2014/main" id="{2C878CC6-AACC-9647-BA5F-D99707D05124}"/>
+              </a:ext>
+            </a:extLst>
+          </p:cNvPr>
+          <p:cNvSpPr>
+            <a:spLocks noGrp="1"/>
+          </p:cNvSpPr>
+          <p:nvPr>
+            <p:ph type="body" sz="quarter" idx="26"/>
+          </p:nvPr>
+        </p:nvSpPr>
+        <p:spPr>
+          <a:xfrm>
+            <a:off x="22635765" y="19868168"/>
+            <a:ext cx="6907325" cy="830975"/>
+          </a:xfrm>
+        </p:spPr>
+        <p:txBody>
+          <a:bodyPr/>
+          <a:lstStyle/>
+          <a:p>
+            <a:endParaRPr lang="en-US" dirty="0"/>
+          </a:p>
+        </p:txBody>
+      </p:sp>
+      <p:sp>
+        <p:nvSpPr>
+          <p:cNvPr id="54" name="Text Placeholder 53">
+            <a:extLst>
+              <a:ext uri="{FF2B5EF4-FFF2-40B4-BE49-F238E27FC236}">
+                <a16:creationId xmlns:a16="http://schemas.microsoft.com/office/drawing/2014/main" id="{CAD0C4E8-9E32-644D-9680-AB8E28EE55EA}"/>
+              </a:ext>
+            </a:extLst>
+          </p:cNvPr>
+          <p:cNvSpPr>
+            <a:spLocks noGrp="1"/>
+          </p:cNvSpPr>
+          <p:nvPr>
+            <p:ph type="body" sz="quarter" idx="27"/>
+          </p:nvPr>
+        </p:nvSpPr>
+        <p:spPr>
+          <a:xfrm>
+            <a:off x="22709256" y="24681262"/>
+            <a:ext cx="6907325" cy="891334"/>
+          </a:xfrm>
+        </p:spPr>
+        <p:txBody>
+          <a:bodyPr/>
+          <a:lstStyle/>
+          <a:p>
+            <a:r>
+              <a:rPr lang="en-US" dirty="0"/>
+              <a:t>Future Work</a:t>
+            </a:r>
+          </a:p>
+        </p:txBody>
+      </p:sp>
+      <p:sp>
+        <p:nvSpPr>
+          <p:cNvPr id="55" name="Text Placeholder 54">
+            <a:extLst>
+              <a:ext uri="{FF2B5EF4-FFF2-40B4-BE49-F238E27FC236}">
+                <a16:creationId xmlns:a16="http://schemas.microsoft.com/office/drawing/2014/main" id="{9753B3C2-4D25-7F41-BBC3-CF776DA4045F}"/>
+              </a:ext>
+            </a:extLst>
+          </p:cNvPr>
+          <p:cNvSpPr>
+            <a:spLocks noGrp="1"/>
+          </p:cNvSpPr>
+          <p:nvPr>
+            <p:ph type="body" sz="quarter" idx="28"/>
+          </p:nvPr>
+        </p:nvSpPr>
+        <p:spPr>
+          <a:xfrm>
+            <a:off x="22763375" y="25934181"/>
+            <a:ext cx="6853206" cy="830975"/>
+          </a:xfrm>
+        </p:spPr>
+        <p:txBody>
+          <a:bodyPr/>
+          <a:lstStyle/>
+          <a:p>
+            <a:endParaRPr lang="en-US" dirty="0"/>
+          </a:p>
+        </p:txBody>
+      </p:sp>
+      <p:sp>
+        <p:nvSpPr>
+          <p:cNvPr id="56" name="Text Placeholder 55">
+            <a:extLst>
+              <a:ext uri="{FF2B5EF4-FFF2-40B4-BE49-F238E27FC236}">
+                <a16:creationId xmlns:a16="http://schemas.microsoft.com/office/drawing/2014/main" id="{0C9FFCF2-4FCB-8A44-A58E-B7FA5F64CCC6}"/>
+              </a:ext>
+            </a:extLst>
+          </p:cNvPr>
+          <p:cNvSpPr>
+            <a:spLocks noGrp="1"/>
+          </p:cNvSpPr>
+          <p:nvPr>
+            <p:ph type="body" sz="quarter" idx="29"/>
+          </p:nvPr>
+        </p:nvSpPr>
+        <p:spPr>
+          <a:xfrm>
+            <a:off x="22635765" y="35717255"/>
+            <a:ext cx="6907325" cy="891334"/>
+          </a:xfrm>
+        </p:spPr>
+        <p:txBody>
+          <a:bodyPr/>
+          <a:lstStyle/>
+          <a:p>
+            <a:r>
+              <a:rPr lang="en-US" dirty="0"/>
+              <a:t>References</a:t>
+            </a:r>
+          </a:p>
+        </p:txBody>
+      </p:sp>
+      <p:sp>
+        <p:nvSpPr>
+          <p:cNvPr id="57" name="Text Placeholder 56">
+            <a:extLst>
+              <a:ext uri="{FF2B5EF4-FFF2-40B4-BE49-F238E27FC236}">
+                <a16:creationId xmlns:a16="http://schemas.microsoft.com/office/drawing/2014/main" id="{5CDC52D9-26D8-0B45-8C4B-7E40A410F011}"/>
+              </a:ext>
+            </a:extLst>
+          </p:cNvPr>
+          <p:cNvSpPr>
+            <a:spLocks noGrp="1"/>
+          </p:cNvSpPr>
+          <p:nvPr>
+            <p:ph type="body" sz="quarter" idx="30"/>
+          </p:nvPr>
+        </p:nvSpPr>
+        <p:spPr>
+          <a:xfrm>
+            <a:off x="22698566" y="37015300"/>
+            <a:ext cx="6910785" cy="830975"/>
+          </a:xfrm>
+        </p:spPr>
+        <p:txBody>
+          <a:bodyPr/>
+          <a:lstStyle/>
+          <a:p>
+            <a:endParaRPr lang="en-US" dirty="0"/>
+          </a:p>
+        </p:txBody>
+      </p:sp>
+      <p:sp>
+        <p:nvSpPr>
+          <p:cNvPr id="58" name="Text Placeholder 57">
+            <a:extLst>
+              <a:ext uri="{FF2B5EF4-FFF2-40B4-BE49-F238E27FC236}">
+                <a16:creationId xmlns:a16="http://schemas.microsoft.com/office/drawing/2014/main" id="{C19EA1CD-8D4D-E343-BC83-836468A253ED}"/>
+              </a:ext>
+            </a:extLst>
+          </p:cNvPr>
+          <p:cNvSpPr>
+            <a:spLocks noGrp="1"/>
+          </p:cNvSpPr>
+          <p:nvPr>
+            <p:ph type="body" sz="quarter" idx="96"/>
+          </p:nvPr>
+        </p:nvSpPr>
+        <p:spPr>
+          <a:xfrm>
+            <a:off x="621629" y="21268894"/>
+            <a:ext cx="6914059" cy="1138751"/>
+          </a:xfrm>
+        </p:spPr>
+        <p:txBody>
+          <a:bodyPr/>
+          <a:lstStyle/>
+          <a:p>
+            <a:r>
+              <a:rPr lang="en-US" dirty="0"/>
+              <a:t>Add diagram of set up of extraction beamline with distances</a:t>
+            </a:r>
+          </a:p>
+        </p:txBody>
+      </p:sp>
+      <p:sp>
+        <p:nvSpPr>
+          <p:cNvPr id="63" name="Picture Placeholder 62">
+            <a:extLst>
+              <a:ext uri="{FF2B5EF4-FFF2-40B4-BE49-F238E27FC236}">
+                <a16:creationId xmlns:a16="http://schemas.microsoft.com/office/drawing/2014/main" id="{9B2E9923-F9EF-A948-986F-9F3E04B8056B}"/>
+              </a:ext>
+            </a:extLst>
+          </p:cNvPr>
+          <p:cNvSpPr>
+            <a:spLocks noGrp="1"/>
+          </p:cNvSpPr>
+          <p:nvPr>
+            <p:ph type="pic" sz="quarter" idx="154"/>
+          </p:nvPr>
+        </p:nvSpPr>
+        <p:spPr/>
+      </p:sp>
+      <p:sp>
+        <p:nvSpPr>
+          <p:cNvPr id="64" name="Picture Placeholder 63">
+            <a:extLst>
+              <a:ext uri="{FF2B5EF4-FFF2-40B4-BE49-F238E27FC236}">
+                <a16:creationId xmlns:a16="http://schemas.microsoft.com/office/drawing/2014/main" id="{A0FD862B-3378-1A4D-B3F8-CAF99EA27905}"/>
+              </a:ext>
+            </a:extLst>
+          </p:cNvPr>
+          <p:cNvSpPr>
+            <a:spLocks noGrp="1"/>
+          </p:cNvSpPr>
+          <p:nvPr>
+            <p:ph type="pic" sz="quarter" idx="155"/>
+          </p:nvPr>
+        </p:nvSpPr>
+        <p:spPr/>
+      </p:sp>
+      <p:sp>
+        <p:nvSpPr>
+          <p:cNvPr id="65" name="Picture Placeholder 64">
+            <a:extLst>
+              <a:ext uri="{FF2B5EF4-FFF2-40B4-BE49-F238E27FC236}">
+                <a16:creationId xmlns:a16="http://schemas.microsoft.com/office/drawing/2014/main" id="{31C6CA46-52B1-4147-8928-196BB81D1982}"/>
+              </a:ext>
+            </a:extLst>
+          </p:cNvPr>
+          <p:cNvSpPr>
+            <a:spLocks noGrp="1"/>
+          </p:cNvSpPr>
+          <p:nvPr>
+            <p:ph type="pic" sz="quarter" idx="156"/>
+          </p:nvPr>
+        </p:nvSpPr>
+        <p:spPr/>
+      </p:sp>
+      <p:sp>
+        <p:nvSpPr>
           <p:cNvPr id="23" name="Text Placeholder 22">
             <a:extLst>
               <a:ext uri="{FF2B5EF4-FFF2-40B4-BE49-F238E27FC236}">
@@ -8913,7 +9822,12 @@
             <p:ph type="body" sz="quarter" idx="10"/>
           </p:nvPr>
         </p:nvSpPr>
-        <p:spPr/>
+        <p:spPr>
+          <a:xfrm>
+            <a:off x="657438" y="9206151"/>
+            <a:ext cx="6914059" cy="830975"/>
+          </a:xfrm>
+        </p:spPr>
         <p:txBody>
           <a:bodyPr/>
           <a:lstStyle/>
@@ -8921,485 +9835,6 @@
             <a:endParaRPr lang="en-US" dirty="0"/>
           </a:p>
         </p:txBody>
-      </p:sp>
-      <p:sp>
-        <p:nvSpPr>
-          <p:cNvPr id="46" name="Text Placeholder 45">
-            <a:extLst>
-              <a:ext uri="{FF2B5EF4-FFF2-40B4-BE49-F238E27FC236}">
-                <a16:creationId xmlns:a16="http://schemas.microsoft.com/office/drawing/2014/main" id="{286114AB-30D5-D34A-B576-BF5D187AF412}"/>
-              </a:ext>
-            </a:extLst>
-          </p:cNvPr>
-          <p:cNvSpPr>
-            <a:spLocks noGrp="1"/>
-          </p:cNvSpPr>
-          <p:nvPr>
-            <p:ph type="body" sz="quarter" idx="11"/>
-          </p:nvPr>
-        </p:nvSpPr>
-        <p:spPr/>
-        <p:txBody>
-          <a:bodyPr/>
-          <a:lstStyle/>
-          <a:p>
-            <a:r>
-              <a:rPr lang="en-US" dirty="0"/>
-              <a:t>Abstract</a:t>
-            </a:r>
-          </a:p>
-        </p:txBody>
-      </p:sp>
-      <p:sp>
-        <p:nvSpPr>
-          <p:cNvPr id="47" name="Text Placeholder 46">
-            <a:extLst>
-              <a:ext uri="{FF2B5EF4-FFF2-40B4-BE49-F238E27FC236}">
-                <a16:creationId xmlns:a16="http://schemas.microsoft.com/office/drawing/2014/main" id="{5D056A5A-9064-4741-AE18-8DC417A52AF6}"/>
-              </a:ext>
-            </a:extLst>
-          </p:cNvPr>
-          <p:cNvSpPr>
-            <a:spLocks noGrp="1"/>
-          </p:cNvSpPr>
-          <p:nvPr>
-            <p:ph type="body" sz="quarter" idx="20"/>
-          </p:nvPr>
-        </p:nvSpPr>
-        <p:spPr/>
-        <p:txBody>
-          <a:bodyPr/>
-          <a:lstStyle/>
-          <a:p>
-            <a:r>
-              <a:rPr lang="en-US" dirty="0"/>
-              <a:t>Methodology</a:t>
-            </a:r>
-          </a:p>
-        </p:txBody>
-      </p:sp>
-      <p:sp>
-        <p:nvSpPr>
-          <p:cNvPr id="48" name="Text Placeholder 47">
-            <a:extLst>
-              <a:ext uri="{FF2B5EF4-FFF2-40B4-BE49-F238E27FC236}">
-                <a16:creationId xmlns:a16="http://schemas.microsoft.com/office/drawing/2014/main" id="{EE3DF84C-8A0A-2040-8842-5800319B346D}"/>
-              </a:ext>
-            </a:extLst>
-          </p:cNvPr>
-          <p:cNvSpPr>
-            <a:spLocks noGrp="1"/>
-          </p:cNvSpPr>
-          <p:nvPr>
-            <p:ph type="body" sz="quarter" idx="21"/>
-          </p:nvPr>
-        </p:nvSpPr>
-        <p:spPr>
-          <a:xfrm>
-            <a:off x="7966175" y="16613087"/>
-            <a:ext cx="6908601" cy="1612727"/>
-          </a:xfrm>
-        </p:spPr>
-        <p:txBody>
-          <a:bodyPr/>
-          <a:lstStyle/>
-          <a:p>
-            <a:r>
-              <a:rPr lang="en-US" dirty="0"/>
-              <a:t>Data taken (should be two different boxes)</a:t>
-            </a:r>
-          </a:p>
-          <a:p>
-            <a:r>
-              <a:rPr lang="en-US" dirty="0"/>
-              <a:t>Power ratios</a:t>
-            </a:r>
-          </a:p>
-          <a:p>
-            <a:r>
-              <a:rPr lang="en-US" dirty="0"/>
-              <a:t>Magnet field changes</a:t>
-            </a:r>
-          </a:p>
-        </p:txBody>
-      </p:sp>
-      <p:sp>
-        <p:nvSpPr>
-          <p:cNvPr id="49" name="Text Placeholder 48">
-            <a:extLst>
-              <a:ext uri="{FF2B5EF4-FFF2-40B4-BE49-F238E27FC236}">
-                <a16:creationId xmlns:a16="http://schemas.microsoft.com/office/drawing/2014/main" id="{F019DC3C-02A0-B140-9422-95A8BF7C064F}"/>
-              </a:ext>
-            </a:extLst>
-          </p:cNvPr>
-          <p:cNvSpPr>
-            <a:spLocks noGrp="1"/>
-          </p:cNvSpPr>
-          <p:nvPr>
-            <p:ph type="body" sz="quarter" idx="22"/>
-          </p:nvPr>
-        </p:nvSpPr>
-        <p:spPr>
-          <a:xfrm>
-            <a:off x="7966176" y="15488973"/>
-            <a:ext cx="6908601" cy="891334"/>
-          </a:xfrm>
-        </p:spPr>
-        <p:txBody>
-          <a:bodyPr/>
-          <a:lstStyle/>
-          <a:p>
-            <a:r>
-              <a:rPr lang="en-US" dirty="0"/>
-              <a:t>Results</a:t>
-            </a:r>
-          </a:p>
-        </p:txBody>
-      </p:sp>
-      <p:sp>
-        <p:nvSpPr>
-          <p:cNvPr id="50" name="Text Placeholder 49">
-            <a:extLst>
-              <a:ext uri="{FF2B5EF4-FFF2-40B4-BE49-F238E27FC236}">
-                <a16:creationId xmlns:a16="http://schemas.microsoft.com/office/drawing/2014/main" id="{E20E3472-4D95-F848-BA65-8A6EE060C235}"/>
-              </a:ext>
-            </a:extLst>
-          </p:cNvPr>
-          <p:cNvSpPr>
-            <a:spLocks noGrp="1"/>
-          </p:cNvSpPr>
-          <p:nvPr>
-            <p:ph type="body" sz="quarter" idx="23"/>
-          </p:nvPr>
-        </p:nvSpPr>
-        <p:spPr>
-          <a:xfrm>
-            <a:off x="15303699" y="20902723"/>
-            <a:ext cx="6908601" cy="830975"/>
-          </a:xfrm>
-        </p:spPr>
-        <p:txBody>
-          <a:bodyPr/>
-          <a:lstStyle/>
-          <a:p>
-            <a:endParaRPr lang="en-US" dirty="0"/>
-          </a:p>
-        </p:txBody>
-      </p:sp>
-      <p:sp>
-        <p:nvSpPr>
-          <p:cNvPr id="51" name="Text Placeholder 50">
-            <a:extLst>
-              <a:ext uri="{FF2B5EF4-FFF2-40B4-BE49-F238E27FC236}">
-                <a16:creationId xmlns:a16="http://schemas.microsoft.com/office/drawing/2014/main" id="{0A779AD3-032F-EB41-8895-AF29183B78D7}"/>
-              </a:ext>
-            </a:extLst>
-          </p:cNvPr>
-          <p:cNvSpPr>
-            <a:spLocks noGrp="1"/>
-          </p:cNvSpPr>
-          <p:nvPr>
-            <p:ph type="body" sz="quarter" idx="24"/>
-          </p:nvPr>
-        </p:nvSpPr>
-        <p:spPr>
-          <a:xfrm>
-            <a:off x="7966176" y="8019680"/>
-            <a:ext cx="14246124" cy="891334"/>
-          </a:xfrm>
-        </p:spPr>
-        <p:txBody>
-          <a:bodyPr/>
-          <a:lstStyle/>
-          <a:p>
-            <a:r>
-              <a:rPr lang="en-US" dirty="0"/>
-              <a:t>Experimental Setup</a:t>
-            </a:r>
-          </a:p>
-        </p:txBody>
-      </p:sp>
-      <p:sp>
-        <p:nvSpPr>
-          <p:cNvPr id="52" name="Text Placeholder 51">
-            <a:extLst>
-              <a:ext uri="{FF2B5EF4-FFF2-40B4-BE49-F238E27FC236}">
-                <a16:creationId xmlns:a16="http://schemas.microsoft.com/office/drawing/2014/main" id="{3C97E0B7-B816-8947-B695-D3F4DF9A1D0D}"/>
-              </a:ext>
-            </a:extLst>
-          </p:cNvPr>
-          <p:cNvSpPr>
-            <a:spLocks noGrp="1"/>
-          </p:cNvSpPr>
-          <p:nvPr>
-            <p:ph type="body" sz="quarter" idx="25"/>
-          </p:nvPr>
-        </p:nvSpPr>
-        <p:spPr/>
-        <p:txBody>
-          <a:bodyPr/>
-          <a:lstStyle/>
-          <a:p>
-            <a:r>
-              <a:rPr lang="en-US" dirty="0"/>
-              <a:t>Conclusion</a:t>
-            </a:r>
-          </a:p>
-        </p:txBody>
-      </p:sp>
-      <p:sp>
-        <p:nvSpPr>
-          <p:cNvPr id="53" name="Text Placeholder 52">
-            <a:extLst>
-              <a:ext uri="{FF2B5EF4-FFF2-40B4-BE49-F238E27FC236}">
-                <a16:creationId xmlns:a16="http://schemas.microsoft.com/office/drawing/2014/main" id="{2C878CC6-AACC-9647-BA5F-D99707D05124}"/>
-              </a:ext>
-            </a:extLst>
-          </p:cNvPr>
-          <p:cNvSpPr>
-            <a:spLocks noGrp="1"/>
-          </p:cNvSpPr>
-          <p:nvPr>
-            <p:ph type="body" sz="quarter" idx="26"/>
-          </p:nvPr>
-        </p:nvSpPr>
-        <p:spPr/>
-        <p:txBody>
-          <a:bodyPr/>
-          <a:lstStyle/>
-          <a:p>
-            <a:endParaRPr lang="en-US"/>
-          </a:p>
-        </p:txBody>
-      </p:sp>
-      <p:sp>
-        <p:nvSpPr>
-          <p:cNvPr id="54" name="Text Placeholder 53">
-            <a:extLst>
-              <a:ext uri="{FF2B5EF4-FFF2-40B4-BE49-F238E27FC236}">
-                <a16:creationId xmlns:a16="http://schemas.microsoft.com/office/drawing/2014/main" id="{CAD0C4E8-9E32-644D-9680-AB8E28EE55EA}"/>
-              </a:ext>
-            </a:extLst>
-          </p:cNvPr>
-          <p:cNvSpPr>
-            <a:spLocks noGrp="1"/>
-          </p:cNvSpPr>
-          <p:nvPr>
-            <p:ph type="body" sz="quarter" idx="27"/>
-          </p:nvPr>
-        </p:nvSpPr>
-        <p:spPr/>
-        <p:txBody>
-          <a:bodyPr/>
-          <a:lstStyle/>
-          <a:p>
-            <a:r>
-              <a:rPr lang="en-US" dirty="0"/>
-              <a:t>Future Work</a:t>
-            </a:r>
-          </a:p>
-        </p:txBody>
-      </p:sp>
-      <p:sp>
-        <p:nvSpPr>
-          <p:cNvPr id="55" name="Text Placeholder 54">
-            <a:extLst>
-              <a:ext uri="{FF2B5EF4-FFF2-40B4-BE49-F238E27FC236}">
-                <a16:creationId xmlns:a16="http://schemas.microsoft.com/office/drawing/2014/main" id="{9753B3C2-4D25-7F41-BBC3-CF776DA4045F}"/>
-              </a:ext>
-            </a:extLst>
-          </p:cNvPr>
-          <p:cNvSpPr>
-            <a:spLocks noGrp="1"/>
-          </p:cNvSpPr>
-          <p:nvPr>
-            <p:ph type="body" sz="quarter" idx="28"/>
-          </p:nvPr>
-        </p:nvSpPr>
-        <p:spPr/>
-        <p:txBody>
-          <a:bodyPr/>
-          <a:lstStyle/>
-          <a:p>
-            <a:endParaRPr lang="en-US"/>
-          </a:p>
-        </p:txBody>
-      </p:sp>
-      <p:sp>
-        <p:nvSpPr>
-          <p:cNvPr id="56" name="Text Placeholder 55">
-            <a:extLst>
-              <a:ext uri="{FF2B5EF4-FFF2-40B4-BE49-F238E27FC236}">
-                <a16:creationId xmlns:a16="http://schemas.microsoft.com/office/drawing/2014/main" id="{0C9FFCF2-4FCB-8A44-A58E-B7FA5F64CCC6}"/>
-              </a:ext>
-            </a:extLst>
-          </p:cNvPr>
-          <p:cNvSpPr>
-            <a:spLocks noGrp="1"/>
-          </p:cNvSpPr>
-          <p:nvPr>
-            <p:ph type="body" sz="quarter" idx="29"/>
-          </p:nvPr>
-        </p:nvSpPr>
-        <p:spPr/>
-        <p:txBody>
-          <a:bodyPr/>
-          <a:lstStyle/>
-          <a:p>
-            <a:r>
-              <a:rPr lang="en-US" dirty="0"/>
-              <a:t>References</a:t>
-            </a:r>
-          </a:p>
-        </p:txBody>
-      </p:sp>
-      <p:sp>
-        <p:nvSpPr>
-          <p:cNvPr id="57" name="Text Placeholder 56">
-            <a:extLst>
-              <a:ext uri="{FF2B5EF4-FFF2-40B4-BE49-F238E27FC236}">
-                <a16:creationId xmlns:a16="http://schemas.microsoft.com/office/drawing/2014/main" id="{5CDC52D9-26D8-0B45-8C4B-7E40A410F011}"/>
-              </a:ext>
-            </a:extLst>
-          </p:cNvPr>
-          <p:cNvSpPr>
-            <a:spLocks noGrp="1"/>
-          </p:cNvSpPr>
-          <p:nvPr>
-            <p:ph type="body" sz="quarter" idx="30"/>
-          </p:nvPr>
-        </p:nvSpPr>
-        <p:spPr/>
-        <p:txBody>
-          <a:bodyPr/>
-          <a:lstStyle/>
-          <a:p>
-            <a:endParaRPr lang="en-US" dirty="0"/>
-          </a:p>
-        </p:txBody>
-      </p:sp>
-      <p:sp>
-        <p:nvSpPr>
-          <p:cNvPr id="58" name="Text Placeholder 57">
-            <a:extLst>
-              <a:ext uri="{FF2B5EF4-FFF2-40B4-BE49-F238E27FC236}">
-                <a16:creationId xmlns:a16="http://schemas.microsoft.com/office/drawing/2014/main" id="{C19EA1CD-8D4D-E343-BC83-836468A253ED}"/>
-              </a:ext>
-            </a:extLst>
-          </p:cNvPr>
-          <p:cNvSpPr>
-            <a:spLocks noGrp="1"/>
-          </p:cNvSpPr>
-          <p:nvPr>
-            <p:ph type="body" sz="quarter" idx="96"/>
-          </p:nvPr>
-        </p:nvSpPr>
-        <p:spPr>
-          <a:xfrm>
-            <a:off x="621629" y="21268894"/>
-            <a:ext cx="6914059" cy="1138751"/>
-          </a:xfrm>
-        </p:spPr>
-        <p:txBody>
-          <a:bodyPr/>
-          <a:lstStyle/>
-          <a:p>
-            <a:r>
-              <a:rPr lang="en-US" dirty="0"/>
-              <a:t>Add diagram of set up of extraction beamline with distances</a:t>
-            </a:r>
-          </a:p>
-        </p:txBody>
-      </p:sp>
-      <p:sp>
-        <p:nvSpPr>
-          <p:cNvPr id="61" name="Picture Placeholder 60">
-            <a:extLst>
-              <a:ext uri="{FF2B5EF4-FFF2-40B4-BE49-F238E27FC236}">
-                <a16:creationId xmlns:a16="http://schemas.microsoft.com/office/drawing/2014/main" id="{AC480137-4287-D34E-82E7-F6FC3ACF6E65}"/>
-              </a:ext>
-            </a:extLst>
-          </p:cNvPr>
-          <p:cNvSpPr>
-            <a:spLocks noGrp="1"/>
-          </p:cNvSpPr>
-          <p:nvPr>
-            <p:ph type="pic" sz="quarter" idx="152"/>
-          </p:nvPr>
-        </p:nvSpPr>
-        <p:spPr/>
-      </p:sp>
-      <p:sp>
-        <p:nvSpPr>
-          <p:cNvPr id="62" name="Picture Placeholder 61">
-            <a:extLst>
-              <a:ext uri="{FF2B5EF4-FFF2-40B4-BE49-F238E27FC236}">
-                <a16:creationId xmlns:a16="http://schemas.microsoft.com/office/drawing/2014/main" id="{4D825008-AEB6-BC48-95EB-6D98C30AD66B}"/>
-              </a:ext>
-            </a:extLst>
-          </p:cNvPr>
-          <p:cNvSpPr>
-            <a:spLocks noGrp="1"/>
-          </p:cNvSpPr>
-          <p:nvPr>
-            <p:ph type="pic" sz="quarter" idx="153"/>
-          </p:nvPr>
-        </p:nvSpPr>
-        <p:spPr/>
-      </p:sp>
-      <p:sp>
-        <p:nvSpPr>
-          <p:cNvPr id="63" name="Picture Placeholder 62">
-            <a:extLst>
-              <a:ext uri="{FF2B5EF4-FFF2-40B4-BE49-F238E27FC236}">
-                <a16:creationId xmlns:a16="http://schemas.microsoft.com/office/drawing/2014/main" id="{9B2E9923-F9EF-A948-986F-9F3E04B8056B}"/>
-              </a:ext>
-            </a:extLst>
-          </p:cNvPr>
-          <p:cNvSpPr>
-            <a:spLocks noGrp="1"/>
-          </p:cNvSpPr>
-          <p:nvPr>
-            <p:ph type="pic" sz="quarter" idx="154"/>
-          </p:nvPr>
-        </p:nvSpPr>
-        <p:spPr/>
-      </p:sp>
-      <p:sp>
-        <p:nvSpPr>
-          <p:cNvPr id="64" name="Picture Placeholder 63">
-            <a:extLst>
-              <a:ext uri="{FF2B5EF4-FFF2-40B4-BE49-F238E27FC236}">
-                <a16:creationId xmlns:a16="http://schemas.microsoft.com/office/drawing/2014/main" id="{A0FD862B-3378-1A4D-B3F8-CAF99EA27905}"/>
-              </a:ext>
-            </a:extLst>
-          </p:cNvPr>
-          <p:cNvSpPr>
-            <a:spLocks noGrp="1"/>
-          </p:cNvSpPr>
-          <p:nvPr>
-            <p:ph type="pic" sz="quarter" idx="155"/>
-          </p:nvPr>
-        </p:nvSpPr>
-        <p:spPr/>
-      </p:sp>
-      <p:sp>
-        <p:nvSpPr>
-          <p:cNvPr id="65" name="Picture Placeholder 64">
-            <a:extLst>
-              <a:ext uri="{FF2B5EF4-FFF2-40B4-BE49-F238E27FC236}">
-                <a16:creationId xmlns:a16="http://schemas.microsoft.com/office/drawing/2014/main" id="{31C6CA46-52B1-4147-8928-196BB81D1982}"/>
-              </a:ext>
-            </a:extLst>
-          </p:cNvPr>
-          <p:cNvSpPr>
-            <a:spLocks noGrp="1"/>
-          </p:cNvSpPr>
-          <p:nvPr>
-            <p:ph type="pic" sz="quarter" idx="156"/>
-          </p:nvPr>
-        </p:nvSpPr>
-        <p:spPr/>
       </p:sp>
       <p:sp>
         <p:nvSpPr>
@@ -9544,196 +9979,6 @@
       </p:sp>
       <p:sp>
         <p:nvSpPr>
-          <p:cNvPr id="6" name="Text Placeholder 48">
-            <a:extLst>
-              <a:ext uri="{FF2B5EF4-FFF2-40B4-BE49-F238E27FC236}">
-                <a16:creationId xmlns:a16="http://schemas.microsoft.com/office/drawing/2014/main" id="{C919C9ED-6E42-05BE-EBA0-DCC694E63F69}"/>
-              </a:ext>
-            </a:extLst>
-          </p:cNvPr>
-          <p:cNvSpPr txBox="1">
-            <a:spLocks/>
-          </p:cNvSpPr>
-          <p:nvPr/>
-        </p:nvSpPr>
-        <p:spPr>
-          <a:xfrm>
-            <a:off x="15300425" y="15488973"/>
-            <a:ext cx="6908601" cy="891334"/>
-          </a:xfrm>
-          <a:prstGeom prst="rect">
-            <a:avLst/>
-          </a:prstGeom>
-          <a:solidFill>
-            <a:schemeClr val="accent1"/>
-          </a:solidFill>
-        </p:spPr>
-        <p:txBody>
-          <a:bodyPr lIns="182880" tIns="182880" rIns="182880" bIns="182880" anchor="ctr" anchorCtr="0">
-            <a:spAutoFit/>
-          </a:bodyPr>
-          <a:lstStyle>
-            <a:lvl1pPr marL="1507651" indent="-1507651" algn="ctr" defTabSz="4022342" rtl="0" eaLnBrk="1" fontAlgn="base" hangingPunct="1">
-              <a:spcBef>
-                <a:spcPct val="20000"/>
-              </a:spcBef>
-              <a:spcAft>
-                <a:spcPct val="0"/>
-              </a:spcAft>
-              <a:buFont typeface="Arial" charset="0"/>
-              <a:buNone/>
-              <a:defRPr sz="3392" b="1" kern="1200" baseline="0">
-                <a:solidFill>
-                  <a:schemeClr val="bg1"/>
-                </a:solidFill>
-                <a:latin typeface="+mn-lt"/>
-                <a:ea typeface="ＭＳ Ｐゴシック" charset="-128"/>
-                <a:cs typeface="ＭＳ Ｐゴシック" charset="-128"/>
-              </a:defRPr>
-            </a:lvl1pPr>
-            <a:lvl2pPr marL="3268517" indent="-1255891" algn="l" defTabSz="4022342" rtl="0" eaLnBrk="1" fontAlgn="base" hangingPunct="1">
-              <a:spcBef>
-                <a:spcPct val="20000"/>
-              </a:spcBef>
-              <a:spcAft>
-                <a:spcPct val="0"/>
-              </a:spcAft>
-              <a:buFont typeface="Arial" charset="0"/>
-              <a:buChar char="–"/>
-              <a:defRPr sz="12375" kern="1200">
-                <a:solidFill>
-                  <a:schemeClr val="tx1"/>
-                </a:solidFill>
-                <a:latin typeface="+mn-lt"/>
-                <a:ea typeface="ＭＳ Ｐゴシック" charset="-128"/>
-                <a:cs typeface="+mn-cs"/>
-              </a:defRPr>
-            </a:lvl2pPr>
-            <a:lvl3pPr marL="5027928" indent="-1005586" algn="l" defTabSz="4022342" rtl="0" eaLnBrk="1" fontAlgn="base" hangingPunct="1">
-              <a:spcBef>
-                <a:spcPct val="20000"/>
-              </a:spcBef>
-              <a:spcAft>
-                <a:spcPct val="0"/>
-              </a:spcAft>
-              <a:buFont typeface="Arial" charset="0"/>
-              <a:buChar char="•"/>
-              <a:defRPr sz="10634" kern="1200">
-                <a:solidFill>
-                  <a:schemeClr val="tx1"/>
-                </a:solidFill>
-                <a:latin typeface="+mn-lt"/>
-                <a:ea typeface="ＭＳ Ｐゴシック" charset="-128"/>
-                <a:cs typeface="+mn-cs"/>
-              </a:defRPr>
-            </a:lvl3pPr>
-            <a:lvl4pPr marL="7040554" indent="-1005586" algn="l" defTabSz="4022342" rtl="0" eaLnBrk="1" fontAlgn="base" hangingPunct="1">
-              <a:spcBef>
-                <a:spcPct val="20000"/>
-              </a:spcBef>
-              <a:spcAft>
-                <a:spcPct val="0"/>
-              </a:spcAft>
-              <a:buFont typeface="Arial" charset="0"/>
-              <a:buChar char="–"/>
-              <a:defRPr sz="8800" kern="1200">
-                <a:solidFill>
-                  <a:schemeClr val="tx1"/>
-                </a:solidFill>
-                <a:latin typeface="+mn-lt"/>
-                <a:ea typeface="ＭＳ Ｐゴシック" charset="-128"/>
-                <a:cs typeface="+mn-cs"/>
-              </a:defRPr>
-            </a:lvl4pPr>
-            <a:lvl5pPr marL="9051725" indent="-1005586" algn="l" defTabSz="4022342" rtl="0" eaLnBrk="1" fontAlgn="base" hangingPunct="1">
-              <a:spcBef>
-                <a:spcPct val="20000"/>
-              </a:spcBef>
-              <a:spcAft>
-                <a:spcPct val="0"/>
-              </a:spcAft>
-              <a:buFont typeface="Arial" charset="0"/>
-              <a:buChar char="»"/>
-              <a:defRPr sz="8800" kern="1200">
-                <a:solidFill>
-                  <a:schemeClr val="tx1"/>
-                </a:solidFill>
-                <a:latin typeface="+mn-lt"/>
-                <a:ea typeface="ＭＳ Ｐゴシック" charset="-128"/>
-                <a:cs typeface="+mn-cs"/>
-              </a:defRPr>
-            </a:lvl5pPr>
-            <a:lvl6pPr marL="11064090" indent="-1005827" algn="l" defTabSz="4023305" rtl="0" eaLnBrk="1" latinLnBrk="0" hangingPunct="1">
-              <a:spcBef>
-                <a:spcPct val="20000"/>
-              </a:spcBef>
-              <a:buFont typeface="Arial" pitchFamily="34" charset="0"/>
-              <a:buChar char="•"/>
-              <a:defRPr sz="8800" kern="1200">
-                <a:solidFill>
-                  <a:schemeClr val="tx1"/>
-                </a:solidFill>
-                <a:latin typeface="+mn-lt"/>
-                <a:ea typeface="+mn-ea"/>
-                <a:cs typeface="+mn-cs"/>
-              </a:defRPr>
-            </a:lvl6pPr>
-            <a:lvl7pPr marL="13075741" indent="-1005827" algn="l" defTabSz="4023305" rtl="0" eaLnBrk="1" latinLnBrk="0" hangingPunct="1">
-              <a:spcBef>
-                <a:spcPct val="20000"/>
-              </a:spcBef>
-              <a:buFont typeface="Arial" pitchFamily="34" charset="0"/>
-              <a:buChar char="•"/>
-              <a:defRPr sz="8800" kern="1200">
-                <a:solidFill>
-                  <a:schemeClr val="tx1"/>
-                </a:solidFill>
-                <a:latin typeface="+mn-lt"/>
-                <a:ea typeface="+mn-ea"/>
-                <a:cs typeface="+mn-cs"/>
-              </a:defRPr>
-            </a:lvl7pPr>
-            <a:lvl8pPr marL="15087394" indent="-1005827" algn="l" defTabSz="4023305" rtl="0" eaLnBrk="1" latinLnBrk="0" hangingPunct="1">
-              <a:spcBef>
-                <a:spcPct val="20000"/>
-              </a:spcBef>
-              <a:buFont typeface="Arial" pitchFamily="34" charset="0"/>
-              <a:buChar char="•"/>
-              <a:defRPr sz="8800" kern="1200">
-                <a:solidFill>
-                  <a:schemeClr val="tx1"/>
-                </a:solidFill>
-                <a:latin typeface="+mn-lt"/>
-                <a:ea typeface="+mn-ea"/>
-                <a:cs typeface="+mn-cs"/>
-              </a:defRPr>
-            </a:lvl8pPr>
-            <a:lvl9pPr marL="17099047" indent="-1005827" algn="l" defTabSz="4023305" rtl="0" eaLnBrk="1" latinLnBrk="0" hangingPunct="1">
-              <a:spcBef>
-                <a:spcPct val="20000"/>
-              </a:spcBef>
-              <a:buFont typeface="Arial" pitchFamily="34" charset="0"/>
-              <a:buChar char="•"/>
-              <a:defRPr sz="8800" kern="1200">
-                <a:solidFill>
-                  <a:schemeClr val="tx1"/>
-                </a:solidFill>
-                <a:latin typeface="+mn-lt"/>
-                <a:ea typeface="+mn-ea"/>
-                <a:cs typeface="+mn-cs"/>
-              </a:defRPr>
-            </a:lvl9pPr>
-          </a:lstStyle>
-          <a:p>
-            <a:r>
-              <a:rPr lang="en-US" dirty="0"/>
-              <a:t>Analysis</a:t>
-            </a:r>
-          </a:p>
-        </p:txBody>
-      </p:sp>
-      <p:sp>
-        <p:nvSpPr>
           <p:cNvPr id="7" name="Text Placeholder 55">
             <a:extLst>
               <a:ext uri="{FF2B5EF4-FFF2-40B4-BE49-F238E27FC236}">
@@ -9748,7 +9993,7 @@
         </p:nvSpPr>
         <p:spPr>
           <a:xfrm>
-            <a:off x="22635765" y="31020171"/>
+            <a:off x="22610437" y="32659404"/>
             <a:ext cx="6907325" cy="891334"/>
           </a:xfrm>
           <a:prstGeom prst="rect">
@@ -9922,6 +10167,403 @@
           </a:p>
         </p:txBody>
       </p:sp>
+      <p:pic>
+        <p:nvPicPr>
+          <p:cNvPr id="9" name="Picture 8">
+            <a:extLst>
+              <a:ext uri="{FF2B5EF4-FFF2-40B4-BE49-F238E27FC236}">
+                <a16:creationId xmlns:a16="http://schemas.microsoft.com/office/drawing/2014/main" id="{76058962-DD50-1B29-F87D-FB32DCC7A696}"/>
+              </a:ext>
+            </a:extLst>
+          </p:cNvPr>
+          <p:cNvPicPr>
+            <a:picLocks noChangeAspect="1"/>
+          </p:cNvPicPr>
+          <p:nvPr/>
+        </p:nvPicPr>
+        <p:blipFill>
+          <a:blip r:embed="rId2"/>
+          <a:stretch>
+            <a:fillRect/>
+          </a:stretch>
+        </p:blipFill>
+        <p:spPr>
+          <a:xfrm>
+            <a:off x="8011771" y="9042768"/>
+            <a:ext cx="19125533" cy="5318222"/>
+          </a:xfrm>
+          <a:prstGeom prst="rect">
+            <a:avLst/>
+          </a:prstGeom>
+        </p:spPr>
+      </p:pic>
+      <p:sp>
+        <p:nvSpPr>
+          <p:cNvPr id="12" name="Text Placeholder 48">
+            <a:extLst>
+              <a:ext uri="{FF2B5EF4-FFF2-40B4-BE49-F238E27FC236}">
+                <a16:creationId xmlns:a16="http://schemas.microsoft.com/office/drawing/2014/main" id="{1A077120-A6AD-BC11-19CC-FE78459359E7}"/>
+              </a:ext>
+            </a:extLst>
+          </p:cNvPr>
+          <p:cNvSpPr txBox="1">
+            <a:spLocks/>
+          </p:cNvSpPr>
+          <p:nvPr/>
+        </p:nvSpPr>
+        <p:spPr>
+          <a:xfrm>
+            <a:off x="7966174" y="29225125"/>
+            <a:ext cx="14246124" cy="891334"/>
+          </a:xfrm>
+          <a:prstGeom prst="rect">
+            <a:avLst/>
+          </a:prstGeom>
+          <a:solidFill>
+            <a:schemeClr val="accent1"/>
+          </a:solidFill>
+        </p:spPr>
+        <p:txBody>
+          <a:bodyPr wrap="square" lIns="182880" tIns="182880" rIns="182880" bIns="182880" anchor="ctr" anchorCtr="0">
+            <a:spAutoFit/>
+          </a:bodyPr>
+          <a:lstStyle>
+            <a:lvl1pPr marL="1507651" indent="-1507651" algn="ctr" defTabSz="4022342" rtl="0" eaLnBrk="1" fontAlgn="base" hangingPunct="1">
+              <a:spcBef>
+                <a:spcPct val="20000"/>
+              </a:spcBef>
+              <a:spcAft>
+                <a:spcPct val="0"/>
+              </a:spcAft>
+              <a:buFont typeface="Arial" charset="0"/>
+              <a:buNone/>
+              <a:defRPr sz="3392" b="1" kern="1200" baseline="0">
+                <a:solidFill>
+                  <a:schemeClr val="bg1"/>
+                </a:solidFill>
+                <a:latin typeface="+mn-lt"/>
+                <a:ea typeface="ＭＳ Ｐゴシック" charset="-128"/>
+                <a:cs typeface="ＭＳ Ｐゴシック" charset="-128"/>
+              </a:defRPr>
+            </a:lvl1pPr>
+            <a:lvl2pPr marL="3268517" indent="-1255891" algn="l" defTabSz="4022342" rtl="0" eaLnBrk="1" fontAlgn="base" hangingPunct="1">
+              <a:spcBef>
+                <a:spcPct val="20000"/>
+              </a:spcBef>
+              <a:spcAft>
+                <a:spcPct val="0"/>
+              </a:spcAft>
+              <a:buFont typeface="Arial" charset="0"/>
+              <a:buChar char="–"/>
+              <a:defRPr sz="12375" kern="1200">
+                <a:solidFill>
+                  <a:schemeClr val="tx1"/>
+                </a:solidFill>
+                <a:latin typeface="+mn-lt"/>
+                <a:ea typeface="ＭＳ Ｐゴシック" charset="-128"/>
+                <a:cs typeface="+mn-cs"/>
+              </a:defRPr>
+            </a:lvl2pPr>
+            <a:lvl3pPr marL="5027928" indent="-1005586" algn="l" defTabSz="4022342" rtl="0" eaLnBrk="1" fontAlgn="base" hangingPunct="1">
+              <a:spcBef>
+                <a:spcPct val="20000"/>
+              </a:spcBef>
+              <a:spcAft>
+                <a:spcPct val="0"/>
+              </a:spcAft>
+              <a:buFont typeface="Arial" charset="0"/>
+              <a:buChar char="•"/>
+              <a:defRPr sz="10634" kern="1200">
+                <a:solidFill>
+                  <a:schemeClr val="tx1"/>
+                </a:solidFill>
+                <a:latin typeface="+mn-lt"/>
+                <a:ea typeface="ＭＳ Ｐゴシック" charset="-128"/>
+                <a:cs typeface="+mn-cs"/>
+              </a:defRPr>
+            </a:lvl3pPr>
+            <a:lvl4pPr marL="7040554" indent="-1005586" algn="l" defTabSz="4022342" rtl="0" eaLnBrk="1" fontAlgn="base" hangingPunct="1">
+              <a:spcBef>
+                <a:spcPct val="20000"/>
+              </a:spcBef>
+              <a:spcAft>
+                <a:spcPct val="0"/>
+              </a:spcAft>
+              <a:buFont typeface="Arial" charset="0"/>
+              <a:buChar char="–"/>
+              <a:defRPr sz="8800" kern="1200">
+                <a:solidFill>
+                  <a:schemeClr val="tx1"/>
+                </a:solidFill>
+                <a:latin typeface="+mn-lt"/>
+                <a:ea typeface="ＭＳ Ｐゴシック" charset="-128"/>
+                <a:cs typeface="+mn-cs"/>
+              </a:defRPr>
+            </a:lvl4pPr>
+            <a:lvl5pPr marL="9051725" indent="-1005586" algn="l" defTabSz="4022342" rtl="0" eaLnBrk="1" fontAlgn="base" hangingPunct="1">
+              <a:spcBef>
+                <a:spcPct val="20000"/>
+              </a:spcBef>
+              <a:spcAft>
+                <a:spcPct val="0"/>
+              </a:spcAft>
+              <a:buFont typeface="Arial" charset="0"/>
+              <a:buChar char="»"/>
+              <a:defRPr sz="8800" kern="1200">
+                <a:solidFill>
+                  <a:schemeClr val="tx1"/>
+                </a:solidFill>
+                <a:latin typeface="+mn-lt"/>
+                <a:ea typeface="ＭＳ Ｐゴシック" charset="-128"/>
+                <a:cs typeface="+mn-cs"/>
+              </a:defRPr>
+            </a:lvl5pPr>
+            <a:lvl6pPr marL="11064090" indent="-1005827" algn="l" defTabSz="4023305" rtl="0" eaLnBrk="1" latinLnBrk="0" hangingPunct="1">
+              <a:spcBef>
+                <a:spcPct val="20000"/>
+              </a:spcBef>
+              <a:buFont typeface="Arial" pitchFamily="34" charset="0"/>
+              <a:buChar char="•"/>
+              <a:defRPr sz="8800" kern="1200">
+                <a:solidFill>
+                  <a:schemeClr val="tx1"/>
+                </a:solidFill>
+                <a:latin typeface="+mn-lt"/>
+                <a:ea typeface="+mn-ea"/>
+                <a:cs typeface="+mn-cs"/>
+              </a:defRPr>
+            </a:lvl6pPr>
+            <a:lvl7pPr marL="13075741" indent="-1005827" algn="l" defTabSz="4023305" rtl="0" eaLnBrk="1" latinLnBrk="0" hangingPunct="1">
+              <a:spcBef>
+                <a:spcPct val="20000"/>
+              </a:spcBef>
+              <a:buFont typeface="Arial" pitchFamily="34" charset="0"/>
+              <a:buChar char="•"/>
+              <a:defRPr sz="8800" kern="1200">
+                <a:solidFill>
+                  <a:schemeClr val="tx1"/>
+                </a:solidFill>
+                <a:latin typeface="+mn-lt"/>
+                <a:ea typeface="+mn-ea"/>
+                <a:cs typeface="+mn-cs"/>
+              </a:defRPr>
+            </a:lvl7pPr>
+            <a:lvl8pPr marL="15087394" indent="-1005827" algn="l" defTabSz="4023305" rtl="0" eaLnBrk="1" latinLnBrk="0" hangingPunct="1">
+              <a:spcBef>
+                <a:spcPct val="20000"/>
+              </a:spcBef>
+              <a:buFont typeface="Arial" pitchFamily="34" charset="0"/>
+              <a:buChar char="•"/>
+              <a:defRPr sz="8800" kern="1200">
+                <a:solidFill>
+                  <a:schemeClr val="tx1"/>
+                </a:solidFill>
+                <a:latin typeface="+mn-lt"/>
+                <a:ea typeface="+mn-ea"/>
+                <a:cs typeface="+mn-cs"/>
+              </a:defRPr>
+            </a:lvl8pPr>
+            <a:lvl9pPr marL="17099047" indent="-1005827" algn="l" defTabSz="4023305" rtl="0" eaLnBrk="1" latinLnBrk="0" hangingPunct="1">
+              <a:spcBef>
+                <a:spcPct val="20000"/>
+              </a:spcBef>
+              <a:buFont typeface="Arial" pitchFamily="34" charset="0"/>
+              <a:buChar char="•"/>
+              <a:defRPr sz="8800" kern="1200">
+                <a:solidFill>
+                  <a:schemeClr val="tx1"/>
+                </a:solidFill>
+                <a:latin typeface="+mn-lt"/>
+                <a:ea typeface="+mn-ea"/>
+                <a:cs typeface="+mn-cs"/>
+              </a:defRPr>
+            </a:lvl9pPr>
+          </a:lstStyle>
+          <a:p>
+            <a:r>
+              <a:rPr lang="en-US" dirty="0"/>
+              <a:t>Magnetic Field Results</a:t>
+            </a:r>
+          </a:p>
+        </p:txBody>
+      </p:sp>
+      <p:pic>
+        <p:nvPicPr>
+          <p:cNvPr id="66" name="Picture Placeholder 65">
+            <a:extLst>
+              <a:ext uri="{FF2B5EF4-FFF2-40B4-BE49-F238E27FC236}">
+                <a16:creationId xmlns:a16="http://schemas.microsoft.com/office/drawing/2014/main" id="{BA2D61E0-3344-A154-AD6E-EDEC62D598C8}"/>
+              </a:ext>
+            </a:extLst>
+          </p:cNvPr>
+          <p:cNvPicPr>
+            <a:picLocks noGrp="1" noChangeAspect="1"/>
+          </p:cNvPicPr>
+          <p:nvPr>
+            <p:ph type="pic" sz="quarter" idx="152"/>
+          </p:nvPr>
+        </p:nvPicPr>
+        <p:blipFill>
+          <a:blip r:embed="rId3" cstate="email">
+            <a:extLst>
+              <a:ext uri="{28A0092B-C50C-407E-A947-70E740481C1C}">
+                <a14:useLocalDpi xmlns:a14="http://schemas.microsoft.com/office/drawing/2010/main" val="0"/>
+              </a:ext>
+            </a:extLst>
+          </a:blip>
+          <a:stretch>
+            <a:fillRect/>
+          </a:stretch>
+        </p:blipFill>
+        <p:spPr>
+          <a:xfrm>
+            <a:off x="374854" y="22428188"/>
+            <a:ext cx="7196643" cy="5397482"/>
+          </a:xfrm>
+          <a:prstGeom prst="rect">
+            <a:avLst/>
+          </a:prstGeom>
+        </p:spPr>
+      </p:pic>
+      <p:sp>
+        <p:nvSpPr>
+          <p:cNvPr id="73" name="Picture Placeholder 72">
+            <a:extLst>
+              <a:ext uri="{FF2B5EF4-FFF2-40B4-BE49-F238E27FC236}">
+                <a16:creationId xmlns:a16="http://schemas.microsoft.com/office/drawing/2014/main" id="{6807D8E6-3A59-B597-56E9-E1CBF71AD2AF}"/>
+              </a:ext>
+            </a:extLst>
+          </p:cNvPr>
+          <p:cNvSpPr>
+            <a:spLocks noGrp="1"/>
+          </p:cNvSpPr>
+          <p:nvPr>
+            <p:ph type="pic" sz="quarter" idx="153"/>
+          </p:nvPr>
+        </p:nvSpPr>
+        <p:spPr/>
+      </p:sp>
+      <p:pic>
+        <p:nvPicPr>
+          <p:cNvPr id="75" name="Picture 74">
+            <a:extLst>
+              <a:ext uri="{FF2B5EF4-FFF2-40B4-BE49-F238E27FC236}">
+                <a16:creationId xmlns:a16="http://schemas.microsoft.com/office/drawing/2014/main" id="{924EFD0C-0554-E865-5AD3-BD6183A70793}"/>
+              </a:ext>
+            </a:extLst>
+          </p:cNvPr>
+          <p:cNvPicPr>
+            <a:picLocks noChangeAspect="1"/>
+          </p:cNvPicPr>
+          <p:nvPr/>
+        </p:nvPicPr>
+        <p:blipFill>
+          <a:blip r:embed="rId4"/>
+          <a:stretch>
+            <a:fillRect/>
+          </a:stretch>
+        </p:blipFill>
+        <p:spPr>
+          <a:xfrm>
+            <a:off x="15713313" y="19939262"/>
+            <a:ext cx="6450066" cy="4500046"/>
+          </a:xfrm>
+          <a:prstGeom prst="rect">
+            <a:avLst/>
+          </a:prstGeom>
+        </p:spPr>
+      </p:pic>
+      <p:pic>
+        <p:nvPicPr>
+          <p:cNvPr id="80" name="Picture 79">
+            <a:extLst>
+              <a:ext uri="{FF2B5EF4-FFF2-40B4-BE49-F238E27FC236}">
+                <a16:creationId xmlns:a16="http://schemas.microsoft.com/office/drawing/2014/main" id="{6CD9DFBF-2CE8-7198-8B0D-15737B9144F3}"/>
+              </a:ext>
+            </a:extLst>
+          </p:cNvPr>
+          <p:cNvPicPr>
+            <a:picLocks noChangeAspect="1"/>
+          </p:cNvPicPr>
+          <p:nvPr/>
+        </p:nvPicPr>
+        <p:blipFill>
+          <a:blip r:embed="rId5"/>
+          <a:stretch>
+            <a:fillRect/>
+          </a:stretch>
+        </p:blipFill>
+        <p:spPr>
+          <a:xfrm>
+            <a:off x="7922472" y="24433397"/>
+            <a:ext cx="7244964" cy="4517303"/>
+          </a:xfrm>
+          <a:prstGeom prst="rect">
+            <a:avLst/>
+          </a:prstGeom>
+        </p:spPr>
+      </p:pic>
+      <p:graphicFrame>
+        <p:nvGraphicFramePr>
+          <p:cNvPr id="81" name="Chart 80">
+            <a:extLst>
+              <a:ext uri="{FF2B5EF4-FFF2-40B4-BE49-F238E27FC236}">
+                <a16:creationId xmlns:a16="http://schemas.microsoft.com/office/drawing/2014/main" id="{2AB1109F-AB73-485A-A314-30F0F4BC0549}"/>
+              </a:ext>
+            </a:extLst>
+          </p:cNvPr>
+          <p:cNvGraphicFramePr>
+            <a:graphicFrameLocks/>
+          </p:cNvGraphicFramePr>
+          <p:nvPr>
+            <p:extLst>
+              <p:ext uri="{D42A27DB-BD31-4B8C-83A1-F6EECF244321}">
+                <p14:modId xmlns:p14="http://schemas.microsoft.com/office/powerpoint/2010/main" val="305714622"/>
+              </p:ext>
+            </p:extLst>
+          </p:nvPr>
+        </p:nvGraphicFramePr>
+        <p:xfrm>
+          <a:off x="8405676" y="20104470"/>
+          <a:ext cx="6139039" cy="4169630"/>
+        </p:xfrm>
+        <a:graphic>
+          <a:graphicData uri="http://schemas.openxmlformats.org/drawingml/2006/chart">
+            <c:chart xmlns:c="http://schemas.openxmlformats.org/drawingml/2006/chart" xmlns:r="http://schemas.openxmlformats.org/officeDocument/2006/relationships" r:id="rId6"/>
+          </a:graphicData>
+        </a:graphic>
+      </p:graphicFrame>
+      <p:pic>
+        <p:nvPicPr>
+          <p:cNvPr id="83" name="Picture 82">
+            <a:extLst>
+              <a:ext uri="{FF2B5EF4-FFF2-40B4-BE49-F238E27FC236}">
+                <a16:creationId xmlns:a16="http://schemas.microsoft.com/office/drawing/2014/main" id="{263E0FAB-8368-3B95-5532-AD2E86604F38}"/>
+              </a:ext>
+            </a:extLst>
+          </p:cNvPr>
+          <p:cNvPicPr>
+            <a:picLocks noChangeAspect="1"/>
+          </p:cNvPicPr>
+          <p:nvPr/>
+        </p:nvPicPr>
+        <p:blipFill>
+          <a:blip r:embed="rId7"/>
+          <a:srcRect l="7464" t="34881" r="4078" b="42447"/>
+          <a:stretch>
+            <a:fillRect/>
+          </a:stretch>
+        </p:blipFill>
+        <p:spPr>
+          <a:xfrm>
+            <a:off x="17621167" y="14466092"/>
+            <a:ext cx="11896595" cy="2287806"/>
+          </a:xfrm>
+          <a:prstGeom prst="rect">
+            <a:avLst/>
+          </a:prstGeom>
+        </p:spPr>
+      </p:pic>
     </p:spTree>
   </p:cSld>
   <p:clrMapOvr>

--- a/Bremsstrahlung Measurements of VENUS 3rd-Generation ECR Ion Source.pptx
+++ b/Bremsstrahlung Measurements of VENUS 3rd-Generation ECR Ion Source.pptx
@@ -8,16 +8,13 @@
     <p:sldMasterId id="2147483655" r:id="rId4"/>
   </p:sldMasterIdLst>
   <p:notesMasterIdLst>
-    <p:notesMasterId r:id="rId9"/>
+    <p:notesMasterId r:id="rId6"/>
   </p:notesMasterIdLst>
   <p:handoutMasterIdLst>
-    <p:handoutMasterId r:id="rId10"/>
+    <p:handoutMasterId r:id="rId7"/>
   </p:handoutMasterIdLst>
   <p:sldIdLst>
-    <p:sldId id="287" r:id="rId5"/>
-    <p:sldId id="290" r:id="rId6"/>
-    <p:sldId id="288" r:id="rId7"/>
-    <p:sldId id="289" r:id="rId8"/>
+    <p:sldId id="288" r:id="rId5"/>
   </p:sldIdLst>
   <p:sldSz cx="30175200" cy="43891200"/>
   <p:notesSz cx="6858000" cy="9144000"/>
@@ -213,19 +210,39 @@
     </mc:Fallback>
   </mc:AlternateContent>
   <c:chart>
+    <c:title>
+      <c:overlay val="0"/>
+      <c:spPr>
+        <a:noFill/>
+        <a:ln>
+          <a:noFill/>
+        </a:ln>
+        <a:effectLst/>
+      </c:spPr>
+      <c:txPr>
+        <a:bodyPr rot="0" spcFirstLastPara="1" vertOverflow="ellipsis" vert="horz" wrap="square" anchor="ctr" anchorCtr="1"/>
+        <a:lstStyle/>
+        <a:p>
+          <a:pPr>
+            <a:defRPr sz="1400" b="0" i="0" u="none" strike="noStrike" kern="1200" spc="0" baseline="0">
+              <a:solidFill>
+                <a:schemeClr val="tx1">
+                  <a:lumMod val="65000"/>
+                  <a:lumOff val="35000"/>
+                </a:schemeClr>
+              </a:solidFill>
+              <a:latin typeface="+mn-lt"/>
+              <a:ea typeface="+mn-ea"/>
+              <a:cs typeface="+mn-cs"/>
+            </a:defRPr>
+          </a:pPr>
+          <a:endParaRPr lang="en-US"/>
+        </a:p>
+      </c:txPr>
+    </c:title>
     <c:autoTitleDeleted val="0"/>
     <c:plotArea>
-      <c:layout>
-        <c:manualLayout>
-          <c:layoutTarget val="inner"/>
-          <c:xMode val="edge"/>
-          <c:yMode val="edge"/>
-          <c:x val="0.1390439632545932"/>
-          <c:y val="6.5289442986293383E-2"/>
-          <c:w val="0.67329068241469892"/>
-          <c:h val="0.73444808982210552"/>
-        </c:manualLayout>
-      </c:layout>
+      <c:layout/>
       <c:scatterChart>
         <c:scatterStyle val="lineMarker"/>
         <c:varyColors val="0"/>
@@ -233,76 +250,68 @@
           <c:idx val="0"/>
           <c:order val="0"/>
           <c:tx>
-            <c:v>1850W</c:v>
+            <c:v>18 GHz only</c:v>
           </c:tx>
           <c:spPr>
-            <a:ln w="6350">
-              <a:solidFill>
-                <a:schemeClr val="accent2">
-                  <a:lumMod val="40000"/>
-                  <a:lumOff val="60000"/>
-                </a:schemeClr>
-              </a:solidFill>
+            <a:ln w="19050" cap="rnd">
+              <a:noFill/>
+              <a:round/>
             </a:ln>
+            <a:effectLst/>
           </c:spPr>
           <c:marker>
             <c:symbol val="circle"/>
-            <c:size val="7"/>
+            <c:size val="5"/>
             <c:spPr>
               <a:solidFill>
-                <a:schemeClr val="accent2">
-                  <a:lumMod val="40000"/>
-                  <a:lumOff val="60000"/>
-                </a:schemeClr>
+                <a:schemeClr val="accent1"/>
               </a:solidFill>
-              <a:ln w="6350">
+              <a:ln w="9525">
                 <a:solidFill>
-                  <a:schemeClr val="accent2">
-                    <a:lumMod val="40000"/>
-                    <a:lumOff val="60000"/>
-                  </a:schemeClr>
+                  <a:schemeClr val="accent1"/>
                 </a:solidFill>
               </a:ln>
+              <a:effectLst/>
             </c:spPr>
           </c:marker>
           <c:xVal>
             <c:numRef>
-              <c:f>'C:\Users\intwa\Downloads\[microwaveLeakageTest5.xlsx]Sheet2'!$B$51:$B$54</c:f>
+              <c:f>trimerge19_21sep26!$AB$81:$AB$84</c:f>
               <c:numCache>
                 <c:formatCode>General</c:formatCode>
                 <c:ptCount val="4"/>
                 <c:pt idx="0">
-                  <c:v>11.333333333333334</c:v>
+                  <c:v>451</c:v>
                 </c:pt>
                 <c:pt idx="1">
-                  <c:v>6.4</c:v>
+                  <c:v>889</c:v>
                 </c:pt>
                 <c:pt idx="2">
-                  <c:v>8.2249999999999996</c:v>
+                  <c:v>1325</c:v>
                 </c:pt>
                 <c:pt idx="3">
-                  <c:v>5.166666666666667</c:v>
+                  <c:v>1771</c:v>
                 </c:pt>
               </c:numCache>
             </c:numRef>
           </c:xVal>
           <c:yVal>
             <c:numRef>
-              <c:f>'C:\Users\intwa\Downloads\[microwaveLeakageTest5.xlsx]Sheet2'!$E$51:$E$54</c:f>
+              <c:f>trimerge19_21sep26!$AD$81:$AD$84</c:f>
               <c:numCache>
                 <c:formatCode>General</c:formatCode>
                 <c:ptCount val="4"/>
                 <c:pt idx="0">
-                  <c:v>1320</c:v>
+                  <c:v>123</c:v>
                 </c:pt>
                 <c:pt idx="1">
-                  <c:v>1345</c:v>
+                  <c:v>151</c:v>
                 </c:pt>
                 <c:pt idx="2">
-                  <c:v>1327</c:v>
+                  <c:v>160</c:v>
                 </c:pt>
                 <c:pt idx="3">
-                  <c:v>1327</c:v>
+                  <c:v>185</c:v>
                 </c:pt>
               </c:numCache>
             </c:numRef>
@@ -310,7 +319,7 @@
           <c:smooth val="0"/>
           <c:extLst>
             <c:ext xmlns:c16="http://schemas.microsoft.com/office/drawing/2014/chart" uri="{C3380CC4-5D6E-409C-BE32-E72D297353CC}">
-              <c16:uniqueId val="{00000000-2512-4F8C-BDDB-7AF32B0C53BB}"/>
+              <c16:uniqueId val="{00000000-497B-448F-89BB-E38623C71AFB}"/>
             </c:ext>
           </c:extLst>
         </c:ser>
@@ -318,67 +327,80 @@
           <c:idx val="1"/>
           <c:order val="1"/>
           <c:tx>
-            <c:v>640W</c:v>
+            <c:v>28 GHz only</c:v>
           </c:tx>
           <c:spPr>
-            <a:ln w="6350">
-              <a:solidFill>
-                <a:schemeClr val="accent2"/>
-              </a:solidFill>
+            <a:ln w="25400" cap="rnd">
+              <a:noFill/>
+              <a:round/>
             </a:ln>
+            <a:effectLst/>
           </c:spPr>
           <c:marker>
             <c:symbol val="circle"/>
-            <c:size val="7"/>
+            <c:size val="5"/>
             <c:spPr>
               <a:solidFill>
                 <a:schemeClr val="accent2"/>
               </a:solidFill>
-              <a:ln>
+              <a:ln w="9525">
                 <a:solidFill>
                   <a:schemeClr val="accent2"/>
                 </a:solidFill>
               </a:ln>
+              <a:effectLst/>
             </c:spPr>
           </c:marker>
           <c:xVal>
             <c:numRef>
-              <c:f>'C:\Users\intwa\Downloads\[microwaveLeakageTest5.xlsx]Sheet2'!$B$55:$B$58</c:f>
+              <c:f>trimerge19_21sep26!$AA$85:$AA$90</c:f>
               <c:numCache>
                 <c:formatCode>General</c:formatCode>
-                <c:ptCount val="4"/>
+                <c:ptCount val="6"/>
                 <c:pt idx="0">
-                  <c:v>2.2000000000000002</c:v>
+                  <c:v>505</c:v>
                 </c:pt>
                 <c:pt idx="1">
-                  <c:v>1.9090909090909092</c:v>
+                  <c:v>998</c:v>
                 </c:pt>
                 <c:pt idx="2">
-                  <c:v>2.5555555555555554</c:v>
+                  <c:v>1991</c:v>
                 </c:pt>
                 <c:pt idx="3">
-                  <c:v>2.657142857142857</c:v>
+                  <c:v>3018</c:v>
+                </c:pt>
+                <c:pt idx="4">
+                  <c:v>4006</c:v>
+                </c:pt>
+                <c:pt idx="5">
+                  <c:v>5000</c:v>
                 </c:pt>
               </c:numCache>
             </c:numRef>
           </c:xVal>
           <c:yVal>
             <c:numRef>
-              <c:f>'C:\Users\intwa\Downloads\[microwaveLeakageTest5.xlsx]Sheet2'!$E$55:$E$58</c:f>
+              <c:f>trimerge19_21sep26!$AD$85:$AD$90</c:f>
               <c:numCache>
                 <c:formatCode>General</c:formatCode>
-                <c:ptCount val="4"/>
+                <c:ptCount val="6"/>
                 <c:pt idx="0">
-                  <c:v>600</c:v>
+                  <c:v>159</c:v>
                 </c:pt>
                 <c:pt idx="1">
-                  <c:v>590</c:v>
+                  <c:v>163</c:v>
                 </c:pt>
                 <c:pt idx="2">
-                  <c:v>590</c:v>
+                  <c:v>179</c:v>
                 </c:pt>
                 <c:pt idx="3">
-                  <c:v>590</c:v>
+                  <c:v>397</c:v>
+                </c:pt>
+                <c:pt idx="4">
+                  <c:v>564</c:v>
+                </c:pt>
+                <c:pt idx="5">
+                  <c:v>550</c:v>
                 </c:pt>
               </c:numCache>
             </c:numRef>
@@ -386,162 +408,7 @@
           <c:smooth val="0"/>
           <c:extLst>
             <c:ext xmlns:c16="http://schemas.microsoft.com/office/drawing/2014/chart" uri="{C3380CC4-5D6E-409C-BE32-E72D297353CC}">
-              <c16:uniqueId val="{00000001-2512-4F8C-BDDB-7AF32B0C53BB}"/>
-            </c:ext>
-          </c:extLst>
-        </c:ser>
-        <c:ser>
-          <c:idx val="2"/>
-          <c:order val="2"/>
-          <c:tx>
-            <c:v>1152W</c:v>
-          </c:tx>
-          <c:spPr>
-            <a:ln w="6350">
-              <a:solidFill>
-                <a:schemeClr val="accent2">
-                  <a:lumMod val="60000"/>
-                  <a:lumOff val="40000"/>
-                </a:schemeClr>
-              </a:solidFill>
-            </a:ln>
-          </c:spPr>
-          <c:marker>
-            <c:symbol val="circle"/>
-            <c:size val="7"/>
-            <c:spPr>
-              <a:solidFill>
-                <a:srgbClr val="EE2E57"/>
-              </a:solidFill>
-              <a:ln w="6350">
-                <a:solidFill>
-                  <a:srgbClr val="EE2E57"/>
-                </a:solidFill>
-              </a:ln>
-            </c:spPr>
-          </c:marker>
-          <c:xVal>
-            <c:numRef>
-              <c:f>'C:\Users\intwa\Downloads\[microwaveLeakageTest5.xlsx]Sheet2'!$B$59:$B$62</c:f>
-              <c:numCache>
-                <c:formatCode>General</c:formatCode>
-                <c:ptCount val="4"/>
-                <c:pt idx="0">
-                  <c:v>2.2000000000000002</c:v>
-                </c:pt>
-                <c:pt idx="1">
-                  <c:v>2.84</c:v>
-                </c:pt>
-                <c:pt idx="2">
-                  <c:v>4.7029702970297027</c:v>
-                </c:pt>
-                <c:pt idx="3">
-                  <c:v>6.5789473684210522</c:v>
-                </c:pt>
-              </c:numCache>
-            </c:numRef>
-          </c:xVal>
-          <c:yVal>
-            <c:numRef>
-              <c:f>'C:\Users\intwa\Downloads\[microwaveLeakageTest5.xlsx]Sheet2'!$E$59:$E$62</c:f>
-              <c:numCache>
-                <c:formatCode>General</c:formatCode>
-                <c:ptCount val="4"/>
-                <c:pt idx="0">
-                  <c:v>1020</c:v>
-                </c:pt>
-                <c:pt idx="1">
-                  <c:v>1015</c:v>
-                </c:pt>
-                <c:pt idx="2">
-                  <c:v>1015</c:v>
-                </c:pt>
-                <c:pt idx="3">
-                  <c:v>1013</c:v>
-                </c:pt>
-              </c:numCache>
-            </c:numRef>
-          </c:yVal>
-          <c:smooth val="0"/>
-          <c:extLst>
-            <c:ext xmlns:c16="http://schemas.microsoft.com/office/drawing/2014/chart" uri="{C3380CC4-5D6E-409C-BE32-E72D297353CC}">
-              <c16:uniqueId val="{00000002-2512-4F8C-BDDB-7AF32B0C53BB}"/>
-            </c:ext>
-          </c:extLst>
-        </c:ser>
-        <c:ser>
-          <c:idx val="3"/>
-          <c:order val="3"/>
-          <c:tx>
-            <c:v>1350W</c:v>
-          </c:tx>
-          <c:spPr>
-            <a:ln w="6350">
-              <a:solidFill>
-                <a:srgbClr val="C0504D">
-                  <a:lumMod val="75000"/>
-                </a:srgbClr>
-              </a:solidFill>
-            </a:ln>
-          </c:spPr>
-          <c:marker>
-            <c:symbol val="circle"/>
-            <c:size val="7"/>
-            <c:spPr>
-              <a:solidFill>
-                <a:schemeClr val="accent2">
-                  <a:lumMod val="75000"/>
-                </a:schemeClr>
-              </a:solidFill>
-              <a:ln>
-                <a:solidFill>
-                  <a:schemeClr val="accent2">
-                    <a:lumMod val="75000"/>
-                  </a:schemeClr>
-                </a:solidFill>
-              </a:ln>
-            </c:spPr>
-          </c:marker>
-          <c:xVal>
-            <c:numRef>
-              <c:f>'C:\Users\intwa\Downloads\[microwaveLeakageTest5.xlsx]Sheet2'!$B$63:$B$65</c:f>
-              <c:numCache>
-                <c:formatCode>General</c:formatCode>
-                <c:ptCount val="3"/>
-                <c:pt idx="0">
-                  <c:v>8</c:v>
-                </c:pt>
-                <c:pt idx="1">
-                  <c:v>12.5</c:v>
-                </c:pt>
-                <c:pt idx="2">
-                  <c:v>2.8571428571428572</c:v>
-                </c:pt>
-              </c:numCache>
-            </c:numRef>
-          </c:xVal>
-          <c:yVal>
-            <c:numRef>
-              <c:f>'C:\Users\intwa\Downloads\[microwaveLeakageTest5.xlsx]Sheet2'!$E$63:$E$65</c:f>
-              <c:numCache>
-                <c:formatCode>General</c:formatCode>
-                <c:ptCount val="3"/>
-                <c:pt idx="0">
-                  <c:v>1100</c:v>
-                </c:pt>
-                <c:pt idx="1">
-                  <c:v>1093</c:v>
-                </c:pt>
-                <c:pt idx="2">
-                  <c:v>1106</c:v>
-                </c:pt>
-              </c:numCache>
-            </c:numRef>
-          </c:yVal>
-          <c:smooth val="0"/>
-          <c:extLst>
-            <c:ext xmlns:c16="http://schemas.microsoft.com/office/drawing/2014/chart" uri="{C3380CC4-5D6E-409C-BE32-E72D297353CC}">
-              <c16:uniqueId val="{00000003-2512-4F8C-BDDB-7AF32B0C53BB}"/>
+              <c16:uniqueId val="{00000001-497B-448F-89BB-E38623C71AFB}"/>
             </c:ext>
           </c:extLst>
         </c:ser>
@@ -553,96 +420,729 @@
           <c:showPercent val="0"/>
           <c:showBubbleSize val="0"/>
         </c:dLbls>
-        <c:axId val="89700608"/>
-        <c:axId val="89715456"/>
+        <c:axId val="1097201647"/>
+        <c:axId val="1123740559"/>
       </c:scatterChart>
       <c:valAx>
-        <c:axId val="89700608"/>
+        <c:axId val="1097201647"/>
         <c:scaling>
           <c:orientation val="minMax"/>
         </c:scaling>
         <c:delete val="0"/>
         <c:axPos val="b"/>
-        <c:title>
-          <c:tx>
-            <c:rich>
-              <a:bodyPr/>
-              <a:lstStyle/>
-              <a:p>
-                <a:pPr>
-                  <a:defRPr/>
-                </a:pPr>
-                <a:r>
-                  <a:rPr lang="en-US"/>
-                  <a:t>28/18 Power Ratio</a:t>
-                </a:r>
-              </a:p>
-            </c:rich>
-          </c:tx>
-          <c:overlay val="0"/>
-        </c:title>
+        <c:majorGridlines>
+          <c:spPr>
+            <a:ln w="9525" cap="flat" cmpd="sng" algn="ctr">
+              <a:solidFill>
+                <a:schemeClr val="tx1">
+                  <a:lumMod val="15000"/>
+                  <a:lumOff val="85000"/>
+                </a:schemeClr>
+              </a:solidFill>
+              <a:round/>
+            </a:ln>
+            <a:effectLst/>
+          </c:spPr>
+        </c:majorGridlines>
         <c:numFmt formatCode="General" sourceLinked="1"/>
-        <c:majorTickMark val="out"/>
+        <c:majorTickMark val="none"/>
         <c:minorTickMark val="none"/>
         <c:tickLblPos val="nextTo"/>
-        <c:crossAx val="89715456"/>
+        <c:spPr>
+          <a:noFill/>
+          <a:ln w="9525" cap="flat" cmpd="sng" algn="ctr">
+            <a:solidFill>
+              <a:schemeClr val="tx1">
+                <a:lumMod val="25000"/>
+                <a:lumOff val="75000"/>
+              </a:schemeClr>
+            </a:solidFill>
+            <a:round/>
+          </a:ln>
+          <a:effectLst/>
+        </c:spPr>
+        <c:txPr>
+          <a:bodyPr rot="-60000000" spcFirstLastPara="1" vertOverflow="ellipsis" vert="horz" wrap="square" anchor="ctr" anchorCtr="1"/>
+          <a:lstStyle/>
+          <a:p>
+            <a:pPr>
+              <a:defRPr sz="900" b="0" i="0" u="none" strike="noStrike" kern="1200" baseline="0">
+                <a:solidFill>
+                  <a:schemeClr val="tx1">
+                    <a:lumMod val="65000"/>
+                    <a:lumOff val="35000"/>
+                  </a:schemeClr>
+                </a:solidFill>
+                <a:latin typeface="+mn-lt"/>
+                <a:ea typeface="+mn-ea"/>
+                <a:cs typeface="+mn-cs"/>
+              </a:defRPr>
+            </a:pPr>
+            <a:endParaRPr lang="en-US"/>
+          </a:p>
+        </c:txPr>
+        <c:crossAx val="1123740559"/>
         <c:crosses val="autoZero"/>
         <c:crossBetween val="midCat"/>
       </c:valAx>
       <c:valAx>
-        <c:axId val="89715456"/>
+        <c:axId val="1123740559"/>
         <c:scaling>
           <c:orientation val="minMax"/>
         </c:scaling>
         <c:delete val="0"/>
         <c:axPos val="l"/>
-        <c:majorGridlines/>
-        <c:title>
-          <c:tx>
-            <c:rich>
-              <a:bodyPr rot="-5400000" vert="horz"/>
-              <a:lstStyle/>
-              <a:p>
-                <a:pPr>
-                  <a:defRPr/>
-                </a:pPr>
-                <a:r>
-                  <a:rPr lang="en-US"/>
-                  <a:t>O6+</a:t>
-                </a:r>
-              </a:p>
-            </c:rich>
-          </c:tx>
-          <c:overlay val="0"/>
-        </c:title>
+        <c:majorGridlines>
+          <c:spPr>
+            <a:ln w="9525" cap="flat" cmpd="sng" algn="ctr">
+              <a:solidFill>
+                <a:schemeClr val="tx1">
+                  <a:lumMod val="15000"/>
+                  <a:lumOff val="85000"/>
+                </a:schemeClr>
+              </a:solidFill>
+              <a:round/>
+            </a:ln>
+            <a:effectLst/>
+          </c:spPr>
+        </c:majorGridlines>
         <c:numFmt formatCode="General" sourceLinked="1"/>
-        <c:majorTickMark val="out"/>
+        <c:majorTickMark val="none"/>
         <c:minorTickMark val="none"/>
         <c:tickLblPos val="nextTo"/>
-        <c:crossAx val="89700608"/>
+        <c:spPr>
+          <a:noFill/>
+          <a:ln w="9525" cap="flat" cmpd="sng" algn="ctr">
+            <a:solidFill>
+              <a:schemeClr val="tx1">
+                <a:lumMod val="25000"/>
+                <a:lumOff val="75000"/>
+              </a:schemeClr>
+            </a:solidFill>
+            <a:round/>
+          </a:ln>
+          <a:effectLst/>
+        </c:spPr>
+        <c:txPr>
+          <a:bodyPr rot="-60000000" spcFirstLastPara="1" vertOverflow="ellipsis" vert="horz" wrap="square" anchor="ctr" anchorCtr="1"/>
+          <a:lstStyle/>
+          <a:p>
+            <a:pPr>
+              <a:defRPr sz="900" b="0" i="0" u="none" strike="noStrike" kern="1200" baseline="0">
+                <a:solidFill>
+                  <a:schemeClr val="tx1">
+                    <a:lumMod val="65000"/>
+                    <a:lumOff val="35000"/>
+                  </a:schemeClr>
+                </a:solidFill>
+                <a:latin typeface="+mn-lt"/>
+                <a:ea typeface="+mn-ea"/>
+                <a:cs typeface="+mn-cs"/>
+              </a:defRPr>
+            </a:pPr>
+            <a:endParaRPr lang="en-US"/>
+          </a:p>
+        </c:txPr>
+        <c:crossAx val="1097201647"/>
         <c:crosses val="autoZero"/>
         <c:crossBetween val="midCat"/>
       </c:valAx>
+      <c:spPr>
+        <a:noFill/>
+        <a:ln>
+          <a:noFill/>
+        </a:ln>
+        <a:effectLst/>
+      </c:spPr>
     </c:plotArea>
-    <c:legend>
-      <c:legendPos val="r"/>
-      <c:overlay val="0"/>
-    </c:legend>
     <c:plotVisOnly val="1"/>
     <c:dispBlanksAs val="gap"/>
     <c:showDLblsOverMax val="0"/>
+    <c:extLst>
+      <c:ext xmlns:c16r3="http://schemas.microsoft.com/office/drawing/2017/03/chart" uri="{56B9EC1D-385E-4148-901F-78D8002777C0}">
+        <c16r3:dataDisplayOptions16>
+          <c16r3:dispNaAsBlank val="1"/>
+        </c16r3:dataDisplayOptions16>
+      </c:ext>
+    </c:extLst>
   </c:chart>
   <c:spPr>
-    <a:ln w="34925">
-      <a:solidFill>
-        <a:schemeClr val="accent2"/>
-      </a:solidFill>
+    <a:noFill/>
+    <a:ln>
+      <a:noFill/>
     </a:ln>
+    <a:effectLst/>
   </c:spPr>
-  <c:externalData r:id="rId1">
+  <c:txPr>
+    <a:bodyPr/>
+    <a:lstStyle/>
+    <a:p>
+      <a:pPr>
+        <a:defRPr/>
+      </a:pPr>
+      <a:endParaRPr lang="en-US"/>
+    </a:p>
+  </c:txPr>
+  <c:externalData r:id="rId3">
     <c:autoUpdate val="0"/>
   </c:externalData>
 </c:chartSpace>
+</file>
+
+<file path=ppt/charts/colors1.xml><?xml version="1.0" encoding="utf-8"?>
+<cs:colorStyle xmlns:cs="http://schemas.microsoft.com/office/drawing/2012/chartStyle" xmlns:a="http://schemas.openxmlformats.org/drawingml/2006/main" meth="cycle" id="10">
+  <a:schemeClr val="accent1"/>
+  <a:schemeClr val="accent2"/>
+  <a:schemeClr val="accent3"/>
+  <a:schemeClr val="accent4"/>
+  <a:schemeClr val="accent5"/>
+  <a:schemeClr val="accent6"/>
+  <cs:variation/>
+  <cs:variation>
+    <a:lumMod val="60000"/>
+  </cs:variation>
+  <cs:variation>
+    <a:lumMod val="80000"/>
+    <a:lumOff val="20000"/>
+  </cs:variation>
+  <cs:variation>
+    <a:lumMod val="80000"/>
+  </cs:variation>
+  <cs:variation>
+    <a:lumMod val="60000"/>
+    <a:lumOff val="40000"/>
+  </cs:variation>
+  <cs:variation>
+    <a:lumMod val="50000"/>
+  </cs:variation>
+  <cs:variation>
+    <a:lumMod val="70000"/>
+    <a:lumOff val="30000"/>
+  </cs:variation>
+  <cs:variation>
+    <a:lumMod val="70000"/>
+  </cs:variation>
+  <cs:variation>
+    <a:lumMod val="50000"/>
+    <a:lumOff val="50000"/>
+  </cs:variation>
+</cs:colorStyle>
+</file>
+
+<file path=ppt/charts/style1.xml><?xml version="1.0" encoding="utf-8"?>
+<cs:chartStyle xmlns:cs="http://schemas.microsoft.com/office/drawing/2012/chartStyle" xmlns:a="http://schemas.openxmlformats.org/drawingml/2006/main" id="240">
+  <cs:axisTitle>
+    <cs:lnRef idx="0"/>
+    <cs:fillRef idx="0"/>
+    <cs:effectRef idx="0"/>
+    <cs:fontRef idx="minor">
+      <a:schemeClr val="tx1">
+        <a:lumMod val="65000"/>
+        <a:lumOff val="35000"/>
+      </a:schemeClr>
+    </cs:fontRef>
+    <cs:defRPr sz="1000" kern="1200"/>
+  </cs:axisTitle>
+  <cs:categoryAxis>
+    <cs:lnRef idx="0"/>
+    <cs:fillRef idx="0"/>
+    <cs:effectRef idx="0"/>
+    <cs:fontRef idx="minor">
+      <a:schemeClr val="tx1">
+        <a:lumMod val="65000"/>
+        <a:lumOff val="35000"/>
+      </a:schemeClr>
+    </cs:fontRef>
+    <cs:spPr>
+      <a:ln w="9525" cap="flat" cmpd="sng" algn="ctr">
+        <a:solidFill>
+          <a:schemeClr val="tx1">
+            <a:lumMod val="25000"/>
+            <a:lumOff val="75000"/>
+          </a:schemeClr>
+        </a:solidFill>
+        <a:round/>
+      </a:ln>
+    </cs:spPr>
+    <cs:defRPr sz="900" kern="1200"/>
+  </cs:categoryAxis>
+  <cs:chartArea mods="allowNoFillOverride allowNoLineOverride">
+    <cs:lnRef idx="0"/>
+    <cs:fillRef idx="0"/>
+    <cs:effectRef idx="0"/>
+    <cs:fontRef idx="minor">
+      <a:schemeClr val="tx1"/>
+    </cs:fontRef>
+    <cs:spPr>
+      <a:solidFill>
+        <a:schemeClr val="bg1"/>
+      </a:solidFill>
+      <a:ln w="9525" cap="flat" cmpd="sng" algn="ctr">
+        <a:solidFill>
+          <a:schemeClr val="tx1">
+            <a:lumMod val="15000"/>
+            <a:lumOff val="85000"/>
+          </a:schemeClr>
+        </a:solidFill>
+        <a:round/>
+      </a:ln>
+    </cs:spPr>
+    <cs:defRPr sz="1000" kern="1200"/>
+  </cs:chartArea>
+  <cs:dataLabel>
+    <cs:lnRef idx="0"/>
+    <cs:fillRef idx="0"/>
+    <cs:effectRef idx="0"/>
+    <cs:fontRef idx="minor">
+      <a:schemeClr val="tx1">
+        <a:lumMod val="75000"/>
+        <a:lumOff val="25000"/>
+      </a:schemeClr>
+    </cs:fontRef>
+    <cs:defRPr sz="900" kern="1200"/>
+  </cs:dataLabel>
+  <cs:dataLabelCallout>
+    <cs:lnRef idx="0"/>
+    <cs:fillRef idx="0"/>
+    <cs:effectRef idx="0"/>
+    <cs:fontRef idx="minor">
+      <a:schemeClr val="dk1">
+        <a:lumMod val="65000"/>
+        <a:lumOff val="35000"/>
+      </a:schemeClr>
+    </cs:fontRef>
+    <cs:spPr>
+      <a:solidFill>
+        <a:schemeClr val="lt1"/>
+      </a:solidFill>
+      <a:ln>
+        <a:solidFill>
+          <a:schemeClr val="dk1">
+            <a:lumMod val="25000"/>
+            <a:lumOff val="75000"/>
+          </a:schemeClr>
+        </a:solidFill>
+      </a:ln>
+    </cs:spPr>
+    <cs:defRPr sz="900" kern="1200"/>
+    <cs:bodyPr rot="0" spcFirstLastPara="1" vertOverflow="clip" horzOverflow="clip" vert="horz" wrap="square" lIns="36576" tIns="18288" rIns="36576" bIns="18288" anchor="ctr" anchorCtr="1">
+      <a:spAutoFit/>
+    </cs:bodyPr>
+  </cs:dataLabelCallout>
+  <cs:dataPoint>
+    <cs:lnRef idx="0"/>
+    <cs:fillRef idx="1">
+      <cs:styleClr val="auto"/>
+    </cs:fillRef>
+    <cs:effectRef idx="0"/>
+    <cs:fontRef idx="minor">
+      <a:schemeClr val="tx1"/>
+    </cs:fontRef>
+  </cs:dataPoint>
+  <cs:dataPoint3D>
+    <cs:lnRef idx="0"/>
+    <cs:fillRef idx="1">
+      <cs:styleClr val="auto"/>
+    </cs:fillRef>
+    <cs:effectRef idx="0"/>
+    <cs:fontRef idx="minor">
+      <a:schemeClr val="tx1"/>
+    </cs:fontRef>
+  </cs:dataPoint3D>
+  <cs:dataPointLine>
+    <cs:lnRef idx="0">
+      <cs:styleClr val="auto"/>
+    </cs:lnRef>
+    <cs:fillRef idx="1"/>
+    <cs:effectRef idx="0"/>
+    <cs:fontRef idx="minor">
+      <a:schemeClr val="tx1"/>
+    </cs:fontRef>
+    <cs:spPr>
+      <a:ln w="19050" cap="rnd">
+        <a:solidFill>
+          <a:schemeClr val="phClr"/>
+        </a:solidFill>
+        <a:round/>
+      </a:ln>
+    </cs:spPr>
+  </cs:dataPointLine>
+  <cs:dataPointMarker>
+    <cs:lnRef idx="0">
+      <cs:styleClr val="auto"/>
+    </cs:lnRef>
+    <cs:fillRef idx="1">
+      <cs:styleClr val="auto"/>
+    </cs:fillRef>
+    <cs:effectRef idx="0"/>
+    <cs:fontRef idx="minor">
+      <a:schemeClr val="tx1"/>
+    </cs:fontRef>
+    <cs:spPr>
+      <a:ln w="9525">
+        <a:solidFill>
+          <a:schemeClr val="phClr"/>
+        </a:solidFill>
+      </a:ln>
+    </cs:spPr>
+  </cs:dataPointMarker>
+  <cs:dataPointMarkerLayout symbol="circle" size="5"/>
+  <cs:dataPointWireframe>
+    <cs:lnRef idx="0">
+      <cs:styleClr val="auto"/>
+    </cs:lnRef>
+    <cs:fillRef idx="0"/>
+    <cs:effectRef idx="0"/>
+    <cs:fontRef idx="minor">
+      <a:schemeClr val="dk1"/>
+    </cs:fontRef>
+    <cs:spPr>
+      <a:ln w="9525" cap="rnd">
+        <a:solidFill>
+          <a:schemeClr val="phClr"/>
+        </a:solidFill>
+        <a:round/>
+      </a:ln>
+    </cs:spPr>
+  </cs:dataPointWireframe>
+  <cs:dataTable>
+    <cs:lnRef idx="0"/>
+    <cs:fillRef idx="0"/>
+    <cs:effectRef idx="0"/>
+    <cs:fontRef idx="minor">
+      <a:schemeClr val="tx1">
+        <a:lumMod val="65000"/>
+        <a:lumOff val="35000"/>
+      </a:schemeClr>
+    </cs:fontRef>
+    <cs:spPr>
+      <a:noFill/>
+      <a:ln w="9525" cap="flat" cmpd="sng" algn="ctr">
+        <a:solidFill>
+          <a:schemeClr val="tx1">
+            <a:lumMod val="15000"/>
+            <a:lumOff val="85000"/>
+          </a:schemeClr>
+        </a:solidFill>
+        <a:round/>
+      </a:ln>
+    </cs:spPr>
+    <cs:defRPr sz="900" kern="1200"/>
+  </cs:dataTable>
+  <cs:downBar>
+    <cs:lnRef idx="0"/>
+    <cs:fillRef idx="0"/>
+    <cs:effectRef idx="0"/>
+    <cs:fontRef idx="minor">
+      <a:schemeClr val="tx1"/>
+    </cs:fontRef>
+    <cs:spPr>
+      <a:solidFill>
+        <a:schemeClr val="dk1">
+          <a:lumMod val="75000"/>
+          <a:lumOff val="25000"/>
+        </a:schemeClr>
+      </a:solidFill>
+      <a:ln w="9525" cap="flat" cmpd="sng" algn="ctr">
+        <a:solidFill>
+          <a:schemeClr val="tx1">
+            <a:lumMod val="65000"/>
+            <a:lumOff val="35000"/>
+          </a:schemeClr>
+        </a:solidFill>
+        <a:round/>
+      </a:ln>
+    </cs:spPr>
+  </cs:downBar>
+  <cs:dropLine>
+    <cs:lnRef idx="0"/>
+    <cs:fillRef idx="0"/>
+    <cs:effectRef idx="0"/>
+    <cs:fontRef idx="minor">
+      <a:schemeClr val="tx1"/>
+    </cs:fontRef>
+    <cs:spPr>
+      <a:ln w="9525" cap="flat" cmpd="sng" algn="ctr">
+        <a:solidFill>
+          <a:schemeClr val="tx1">
+            <a:lumMod val="35000"/>
+            <a:lumOff val="65000"/>
+          </a:schemeClr>
+        </a:solidFill>
+        <a:round/>
+      </a:ln>
+    </cs:spPr>
+  </cs:dropLine>
+  <cs:errorBar>
+    <cs:lnRef idx="0"/>
+    <cs:fillRef idx="0"/>
+    <cs:effectRef idx="0"/>
+    <cs:fontRef idx="minor">
+      <a:schemeClr val="tx1"/>
+    </cs:fontRef>
+    <cs:spPr>
+      <a:ln w="9525" cap="flat" cmpd="sng" algn="ctr">
+        <a:solidFill>
+          <a:schemeClr val="tx1">
+            <a:lumMod val="65000"/>
+            <a:lumOff val="35000"/>
+          </a:schemeClr>
+        </a:solidFill>
+        <a:round/>
+      </a:ln>
+    </cs:spPr>
+  </cs:errorBar>
+  <cs:floor>
+    <cs:lnRef idx="0"/>
+    <cs:fillRef idx="0"/>
+    <cs:effectRef idx="0"/>
+    <cs:fontRef idx="minor">
+      <a:schemeClr val="tx1"/>
+    </cs:fontRef>
+    <cs:spPr>
+      <a:noFill/>
+      <a:ln>
+        <a:noFill/>
+      </a:ln>
+    </cs:spPr>
+  </cs:floor>
+  <cs:gridlineMajor>
+    <cs:lnRef idx="0"/>
+    <cs:fillRef idx="0"/>
+    <cs:effectRef idx="0"/>
+    <cs:fontRef idx="minor">
+      <a:schemeClr val="tx1"/>
+    </cs:fontRef>
+    <cs:spPr>
+      <a:ln w="9525" cap="flat" cmpd="sng" algn="ctr">
+        <a:solidFill>
+          <a:schemeClr val="tx1">
+            <a:lumMod val="15000"/>
+            <a:lumOff val="85000"/>
+          </a:schemeClr>
+        </a:solidFill>
+        <a:round/>
+      </a:ln>
+    </cs:spPr>
+  </cs:gridlineMajor>
+  <cs:gridlineMinor>
+    <cs:lnRef idx="0"/>
+    <cs:fillRef idx="0"/>
+    <cs:effectRef idx="0"/>
+    <cs:fontRef idx="minor">
+      <a:schemeClr val="tx1"/>
+    </cs:fontRef>
+    <cs:spPr>
+      <a:ln w="9525" cap="flat" cmpd="sng" algn="ctr">
+        <a:solidFill>
+          <a:schemeClr val="tx1">
+            <a:lumMod val="5000"/>
+            <a:lumOff val="95000"/>
+          </a:schemeClr>
+        </a:solidFill>
+        <a:round/>
+      </a:ln>
+    </cs:spPr>
+  </cs:gridlineMinor>
+  <cs:hiLoLine>
+    <cs:lnRef idx="0"/>
+    <cs:fillRef idx="0"/>
+    <cs:effectRef idx="0"/>
+    <cs:fontRef idx="minor">
+      <a:schemeClr val="tx1"/>
+    </cs:fontRef>
+    <cs:spPr>
+      <a:ln w="9525" cap="flat" cmpd="sng" algn="ctr">
+        <a:solidFill>
+          <a:schemeClr val="tx1">
+            <a:lumMod val="50000"/>
+            <a:lumOff val="50000"/>
+          </a:schemeClr>
+        </a:solidFill>
+        <a:round/>
+      </a:ln>
+    </cs:spPr>
+  </cs:hiLoLine>
+  <cs:leaderLine>
+    <cs:lnRef idx="0"/>
+    <cs:fillRef idx="0"/>
+    <cs:effectRef idx="0"/>
+    <cs:fontRef idx="minor">
+      <a:schemeClr val="tx1"/>
+    </cs:fontRef>
+    <cs:spPr>
+      <a:ln w="9525" cap="flat" cmpd="sng" algn="ctr">
+        <a:solidFill>
+          <a:schemeClr val="tx1">
+            <a:lumMod val="35000"/>
+            <a:lumOff val="65000"/>
+          </a:schemeClr>
+        </a:solidFill>
+        <a:round/>
+      </a:ln>
+    </cs:spPr>
+  </cs:leaderLine>
+  <cs:legend>
+    <cs:lnRef idx="0"/>
+    <cs:fillRef idx="0"/>
+    <cs:effectRef idx="0"/>
+    <cs:fontRef idx="minor">
+      <a:schemeClr val="tx1">
+        <a:lumMod val="65000"/>
+        <a:lumOff val="35000"/>
+      </a:schemeClr>
+    </cs:fontRef>
+    <cs:defRPr sz="900" kern="1200"/>
+  </cs:legend>
+  <cs:plotArea mods="allowNoFillOverride allowNoLineOverride">
+    <cs:lnRef idx="0"/>
+    <cs:fillRef idx="0"/>
+    <cs:effectRef idx="0"/>
+    <cs:fontRef idx="minor">
+      <a:schemeClr val="tx1"/>
+    </cs:fontRef>
+  </cs:plotArea>
+  <cs:plotArea3D mods="allowNoFillOverride allowNoLineOverride">
+    <cs:lnRef idx="0"/>
+    <cs:fillRef idx="0"/>
+    <cs:effectRef idx="0"/>
+    <cs:fontRef idx="minor">
+      <a:schemeClr val="tx1"/>
+    </cs:fontRef>
+  </cs:plotArea3D>
+  <cs:seriesAxis>
+    <cs:lnRef idx="0"/>
+    <cs:fillRef idx="0"/>
+    <cs:effectRef idx="0"/>
+    <cs:fontRef idx="minor">
+      <a:schemeClr val="tx1">
+        <a:lumMod val="65000"/>
+        <a:lumOff val="35000"/>
+      </a:schemeClr>
+    </cs:fontRef>
+    <cs:defRPr sz="900" kern="1200"/>
+  </cs:seriesAxis>
+  <cs:seriesLine>
+    <cs:lnRef idx="0"/>
+    <cs:fillRef idx="0"/>
+    <cs:effectRef idx="0"/>
+    <cs:fontRef idx="minor">
+      <a:schemeClr val="tx1"/>
+    </cs:fontRef>
+    <cs:spPr>
+      <a:ln w="9525" cap="flat" cmpd="sng" algn="ctr">
+        <a:solidFill>
+          <a:schemeClr val="tx1">
+            <a:lumMod val="35000"/>
+            <a:lumOff val="65000"/>
+          </a:schemeClr>
+        </a:solidFill>
+        <a:round/>
+      </a:ln>
+    </cs:spPr>
+  </cs:seriesLine>
+  <cs:title>
+    <cs:lnRef idx="0"/>
+    <cs:fillRef idx="0"/>
+    <cs:effectRef idx="0"/>
+    <cs:fontRef idx="minor">
+      <a:schemeClr val="tx1">
+        <a:lumMod val="65000"/>
+        <a:lumOff val="35000"/>
+      </a:schemeClr>
+    </cs:fontRef>
+    <cs:defRPr sz="1400" b="0" kern="1200" spc="0" baseline="0"/>
+  </cs:title>
+  <cs:trendline>
+    <cs:lnRef idx="0">
+      <cs:styleClr val="auto"/>
+    </cs:lnRef>
+    <cs:fillRef idx="0"/>
+    <cs:effectRef idx="0"/>
+    <cs:fontRef idx="minor">
+      <a:schemeClr val="tx1"/>
+    </cs:fontRef>
+    <cs:spPr>
+      <a:ln w="19050" cap="rnd">
+        <a:solidFill>
+          <a:schemeClr val="phClr"/>
+        </a:solidFill>
+        <a:prstDash val="sysDot"/>
+      </a:ln>
+    </cs:spPr>
+  </cs:trendline>
+  <cs:trendlineLabel>
+    <cs:lnRef idx="0"/>
+    <cs:fillRef idx="0"/>
+    <cs:effectRef idx="0"/>
+    <cs:fontRef idx="minor">
+      <a:schemeClr val="tx1">
+        <a:lumMod val="65000"/>
+        <a:lumOff val="35000"/>
+      </a:schemeClr>
+    </cs:fontRef>
+    <cs:defRPr sz="900" kern="1200"/>
+  </cs:trendlineLabel>
+  <cs:upBar>
+    <cs:lnRef idx="0"/>
+    <cs:fillRef idx="0"/>
+    <cs:effectRef idx="0"/>
+    <cs:fontRef idx="minor">
+      <a:schemeClr val="tx1"/>
+    </cs:fontRef>
+    <cs:spPr>
+      <a:solidFill>
+        <a:schemeClr val="lt1"/>
+      </a:solidFill>
+      <a:ln w="9525" cap="flat" cmpd="sng" algn="ctr">
+        <a:solidFill>
+          <a:schemeClr val="tx1">
+            <a:lumMod val="65000"/>
+            <a:lumOff val="35000"/>
+          </a:schemeClr>
+        </a:solidFill>
+        <a:round/>
+      </a:ln>
+    </cs:spPr>
+  </cs:upBar>
+  <cs:valueAxis>
+    <cs:lnRef idx="0"/>
+    <cs:fillRef idx="0"/>
+    <cs:effectRef idx="0"/>
+    <cs:fontRef idx="minor">
+      <a:schemeClr val="tx1">
+        <a:lumMod val="65000"/>
+        <a:lumOff val="35000"/>
+      </a:schemeClr>
+    </cs:fontRef>
+    <cs:spPr>
+      <a:ln w="9525" cap="flat" cmpd="sng" algn="ctr">
+        <a:solidFill>
+          <a:schemeClr val="tx1">
+            <a:lumMod val="25000"/>
+            <a:lumOff val="75000"/>
+          </a:schemeClr>
+        </a:solidFill>
+        <a:round/>
+      </a:ln>
+    </cs:spPr>
+    <cs:defRPr sz="900" kern="1200"/>
+  </cs:valueAxis>
+  <cs:wall>
+    <cs:lnRef idx="0"/>
+    <cs:fillRef idx="0"/>
+    <cs:effectRef idx="0"/>
+    <cs:fontRef idx="minor">
+      <a:schemeClr val="tx1"/>
+    </cs:fontRef>
+    <cs:spPr>
+      <a:noFill/>
+      <a:ln>
+        <a:noFill/>
+      </a:ln>
+    </cs:spPr>
+  </cs:wall>
+</cs:chartStyle>
 </file>
 
 <file path=ppt/handoutMasters/handoutMaster1.xml><?xml version="1.0" encoding="utf-8"?>
@@ -748,7 +1248,7 @@
               <a:pPr>
                 <a:defRPr/>
               </a:pPr>
-              <a:t>9/16/2026</a:t>
+              <a:t>9/21/2026</a:t>
             </a:fld>
             <a:endParaRPr lang="en-US"/>
           </a:p>
@@ -955,7 +1455,7 @@
               <a:pPr>
                 <a:defRPr/>
               </a:pPr>
-              <a:t>9/16/2026</a:t>
+              <a:t>9/21/2026</a:t>
             </a:fld>
             <a:endParaRPr lang="en-US"/>
           </a:p>
@@ -2541,1257 +3041,6 @@
 </file>
 
 <file path=ppt/slideLayouts/slideLayout2.xml><?xml version="1.0" encoding="utf-8"?>
-<p:sldLayout xmlns:a="http://schemas.openxmlformats.org/drawingml/2006/main" xmlns:r="http://schemas.openxmlformats.org/officeDocument/2006/relationships" xmlns:p="http://schemas.openxmlformats.org/presentationml/2006/main" userDrawn="1">
-  <p:cSld name="LBNL 3-Column Teal V Poster ">
-    <p:spTree>
-      <p:nvGrpSpPr>
-        <p:cNvPr id="1" name=""/>
-        <p:cNvGrpSpPr/>
-        <p:nvPr/>
-      </p:nvGrpSpPr>
-      <p:grpSpPr>
-        <a:xfrm>
-          <a:off x="0" y="0"/>
-          <a:ext cx="0" cy="0"/>
-          <a:chOff x="0" y="0"/>
-          <a:chExt cx="0" cy="0"/>
-        </a:xfrm>
-      </p:grpSpPr>
-      <p:sp>
-        <p:nvSpPr>
-          <p:cNvPr id="4" name="Text Placeholder 3"/>
-          <p:cNvSpPr>
-            <a:spLocks noGrp="1"/>
-          </p:cNvSpPr>
-          <p:nvPr>
-            <p:ph type="body" sz="quarter" idx="10"/>
-          </p:nvPr>
-        </p:nvSpPr>
-        <p:spPr>
-          <a:xfrm>
-            <a:off x="621628" y="9203268"/>
-            <a:ext cx="9344003" cy="830975"/>
-          </a:xfrm>
-          <a:prstGeom prst="rect">
-            <a:avLst/>
-          </a:prstGeom>
-        </p:spPr>
-        <p:txBody>
-          <a:bodyPr wrap="square" lIns="228589" tIns="228589" rIns="228589" bIns="228589">
-            <a:spAutoFit/>
-          </a:bodyPr>
-          <a:lstStyle>
-            <a:lvl1pPr marL="314321" indent="-314321">
-              <a:buNone/>
-              <a:defRPr sz="2200">
-                <a:solidFill>
-                  <a:srgbClr val="00313C"/>
-                </a:solidFill>
-                <a:latin typeface="+mn-lt"/>
-              </a:defRPr>
-            </a:lvl1pPr>
-            <a:lvl2pPr marL="1362056" indent="-523867">
-              <a:defRPr sz="2292">
-                <a:latin typeface="Trebuchet MS" pitchFamily="34" charset="0"/>
-              </a:defRPr>
-            </a:lvl2pPr>
-            <a:lvl3pPr marL="1885924" indent="-523867">
-              <a:defRPr sz="2292">
-                <a:latin typeface="Trebuchet MS" pitchFamily="34" charset="0"/>
-              </a:defRPr>
-            </a:lvl3pPr>
-            <a:lvl4pPr marL="2462179" indent="-576255">
-              <a:defRPr sz="2292">
-                <a:latin typeface="Trebuchet MS" pitchFamily="34" charset="0"/>
-              </a:defRPr>
-            </a:lvl4pPr>
-            <a:lvl5pPr marL="2881273" indent="-419094">
-              <a:defRPr sz="2292">
-                <a:latin typeface="Trebuchet MS" pitchFamily="34" charset="0"/>
-              </a:defRPr>
-            </a:lvl5pPr>
-          </a:lstStyle>
-          <a:p>
-            <a:pPr lvl="0"/>
-            <a:r>
-              <a:rPr lang="en-US" dirty="0"/>
-              <a:t>Click to edit Master text styles</a:t>
-            </a:r>
-          </a:p>
-        </p:txBody>
-      </p:sp>
-      <p:sp>
-        <p:nvSpPr>
-          <p:cNvPr id="6" name="Text Placeholder 5"/>
-          <p:cNvSpPr>
-            <a:spLocks noGrp="1"/>
-          </p:cNvSpPr>
-          <p:nvPr>
-            <p:ph type="body" sz="quarter" idx="11"/>
-          </p:nvPr>
-        </p:nvSpPr>
-        <p:spPr>
-          <a:xfrm>
-            <a:off x="634107" y="8028408"/>
-            <a:ext cx="9331525" cy="891334"/>
-          </a:xfrm>
-          <a:prstGeom prst="rect">
-            <a:avLst/>
-          </a:prstGeom>
-          <a:solidFill>
-            <a:schemeClr val="accent1"/>
-          </a:solidFill>
-        </p:spPr>
-        <p:txBody>
-          <a:bodyPr wrap="square" lIns="182880" tIns="182880" rIns="182880" bIns="182880" anchor="ctr" anchorCtr="0">
-            <a:spAutoFit/>
-          </a:bodyPr>
-          <a:lstStyle>
-            <a:lvl1pPr algn="ctr">
-              <a:buNone/>
-              <a:defRPr sz="3392" b="1" baseline="0">
-                <a:solidFill>
-                  <a:schemeClr val="bg1"/>
-                </a:solidFill>
-              </a:defRPr>
-            </a:lvl1pPr>
-          </a:lstStyle>
-          <a:p>
-            <a:pPr lvl="0"/>
-            <a:r>
-              <a:rPr lang="en-US" dirty="0"/>
-              <a:t>Click to edit Master text styles</a:t>
-            </a:r>
-          </a:p>
-        </p:txBody>
-      </p:sp>
-      <p:sp>
-        <p:nvSpPr>
-          <p:cNvPr id="19" name="Text Placeholder 3"/>
-          <p:cNvSpPr>
-            <a:spLocks noGrp="1"/>
-          </p:cNvSpPr>
-          <p:nvPr>
-            <p:ph type="body" sz="quarter" idx="19"/>
-          </p:nvPr>
-        </p:nvSpPr>
-        <p:spPr>
-          <a:xfrm>
-            <a:off x="634108" y="24430406"/>
-            <a:ext cx="9345094" cy="830975"/>
-          </a:xfrm>
-          <a:prstGeom prst="rect">
-            <a:avLst/>
-          </a:prstGeom>
-        </p:spPr>
-        <p:txBody>
-          <a:bodyPr wrap="square" lIns="228589" tIns="228589" rIns="228589" bIns="228589">
-            <a:spAutoFit/>
-          </a:bodyPr>
-          <a:lstStyle>
-            <a:lvl1pPr marL="314321" indent="-314321">
-              <a:buNone/>
-              <a:defRPr sz="2200">
-                <a:solidFill>
-                  <a:srgbClr val="00313C"/>
-                </a:solidFill>
-                <a:latin typeface="+mn-lt"/>
-              </a:defRPr>
-            </a:lvl1pPr>
-            <a:lvl2pPr marL="1362056" indent="-523867">
-              <a:defRPr sz="2292">
-                <a:latin typeface="Trebuchet MS" pitchFamily="34" charset="0"/>
-              </a:defRPr>
-            </a:lvl2pPr>
-            <a:lvl3pPr marL="1885924" indent="-523867">
-              <a:defRPr sz="2292">
-                <a:latin typeface="Trebuchet MS" pitchFamily="34" charset="0"/>
-              </a:defRPr>
-            </a:lvl3pPr>
-            <a:lvl4pPr marL="2462179" indent="-576255">
-              <a:defRPr sz="2292">
-                <a:latin typeface="Trebuchet MS" pitchFamily="34" charset="0"/>
-              </a:defRPr>
-            </a:lvl4pPr>
-            <a:lvl5pPr marL="2881273" indent="-419094">
-              <a:defRPr sz="2292">
-                <a:latin typeface="Trebuchet MS" pitchFamily="34" charset="0"/>
-              </a:defRPr>
-            </a:lvl5pPr>
-          </a:lstStyle>
-          <a:p>
-            <a:pPr lvl="0"/>
-            <a:r>
-              <a:rPr lang="en-US"/>
-              <a:t>Click to edit Master text styles</a:t>
-            </a:r>
-          </a:p>
-        </p:txBody>
-      </p:sp>
-      <p:sp>
-        <p:nvSpPr>
-          <p:cNvPr id="20" name="Text Placeholder 5"/>
-          <p:cNvSpPr>
-            <a:spLocks noGrp="1"/>
-          </p:cNvSpPr>
-          <p:nvPr>
-            <p:ph type="body" sz="quarter" idx="20"/>
-          </p:nvPr>
-        </p:nvSpPr>
-        <p:spPr>
-          <a:xfrm>
-            <a:off x="647680" y="23170778"/>
-            <a:ext cx="9331524" cy="891334"/>
-          </a:xfrm>
-          <a:prstGeom prst="rect">
-            <a:avLst/>
-          </a:prstGeom>
-          <a:solidFill>
-            <a:schemeClr val="accent1"/>
-          </a:solidFill>
-        </p:spPr>
-        <p:txBody>
-          <a:bodyPr wrap="square" lIns="182880" tIns="182880" rIns="182880" bIns="182880" anchor="ctr" anchorCtr="0">
-            <a:spAutoFit/>
-          </a:bodyPr>
-          <a:lstStyle>
-            <a:lvl1pPr algn="ctr">
-              <a:buNone/>
-              <a:defRPr sz="3392" b="1" baseline="0">
-                <a:solidFill>
-                  <a:schemeClr val="bg1"/>
-                </a:solidFill>
-              </a:defRPr>
-            </a:lvl1pPr>
-          </a:lstStyle>
-          <a:p>
-            <a:pPr lvl="0"/>
-            <a:r>
-              <a:rPr lang="en-US"/>
-              <a:t>Click to edit Master text styles</a:t>
-            </a:r>
-          </a:p>
-        </p:txBody>
-      </p:sp>
-      <p:sp>
-        <p:nvSpPr>
-          <p:cNvPr id="21" name="Text Placeholder 3"/>
-          <p:cNvSpPr>
-            <a:spLocks noGrp="1"/>
-          </p:cNvSpPr>
-          <p:nvPr>
-            <p:ph type="body" sz="quarter" idx="21"/>
-          </p:nvPr>
-        </p:nvSpPr>
-        <p:spPr>
-          <a:xfrm>
-            <a:off x="10418565" y="28870984"/>
-            <a:ext cx="9330430" cy="830975"/>
-          </a:xfrm>
-          <a:prstGeom prst="rect">
-            <a:avLst/>
-          </a:prstGeom>
-        </p:spPr>
-        <p:txBody>
-          <a:bodyPr wrap="square" lIns="228589" tIns="228589" rIns="228589" bIns="228589">
-            <a:spAutoFit/>
-          </a:bodyPr>
-          <a:lstStyle>
-            <a:lvl1pPr marL="314321" indent="-314321">
-              <a:buNone/>
-              <a:defRPr sz="2200">
-                <a:solidFill>
-                  <a:srgbClr val="00313C"/>
-                </a:solidFill>
-                <a:latin typeface="+mn-lt"/>
-              </a:defRPr>
-            </a:lvl1pPr>
-            <a:lvl2pPr marL="1362056" indent="-523867">
-              <a:defRPr sz="2292">
-                <a:latin typeface="Trebuchet MS" pitchFamily="34" charset="0"/>
-              </a:defRPr>
-            </a:lvl2pPr>
-            <a:lvl3pPr marL="1885924" indent="-523867">
-              <a:defRPr sz="2292">
-                <a:latin typeface="Trebuchet MS" pitchFamily="34" charset="0"/>
-              </a:defRPr>
-            </a:lvl3pPr>
-            <a:lvl4pPr marL="2462179" indent="-576255">
-              <a:defRPr sz="2292">
-                <a:latin typeface="Trebuchet MS" pitchFamily="34" charset="0"/>
-              </a:defRPr>
-            </a:lvl4pPr>
-            <a:lvl5pPr marL="2881273" indent="-419094">
-              <a:defRPr sz="2292">
-                <a:latin typeface="Trebuchet MS" pitchFamily="34" charset="0"/>
-              </a:defRPr>
-            </a:lvl5pPr>
-          </a:lstStyle>
-          <a:p>
-            <a:pPr lvl="0"/>
-            <a:r>
-              <a:rPr lang="en-US" dirty="0"/>
-              <a:t>Click to edit Master text styles</a:t>
-            </a:r>
-          </a:p>
-        </p:txBody>
-      </p:sp>
-      <p:sp>
-        <p:nvSpPr>
-          <p:cNvPr id="22" name="Text Placeholder 5"/>
-          <p:cNvSpPr>
-            <a:spLocks noGrp="1"/>
-          </p:cNvSpPr>
-          <p:nvPr>
-            <p:ph type="body" sz="quarter" idx="22"/>
-          </p:nvPr>
-        </p:nvSpPr>
-        <p:spPr>
-          <a:xfrm>
-            <a:off x="10418565" y="27611356"/>
-            <a:ext cx="9330430" cy="891334"/>
-          </a:xfrm>
-          <a:prstGeom prst="rect">
-            <a:avLst/>
-          </a:prstGeom>
-          <a:solidFill>
-            <a:schemeClr val="accent1"/>
-          </a:solidFill>
-        </p:spPr>
-        <p:txBody>
-          <a:bodyPr wrap="square" lIns="182880" tIns="182880" rIns="182880" bIns="182880" anchor="ctr" anchorCtr="0">
-            <a:spAutoFit/>
-          </a:bodyPr>
-          <a:lstStyle>
-            <a:lvl1pPr algn="ctr">
-              <a:buNone/>
-              <a:defRPr sz="3392" b="1" baseline="0">
-                <a:solidFill>
-                  <a:schemeClr val="bg1"/>
-                </a:solidFill>
-              </a:defRPr>
-            </a:lvl1pPr>
-          </a:lstStyle>
-          <a:p>
-            <a:pPr lvl="0"/>
-            <a:r>
-              <a:rPr lang="en-US"/>
-              <a:t>Click to edit Master text styles</a:t>
-            </a:r>
-          </a:p>
-        </p:txBody>
-      </p:sp>
-      <p:sp>
-        <p:nvSpPr>
-          <p:cNvPr id="23" name="Text Placeholder 3"/>
-          <p:cNvSpPr>
-            <a:spLocks noGrp="1"/>
-          </p:cNvSpPr>
-          <p:nvPr>
-            <p:ph type="body" sz="quarter" idx="23"/>
-          </p:nvPr>
-        </p:nvSpPr>
-        <p:spPr>
-          <a:xfrm>
-            <a:off x="10424023" y="9235352"/>
-            <a:ext cx="9330430" cy="830975"/>
-          </a:xfrm>
-          <a:prstGeom prst="rect">
-            <a:avLst/>
-          </a:prstGeom>
-        </p:spPr>
-        <p:txBody>
-          <a:bodyPr wrap="square" lIns="228589" tIns="228589" rIns="228589" bIns="228589">
-            <a:spAutoFit/>
-          </a:bodyPr>
-          <a:lstStyle>
-            <a:lvl1pPr marL="314321" indent="-314321">
-              <a:buNone/>
-              <a:defRPr sz="2200">
-                <a:solidFill>
-                  <a:srgbClr val="00313C"/>
-                </a:solidFill>
-                <a:latin typeface="+mn-lt"/>
-              </a:defRPr>
-            </a:lvl1pPr>
-            <a:lvl2pPr marL="1362056" indent="-523867">
-              <a:defRPr sz="2292">
-                <a:latin typeface="Trebuchet MS" pitchFamily="34" charset="0"/>
-              </a:defRPr>
-            </a:lvl2pPr>
-            <a:lvl3pPr marL="1885924" indent="-523867">
-              <a:defRPr sz="2292">
-                <a:latin typeface="Trebuchet MS" pitchFamily="34" charset="0"/>
-              </a:defRPr>
-            </a:lvl3pPr>
-            <a:lvl4pPr marL="2462179" indent="-576255">
-              <a:defRPr sz="2292">
-                <a:latin typeface="Trebuchet MS" pitchFamily="34" charset="0"/>
-              </a:defRPr>
-            </a:lvl4pPr>
-            <a:lvl5pPr marL="2881273" indent="-419094">
-              <a:defRPr sz="2292">
-                <a:latin typeface="Trebuchet MS" pitchFamily="34" charset="0"/>
-              </a:defRPr>
-            </a:lvl5pPr>
-          </a:lstStyle>
-          <a:p>
-            <a:pPr lvl="0"/>
-            <a:r>
-              <a:rPr lang="en-US"/>
-              <a:t>Click to edit Master text styles</a:t>
-            </a:r>
-          </a:p>
-        </p:txBody>
-      </p:sp>
-      <p:sp>
-        <p:nvSpPr>
-          <p:cNvPr id="24" name="Text Placeholder 5"/>
-          <p:cNvSpPr>
-            <a:spLocks noGrp="1"/>
-          </p:cNvSpPr>
-          <p:nvPr>
-            <p:ph type="body" sz="quarter" idx="24"/>
-          </p:nvPr>
-        </p:nvSpPr>
-        <p:spPr>
-          <a:xfrm>
-            <a:off x="10418566" y="8028408"/>
-            <a:ext cx="9335889" cy="891334"/>
-          </a:xfrm>
-          <a:prstGeom prst="rect">
-            <a:avLst/>
-          </a:prstGeom>
-          <a:solidFill>
-            <a:schemeClr val="accent1"/>
-          </a:solidFill>
-        </p:spPr>
-        <p:txBody>
-          <a:bodyPr wrap="square" lIns="182880" tIns="182880" rIns="182880" bIns="182880" anchor="ctr" anchorCtr="0">
-            <a:spAutoFit/>
-          </a:bodyPr>
-          <a:lstStyle>
-            <a:lvl1pPr algn="ctr">
-              <a:buNone/>
-              <a:defRPr sz="3392" b="1" baseline="0">
-                <a:solidFill>
-                  <a:schemeClr val="bg1"/>
-                </a:solidFill>
-              </a:defRPr>
-            </a:lvl1pPr>
-          </a:lstStyle>
-          <a:p>
-            <a:pPr lvl="0"/>
-            <a:r>
-              <a:rPr lang="en-US"/>
-              <a:t>Click to edit Master text styles</a:t>
-            </a:r>
-          </a:p>
-        </p:txBody>
-      </p:sp>
-      <p:sp>
-        <p:nvSpPr>
-          <p:cNvPr id="25" name="Text Placeholder 5"/>
-          <p:cNvSpPr>
-            <a:spLocks noGrp="1"/>
-          </p:cNvSpPr>
-          <p:nvPr>
-            <p:ph type="body" sz="quarter" idx="25"/>
-          </p:nvPr>
-        </p:nvSpPr>
-        <p:spPr>
-          <a:xfrm>
-            <a:off x="20209572" y="8028408"/>
-            <a:ext cx="9333520" cy="891334"/>
-          </a:xfrm>
-          <a:prstGeom prst="rect">
-            <a:avLst/>
-          </a:prstGeom>
-          <a:solidFill>
-            <a:schemeClr val="accent1"/>
-          </a:solidFill>
-        </p:spPr>
-        <p:txBody>
-          <a:bodyPr wrap="square" lIns="182880" tIns="182880" rIns="182880" bIns="182880" anchor="ctr" anchorCtr="0">
-            <a:spAutoFit/>
-          </a:bodyPr>
-          <a:lstStyle>
-            <a:lvl1pPr algn="ctr">
-              <a:buNone/>
-              <a:defRPr sz="3392" b="1" baseline="0">
-                <a:solidFill>
-                  <a:schemeClr val="bg1"/>
-                </a:solidFill>
-              </a:defRPr>
-            </a:lvl1pPr>
-          </a:lstStyle>
-          <a:p>
-            <a:pPr lvl="0"/>
-            <a:r>
-              <a:rPr lang="en-US"/>
-              <a:t>Click to edit Master text styles</a:t>
-            </a:r>
-          </a:p>
-        </p:txBody>
-      </p:sp>
-      <p:sp>
-        <p:nvSpPr>
-          <p:cNvPr id="26" name="Text Placeholder 3"/>
-          <p:cNvSpPr>
-            <a:spLocks noGrp="1"/>
-          </p:cNvSpPr>
-          <p:nvPr>
-            <p:ph type="body" sz="quarter" idx="26"/>
-          </p:nvPr>
-        </p:nvSpPr>
-        <p:spPr>
-          <a:xfrm>
-            <a:off x="20209572" y="9235352"/>
-            <a:ext cx="9333520" cy="830975"/>
-          </a:xfrm>
-          <a:prstGeom prst="rect">
-            <a:avLst/>
-          </a:prstGeom>
-        </p:spPr>
-        <p:txBody>
-          <a:bodyPr wrap="square" lIns="228589" tIns="228589" rIns="228589" bIns="228589">
-            <a:spAutoFit/>
-          </a:bodyPr>
-          <a:lstStyle>
-            <a:lvl1pPr marL="314321" indent="-314321">
-              <a:buNone/>
-              <a:defRPr sz="2200">
-                <a:solidFill>
-                  <a:srgbClr val="00313C"/>
-                </a:solidFill>
-                <a:latin typeface="+mn-lt"/>
-              </a:defRPr>
-            </a:lvl1pPr>
-            <a:lvl2pPr marL="1362056" indent="-523867">
-              <a:defRPr sz="2292">
-                <a:latin typeface="Trebuchet MS" pitchFamily="34" charset="0"/>
-              </a:defRPr>
-            </a:lvl2pPr>
-            <a:lvl3pPr marL="1885924" indent="-523867">
-              <a:defRPr sz="2292">
-                <a:latin typeface="Trebuchet MS" pitchFamily="34" charset="0"/>
-              </a:defRPr>
-            </a:lvl3pPr>
-            <a:lvl4pPr marL="2462179" indent="-576255">
-              <a:defRPr sz="2292">
-                <a:latin typeface="Trebuchet MS" pitchFamily="34" charset="0"/>
-              </a:defRPr>
-            </a:lvl4pPr>
-            <a:lvl5pPr marL="2881273" indent="-419094">
-              <a:defRPr sz="2292">
-                <a:latin typeface="Trebuchet MS" pitchFamily="34" charset="0"/>
-              </a:defRPr>
-            </a:lvl5pPr>
-          </a:lstStyle>
-          <a:p>
-            <a:pPr lvl="0"/>
-            <a:r>
-              <a:rPr lang="en-US"/>
-              <a:t>Click to edit Master text styles</a:t>
-            </a:r>
-          </a:p>
-        </p:txBody>
-      </p:sp>
-      <p:sp>
-        <p:nvSpPr>
-          <p:cNvPr id="27" name="Text Placeholder 5"/>
-          <p:cNvSpPr>
-            <a:spLocks noGrp="1"/>
-          </p:cNvSpPr>
-          <p:nvPr>
-            <p:ph type="body" sz="quarter" idx="27"/>
-          </p:nvPr>
-        </p:nvSpPr>
-        <p:spPr>
-          <a:xfrm>
-            <a:off x="20209572" y="23127967"/>
-            <a:ext cx="9333520" cy="891334"/>
-          </a:xfrm>
-          <a:prstGeom prst="rect">
-            <a:avLst/>
-          </a:prstGeom>
-          <a:solidFill>
-            <a:schemeClr val="accent1"/>
-          </a:solidFill>
-        </p:spPr>
-        <p:txBody>
-          <a:bodyPr wrap="square" lIns="182880" tIns="182880" rIns="182880" bIns="182880" anchor="ctr" anchorCtr="0">
-            <a:spAutoFit/>
-          </a:bodyPr>
-          <a:lstStyle>
-            <a:lvl1pPr algn="ctr">
-              <a:buNone/>
-              <a:defRPr sz="3392" b="1" baseline="0">
-                <a:solidFill>
-                  <a:schemeClr val="bg1"/>
-                </a:solidFill>
-              </a:defRPr>
-            </a:lvl1pPr>
-          </a:lstStyle>
-          <a:p>
-            <a:pPr lvl="0"/>
-            <a:r>
-              <a:rPr lang="en-US"/>
-              <a:t>Click to edit Master text styles</a:t>
-            </a:r>
-          </a:p>
-        </p:txBody>
-      </p:sp>
-      <p:sp>
-        <p:nvSpPr>
-          <p:cNvPr id="28" name="Text Placeholder 3"/>
-          <p:cNvSpPr>
-            <a:spLocks noGrp="1"/>
-          </p:cNvSpPr>
-          <p:nvPr>
-            <p:ph type="body" sz="quarter" idx="28"/>
-          </p:nvPr>
-        </p:nvSpPr>
-        <p:spPr>
-          <a:xfrm>
-            <a:off x="20206113" y="24387596"/>
-            <a:ext cx="9336980" cy="830975"/>
-          </a:xfrm>
-          <a:prstGeom prst="rect">
-            <a:avLst/>
-          </a:prstGeom>
-        </p:spPr>
-        <p:txBody>
-          <a:bodyPr wrap="square" lIns="228589" tIns="228589" rIns="228589" bIns="228589">
-            <a:spAutoFit/>
-          </a:bodyPr>
-          <a:lstStyle>
-            <a:lvl1pPr marL="314321" indent="-314321">
-              <a:buNone/>
-              <a:defRPr sz="2200">
-                <a:solidFill>
-                  <a:srgbClr val="00313C"/>
-                </a:solidFill>
-                <a:latin typeface="+mn-lt"/>
-              </a:defRPr>
-            </a:lvl1pPr>
-            <a:lvl2pPr marL="1362056" indent="-523867">
-              <a:defRPr sz="2292">
-                <a:latin typeface="Trebuchet MS" pitchFamily="34" charset="0"/>
-              </a:defRPr>
-            </a:lvl2pPr>
-            <a:lvl3pPr marL="1885924" indent="-523867">
-              <a:defRPr sz="2292">
-                <a:latin typeface="Trebuchet MS" pitchFamily="34" charset="0"/>
-              </a:defRPr>
-            </a:lvl3pPr>
-            <a:lvl4pPr marL="2462179" indent="-576255">
-              <a:defRPr sz="2292">
-                <a:latin typeface="Trebuchet MS" pitchFamily="34" charset="0"/>
-              </a:defRPr>
-            </a:lvl4pPr>
-            <a:lvl5pPr marL="2881273" indent="-419094">
-              <a:defRPr sz="2292">
-                <a:latin typeface="Trebuchet MS" pitchFamily="34" charset="0"/>
-              </a:defRPr>
-            </a:lvl5pPr>
-          </a:lstStyle>
-          <a:p>
-            <a:pPr lvl="0"/>
-            <a:r>
-              <a:rPr lang="en-US"/>
-              <a:t>Click to edit Master text styles</a:t>
-            </a:r>
-          </a:p>
-        </p:txBody>
-      </p:sp>
-      <p:sp>
-        <p:nvSpPr>
-          <p:cNvPr id="29" name="Text Placeholder 5"/>
-          <p:cNvSpPr>
-            <a:spLocks noGrp="1"/>
-          </p:cNvSpPr>
-          <p:nvPr>
-            <p:ph type="body" sz="quarter" idx="29"/>
-          </p:nvPr>
-        </p:nvSpPr>
-        <p:spPr>
-          <a:xfrm>
-            <a:off x="20209572" y="34419348"/>
-            <a:ext cx="9333520" cy="891334"/>
-          </a:xfrm>
-          <a:prstGeom prst="rect">
-            <a:avLst/>
-          </a:prstGeom>
-          <a:solidFill>
-            <a:schemeClr val="accent1"/>
-          </a:solidFill>
-        </p:spPr>
-        <p:txBody>
-          <a:bodyPr wrap="square" lIns="182880" tIns="182880" rIns="182880" bIns="182880" anchor="ctr" anchorCtr="0">
-            <a:spAutoFit/>
-          </a:bodyPr>
-          <a:lstStyle>
-            <a:lvl1pPr algn="ctr">
-              <a:buNone/>
-              <a:defRPr sz="3392" b="1" baseline="0">
-                <a:solidFill>
-                  <a:schemeClr val="bg1"/>
-                </a:solidFill>
-              </a:defRPr>
-            </a:lvl1pPr>
-          </a:lstStyle>
-          <a:p>
-            <a:pPr lvl="0"/>
-            <a:r>
-              <a:rPr lang="en-US"/>
-              <a:t>Click to edit Master text styles</a:t>
-            </a:r>
-          </a:p>
-        </p:txBody>
-      </p:sp>
-      <p:sp>
-        <p:nvSpPr>
-          <p:cNvPr id="30" name="Text Placeholder 3"/>
-          <p:cNvSpPr>
-            <a:spLocks noGrp="1"/>
-          </p:cNvSpPr>
-          <p:nvPr>
-            <p:ph type="body" sz="quarter" idx="30"/>
-          </p:nvPr>
-        </p:nvSpPr>
-        <p:spPr>
-          <a:xfrm>
-            <a:off x="20209573" y="35631939"/>
-            <a:ext cx="9336980" cy="830975"/>
-          </a:xfrm>
-          <a:prstGeom prst="rect">
-            <a:avLst/>
-          </a:prstGeom>
-        </p:spPr>
-        <p:txBody>
-          <a:bodyPr wrap="square" lIns="228589" tIns="228589" rIns="228589" bIns="228589">
-            <a:spAutoFit/>
-          </a:bodyPr>
-          <a:lstStyle>
-            <a:lvl1pPr marL="314321" indent="-314321">
-              <a:buNone/>
-              <a:defRPr sz="2200">
-                <a:solidFill>
-                  <a:srgbClr val="00313C"/>
-                </a:solidFill>
-                <a:latin typeface="+mn-lt"/>
-              </a:defRPr>
-            </a:lvl1pPr>
-            <a:lvl2pPr marL="1362056" indent="-523867">
-              <a:defRPr sz="2292">
-                <a:latin typeface="Trebuchet MS" pitchFamily="34" charset="0"/>
-              </a:defRPr>
-            </a:lvl2pPr>
-            <a:lvl3pPr marL="1885924" indent="-523867">
-              <a:defRPr sz="2292">
-                <a:latin typeface="Trebuchet MS" pitchFamily="34" charset="0"/>
-              </a:defRPr>
-            </a:lvl3pPr>
-            <a:lvl4pPr marL="2462179" indent="-576255">
-              <a:defRPr sz="2292">
-                <a:latin typeface="Trebuchet MS" pitchFamily="34" charset="0"/>
-              </a:defRPr>
-            </a:lvl4pPr>
-            <a:lvl5pPr marL="2881273" indent="-419094">
-              <a:defRPr sz="2292">
-                <a:latin typeface="Trebuchet MS" pitchFamily="34" charset="0"/>
-              </a:defRPr>
-            </a:lvl5pPr>
-          </a:lstStyle>
-          <a:p>
-            <a:pPr lvl="0"/>
-            <a:r>
-              <a:rPr lang="en-US"/>
-              <a:t>Click to edit Master text styles</a:t>
-            </a:r>
-          </a:p>
-        </p:txBody>
-      </p:sp>
-      <p:sp>
-        <p:nvSpPr>
-          <p:cNvPr id="82" name="Picture Placeholder 13"/>
-          <p:cNvSpPr>
-            <a:spLocks noGrp="1"/>
-          </p:cNvSpPr>
-          <p:nvPr>
-            <p:ph type="pic" sz="quarter" idx="152"/>
-          </p:nvPr>
-        </p:nvSpPr>
-        <p:spPr>
-          <a:xfrm>
-            <a:off x="24724382" y="40360604"/>
-            <a:ext cx="2200275" cy="3048000"/>
-          </a:xfrm>
-          <a:prstGeom prst="rect">
-            <a:avLst/>
-          </a:prstGeom>
-          <a:noFill/>
-          <a:ln>
-            <a:noFill/>
-          </a:ln>
-          <a:effectLst/>
-        </p:spPr>
-        <p:txBody>
-          <a:bodyPr lIns="91436" tIns="45717" rIns="91436" bIns="45717" anchor="ctr"/>
-          <a:lstStyle>
-            <a:lvl1pPr marL="0" indent="0" algn="ctr">
-              <a:buNone/>
-              <a:defRPr sz="3667" b="0" baseline="0">
-                <a:solidFill>
-                  <a:schemeClr val="tx2"/>
-                </a:solidFill>
-              </a:defRPr>
-            </a:lvl1pPr>
-          </a:lstStyle>
-          <a:p>
-            <a:pPr lvl="0"/>
-            <a:r>
-              <a:rPr lang="en-US" noProof="0" dirty="0"/>
-              <a:t>Click icon to add picture</a:t>
-            </a:r>
-          </a:p>
-        </p:txBody>
-      </p:sp>
-      <p:sp>
-        <p:nvSpPr>
-          <p:cNvPr id="94" name="Picture Placeholder 13"/>
-          <p:cNvSpPr>
-            <a:spLocks noGrp="1"/>
-          </p:cNvSpPr>
-          <p:nvPr>
-            <p:ph type="pic" sz="quarter" idx="153"/>
-          </p:nvPr>
-        </p:nvSpPr>
-        <p:spPr>
-          <a:xfrm>
-            <a:off x="8405676" y="40360604"/>
-            <a:ext cx="2200275" cy="3048000"/>
-          </a:xfrm>
-          <a:prstGeom prst="rect">
-            <a:avLst/>
-          </a:prstGeom>
-          <a:noFill/>
-          <a:ln>
-            <a:noFill/>
-          </a:ln>
-          <a:effectLst/>
-        </p:spPr>
-        <p:txBody>
-          <a:bodyPr lIns="91436" tIns="45717" rIns="91436" bIns="45717" anchor="ctr"/>
-          <a:lstStyle>
-            <a:lvl1pPr marL="0" indent="0" algn="ctr">
-              <a:buNone/>
-              <a:defRPr sz="3667" b="0" baseline="0">
-                <a:solidFill>
-                  <a:schemeClr val="tx2"/>
-                </a:solidFill>
-              </a:defRPr>
-            </a:lvl1pPr>
-          </a:lstStyle>
-          <a:p>
-            <a:pPr lvl="0"/>
-            <a:r>
-              <a:rPr lang="en-US" noProof="0" dirty="0"/>
-              <a:t>Click icon to add picture</a:t>
-            </a:r>
-          </a:p>
-        </p:txBody>
-      </p:sp>
-      <p:sp>
-        <p:nvSpPr>
-          <p:cNvPr id="95" name="Picture Placeholder 13"/>
-          <p:cNvSpPr>
-            <a:spLocks noGrp="1"/>
-          </p:cNvSpPr>
-          <p:nvPr>
-            <p:ph type="pic" sz="quarter" idx="154"/>
-          </p:nvPr>
-        </p:nvSpPr>
-        <p:spPr>
-          <a:xfrm>
-            <a:off x="2966107" y="40360604"/>
-            <a:ext cx="2200275" cy="3048000"/>
-          </a:xfrm>
-          <a:prstGeom prst="rect">
-            <a:avLst/>
-          </a:prstGeom>
-          <a:noFill/>
-          <a:ln>
-            <a:noFill/>
-          </a:ln>
-          <a:effectLst/>
-        </p:spPr>
-        <p:txBody>
-          <a:bodyPr lIns="91436" tIns="45717" rIns="91436" bIns="45717" anchor="ctr"/>
-          <a:lstStyle>
-            <a:lvl1pPr marL="0" indent="0" algn="ctr">
-              <a:buNone/>
-              <a:defRPr sz="3667" b="0" baseline="0">
-                <a:solidFill>
-                  <a:schemeClr val="tx2"/>
-                </a:solidFill>
-              </a:defRPr>
-            </a:lvl1pPr>
-          </a:lstStyle>
-          <a:p>
-            <a:pPr lvl="0"/>
-            <a:r>
-              <a:rPr lang="en-US" noProof="0" dirty="0"/>
-              <a:t>Click icon to add picture</a:t>
-            </a:r>
-          </a:p>
-        </p:txBody>
-      </p:sp>
-      <p:sp>
-        <p:nvSpPr>
-          <p:cNvPr id="96" name="Picture Placeholder 13"/>
-          <p:cNvSpPr>
-            <a:spLocks noGrp="1"/>
-          </p:cNvSpPr>
-          <p:nvPr>
-            <p:ph type="pic" sz="quarter" idx="155"/>
-          </p:nvPr>
-        </p:nvSpPr>
-        <p:spPr>
-          <a:xfrm>
-            <a:off x="19284813" y="40360604"/>
-            <a:ext cx="2200275" cy="3048000"/>
-          </a:xfrm>
-          <a:prstGeom prst="rect">
-            <a:avLst/>
-          </a:prstGeom>
-          <a:noFill/>
-          <a:ln>
-            <a:noFill/>
-          </a:ln>
-          <a:effectLst/>
-        </p:spPr>
-        <p:txBody>
-          <a:bodyPr lIns="91436" tIns="45717" rIns="91436" bIns="45717" anchor="ctr"/>
-          <a:lstStyle>
-            <a:lvl1pPr marL="0" indent="0" algn="ctr">
-              <a:buNone/>
-              <a:defRPr sz="3667" b="0" baseline="0">
-                <a:solidFill>
-                  <a:schemeClr val="tx2"/>
-                </a:solidFill>
-              </a:defRPr>
-            </a:lvl1pPr>
-          </a:lstStyle>
-          <a:p>
-            <a:pPr lvl="0"/>
-            <a:r>
-              <a:rPr lang="en-US" noProof="0" dirty="0"/>
-              <a:t>Click icon to add picture</a:t>
-            </a:r>
-          </a:p>
-        </p:txBody>
-      </p:sp>
-      <p:sp>
-        <p:nvSpPr>
-          <p:cNvPr id="97" name="Picture Placeholder 13"/>
-          <p:cNvSpPr>
-            <a:spLocks noGrp="1"/>
-          </p:cNvSpPr>
-          <p:nvPr>
-            <p:ph type="pic" sz="quarter" idx="156"/>
-          </p:nvPr>
-        </p:nvSpPr>
-        <p:spPr>
-          <a:xfrm>
-            <a:off x="13845244" y="40360604"/>
-            <a:ext cx="2200275" cy="3048000"/>
-          </a:xfrm>
-          <a:prstGeom prst="rect">
-            <a:avLst/>
-          </a:prstGeom>
-          <a:noFill/>
-          <a:ln>
-            <a:noFill/>
-          </a:ln>
-          <a:effectLst/>
-        </p:spPr>
-        <p:txBody>
-          <a:bodyPr lIns="91436" tIns="45717" rIns="91436" bIns="45717" anchor="ctr"/>
-          <a:lstStyle>
-            <a:lvl1pPr marL="0" indent="0" algn="ctr">
-              <a:buNone/>
-              <a:defRPr sz="3667" b="0" baseline="0">
-                <a:solidFill>
-                  <a:schemeClr val="tx2"/>
-                </a:solidFill>
-              </a:defRPr>
-            </a:lvl1pPr>
-          </a:lstStyle>
-          <a:p>
-            <a:pPr lvl="0"/>
-            <a:r>
-              <a:rPr lang="en-US" noProof="0" dirty="0"/>
-              <a:t>Click icon to add picture</a:t>
-            </a:r>
-          </a:p>
-        </p:txBody>
-      </p:sp>
-      <p:pic>
-        <p:nvPicPr>
-          <p:cNvPr id="31" name="Picture 7" descr="DOE_Office_Science_white.png">
-            <a:extLst>
-              <a:ext uri="{FF2B5EF4-FFF2-40B4-BE49-F238E27FC236}">
-                <a16:creationId xmlns:a16="http://schemas.microsoft.com/office/drawing/2014/main" id="{DFAFB6A3-32EC-D74C-9D58-7324C6F3F0FC}"/>
-              </a:ext>
-            </a:extLst>
-          </p:cNvPr>
-          <p:cNvPicPr>
-            <a:picLocks noChangeAspect="1"/>
-          </p:cNvPicPr>
-          <p:nvPr userDrawn="1"/>
-        </p:nvPicPr>
-        <p:blipFill>
-          <a:blip r:embed="rId2" cstate="email">
-            <a:extLst>
-              <a:ext uri="{28A0092B-C50C-407E-A947-70E740481C1C}">
-                <a14:useLocalDpi xmlns:a14="http://schemas.microsoft.com/office/drawing/2010/main" val="0"/>
-              </a:ext>
-            </a:extLst>
-          </a:blip>
-          <a:srcRect r="6706"/>
-          <a:stretch>
-            <a:fillRect/>
-          </a:stretch>
-        </p:blipFill>
-        <p:spPr bwMode="auto">
-          <a:xfrm>
-            <a:off x="634108" y="4748670"/>
-            <a:ext cx="3684588" cy="1431925"/>
-          </a:xfrm>
-          <a:prstGeom prst="rect">
-            <a:avLst/>
-          </a:prstGeom>
-          <a:noFill/>
-          <a:ln>
-            <a:noFill/>
-          </a:ln>
-          <a:extLst>
-            <a:ext uri="{909E8E84-426E-40dd-AFC4-6F175D3DCCD1}">
-              <a14:hiddenFill xmlns="" xmlns:a14="http://schemas.microsoft.com/office/drawing/2010/main">
-                <a:solidFill>
-                  <a:srgbClr val="FFFFFF"/>
-                </a:solidFill>
-              </a14:hiddenFill>
-            </a:ext>
-            <a:ext uri="{91240B29-F687-4f45-9708-019B960494DF}">
-              <a14:hiddenLine xmlns="" xmlns:a14="http://schemas.microsoft.com/office/drawing/2010/main" w="9525">
-                <a:solidFill>
-                  <a:srgbClr val="000000"/>
-                </a:solidFill>
-                <a:miter lim="800000"/>
-                <a:headEnd/>
-                <a:tailEnd/>
-              </a14:hiddenLine>
-            </a:ext>
-          </a:extLst>
-        </p:spPr>
-      </p:pic>
-      <p:sp>
-        <p:nvSpPr>
-          <p:cNvPr id="35" name="Title 1">
-            <a:extLst>
-              <a:ext uri="{FF2B5EF4-FFF2-40B4-BE49-F238E27FC236}">
-                <a16:creationId xmlns:a16="http://schemas.microsoft.com/office/drawing/2014/main" id="{E397F0D3-50EC-BC42-B9CE-8FA4BE1FE775}"/>
-              </a:ext>
-            </a:extLst>
-          </p:cNvPr>
-          <p:cNvSpPr>
-            <a:spLocks noGrp="1"/>
-          </p:cNvSpPr>
-          <p:nvPr>
-            <p:ph type="title"/>
-          </p:nvPr>
-        </p:nvSpPr>
-        <p:spPr>
-          <a:xfrm>
-            <a:off x="4710510" y="766763"/>
-            <a:ext cx="24851952" cy="1930400"/>
-          </a:xfrm>
-          <a:prstGeom prst="rect">
-            <a:avLst/>
-          </a:prstGeom>
-        </p:spPr>
-        <p:txBody>
-          <a:bodyPr lIns="91436" tIns="45717" rIns="91436" bIns="45717" anchor="ctr" anchorCtr="0"/>
-          <a:lstStyle>
-            <a:lvl1pPr algn="l">
-              <a:defRPr sz="5500" b="1">
-                <a:solidFill>
-                  <a:schemeClr val="bg1"/>
-                </a:solidFill>
-                <a:latin typeface="+mj-lt"/>
-              </a:defRPr>
-            </a:lvl1pPr>
-          </a:lstStyle>
-          <a:p>
-            <a:r>
-              <a:rPr lang="en-US" dirty="0"/>
-              <a:t>Click to edit Master title style</a:t>
-            </a:r>
-          </a:p>
-        </p:txBody>
-      </p:sp>
-      <p:sp>
-        <p:nvSpPr>
-          <p:cNvPr id="36" name="Text Placeholder 76">
-            <a:extLst>
-              <a:ext uri="{FF2B5EF4-FFF2-40B4-BE49-F238E27FC236}">
-                <a16:creationId xmlns:a16="http://schemas.microsoft.com/office/drawing/2014/main" id="{74918F64-D40D-2A46-9BA1-45CA1BB419B5}"/>
-              </a:ext>
-            </a:extLst>
-          </p:cNvPr>
-          <p:cNvSpPr>
-            <a:spLocks noGrp="1"/>
-          </p:cNvSpPr>
-          <p:nvPr>
-            <p:ph type="body" sz="quarter" idx="150"/>
-          </p:nvPr>
-        </p:nvSpPr>
-        <p:spPr>
-          <a:xfrm>
-            <a:off x="4710511" y="4454845"/>
-            <a:ext cx="24851950" cy="1706880"/>
-          </a:xfrm>
-          <a:prstGeom prst="rect">
-            <a:avLst/>
-          </a:prstGeom>
-        </p:spPr>
-        <p:txBody>
-          <a:bodyPr anchor="ctr"/>
-          <a:lstStyle>
-            <a:lvl1pPr algn="l">
-              <a:buFontTx/>
-              <a:buNone/>
-              <a:defRPr sz="3300">
-                <a:solidFill>
-                  <a:schemeClr val="bg1"/>
-                </a:solidFill>
-                <a:latin typeface="+mj-lt"/>
-              </a:defRPr>
-            </a:lvl1pPr>
-            <a:lvl2pPr>
-              <a:buFontTx/>
-              <a:buNone/>
-              <a:defRPr sz="6600"/>
-            </a:lvl2pPr>
-            <a:lvl3pPr>
-              <a:buFontTx/>
-              <a:buNone/>
-              <a:defRPr sz="6600"/>
-            </a:lvl3pPr>
-            <a:lvl4pPr>
-              <a:buFontTx/>
-              <a:buNone/>
-              <a:defRPr sz="6600"/>
-            </a:lvl4pPr>
-            <a:lvl5pPr>
-              <a:buFontTx/>
-              <a:buNone/>
-              <a:defRPr sz="6600"/>
-            </a:lvl5pPr>
-          </a:lstStyle>
-          <a:p>
-            <a:pPr lvl="0"/>
-            <a:r>
-              <a:rPr lang="en-US" dirty="0"/>
-              <a:t>Click to edit Master text styles</a:t>
-            </a:r>
-          </a:p>
-        </p:txBody>
-      </p:sp>
-      <p:sp>
-        <p:nvSpPr>
-          <p:cNvPr id="37" name="Text Placeholder 76">
-            <a:extLst>
-              <a:ext uri="{FF2B5EF4-FFF2-40B4-BE49-F238E27FC236}">
-                <a16:creationId xmlns:a16="http://schemas.microsoft.com/office/drawing/2014/main" id="{A52AB8F6-55EA-0C48-8504-4F1A98386F56}"/>
-              </a:ext>
-            </a:extLst>
-          </p:cNvPr>
-          <p:cNvSpPr>
-            <a:spLocks noGrp="1"/>
-          </p:cNvSpPr>
-          <p:nvPr>
-            <p:ph type="body" sz="quarter" idx="151"/>
-          </p:nvPr>
-        </p:nvSpPr>
-        <p:spPr>
-          <a:xfrm>
-            <a:off x="4710510" y="2747965"/>
-            <a:ext cx="24851951" cy="1706880"/>
-          </a:xfrm>
-          <a:prstGeom prst="rect">
-            <a:avLst/>
-          </a:prstGeom>
-        </p:spPr>
-        <p:txBody>
-          <a:bodyPr anchor="ctr"/>
-          <a:lstStyle>
-            <a:lvl1pPr algn="l">
-              <a:buFontTx/>
-              <a:buNone/>
-              <a:defRPr sz="4400">
-                <a:solidFill>
-                  <a:schemeClr val="bg1"/>
-                </a:solidFill>
-              </a:defRPr>
-            </a:lvl1pPr>
-            <a:lvl2pPr>
-              <a:buFontTx/>
-              <a:buNone/>
-              <a:defRPr sz="6600"/>
-            </a:lvl2pPr>
-            <a:lvl3pPr>
-              <a:buFontTx/>
-              <a:buNone/>
-              <a:defRPr sz="6600"/>
-            </a:lvl3pPr>
-            <a:lvl4pPr>
-              <a:buFontTx/>
-              <a:buNone/>
-              <a:defRPr sz="6600"/>
-            </a:lvl4pPr>
-            <a:lvl5pPr>
-              <a:buFontTx/>
-              <a:buNone/>
-              <a:defRPr sz="6600"/>
-            </a:lvl5pPr>
-          </a:lstStyle>
-          <a:p>
-            <a:pPr lvl="0"/>
-            <a:r>
-              <a:rPr lang="en-US" dirty="0"/>
-              <a:t>Click to edit Master text styles</a:t>
-            </a:r>
-          </a:p>
-        </p:txBody>
-      </p:sp>
-    </p:spTree>
-    <p:extLst>
-      <p:ext uri="{BB962C8B-B14F-4D97-AF65-F5344CB8AC3E}">
-        <p14:creationId xmlns:p14="http://schemas.microsoft.com/office/powerpoint/2010/main" val="1523571892"/>
-      </p:ext>
-    </p:extLst>
-  </p:cSld>
-  <p:clrMapOvr>
-    <a:masterClrMapping/>
-  </p:clrMapOvr>
-</p:sldLayout>
-</file>
-
-<file path=ppt/slideLayouts/slideLayout3.xml><?xml version="1.0" encoding="utf-8"?>
 <p:sldLayout xmlns:a="http://schemas.openxmlformats.org/drawingml/2006/main" xmlns:r="http://schemas.openxmlformats.org/officeDocument/2006/relationships" xmlns:p="http://schemas.openxmlformats.org/presentationml/2006/main" preserve="1" userDrawn="1">
   <p:cSld name="LBNL Wide-Center Teal V Poster ">
     <p:spTree>
@@ -5150,7 +4399,7 @@
 </p:sldLayout>
 </file>
 
-<file path=ppt/slideLayouts/slideLayout4.xml><?xml version="1.0" encoding="utf-8"?>
+<file path=ppt/slideLayouts/slideLayout3.xml><?xml version="1.0" encoding="utf-8"?>
 <p:sldLayout xmlns:a="http://schemas.openxmlformats.org/drawingml/2006/main" xmlns:r="http://schemas.openxmlformats.org/officeDocument/2006/relationships" xmlns:p="http://schemas.openxmlformats.org/presentationml/2006/main" preserve="1" userDrawn="1">
   <p:cSld name="LBNL Right-Highlight Teal V Poster">
     <p:spTree>
@@ -7526,7 +6775,7 @@
           <p:nvPr userDrawn="1"/>
         </p:nvPicPr>
         <p:blipFill>
-          <a:blip r:embed="rId3" cstate="email">
+          <a:blip r:embed="rId2" cstate="email">
             <a:extLst>
               <a:ext uri="{28A0092B-C50C-407E-A947-70E740481C1C}">
                 <a14:useLocalDpi xmlns:a14="http://schemas.microsoft.com/office/drawing/2010/main" val="0"/>
@@ -7550,9 +6799,6 @@
     </p:spTree>
   </p:cSld>
   <p:clrMap bg1="lt1" tx1="dk1" bg2="lt2" tx2="dk2" accent1="accent1" accent2="accent2" accent3="accent3" accent4="accent4" accent5="accent5" accent6="accent6" hlink="hlink" folHlink="folHlink"/>
-  <p:sldLayoutIdLst>
-    <p:sldLayoutId id="2147483754" r:id="rId1"/>
-  </p:sldLayoutIdLst>
   <p:txStyles>
     <p:titleStyle>
       <a:lvl1pPr algn="ctr" defTabSz="4022342" rtl="0" eaLnBrk="0" fontAlgn="base" hangingPunct="0">
@@ -9343,1056 +8589,12 @@
           <a:chExt cx="0" cy="0"/>
         </a:xfrm>
       </p:grpSpPr>
-      <p:sp>
-        <p:nvSpPr>
-          <p:cNvPr id="46" name="Text Placeholder 45">
+      <p:pic>
+        <p:nvPicPr>
+          <p:cNvPr id="27" name="Picture Placeholder 26">
             <a:extLst>
               <a:ext uri="{FF2B5EF4-FFF2-40B4-BE49-F238E27FC236}">
-                <a16:creationId xmlns:a16="http://schemas.microsoft.com/office/drawing/2014/main" id="{286114AB-30D5-D34A-B576-BF5D187AF412}"/>
-              </a:ext>
-            </a:extLst>
-          </p:cNvPr>
-          <p:cNvSpPr>
-            <a:spLocks noGrp="1"/>
-          </p:cNvSpPr>
-          <p:nvPr>
-            <p:ph type="body" sz="quarter" idx="11"/>
-          </p:nvPr>
-        </p:nvSpPr>
-        <p:spPr>
-          <a:xfrm>
-            <a:off x="635200" y="15525810"/>
-            <a:ext cx="6908601" cy="891334"/>
-          </a:xfrm>
-        </p:spPr>
-        <p:txBody>
-          <a:bodyPr/>
-          <a:lstStyle/>
-          <a:p>
-            <a:r>
-              <a:rPr lang="en-US" dirty="0"/>
-              <a:t>Introduction</a:t>
-            </a:r>
-          </a:p>
-        </p:txBody>
-      </p:sp>
-      <p:sp>
-        <p:nvSpPr>
-          <p:cNvPr id="47" name="Text Placeholder 46">
-            <a:extLst>
-              <a:ext uri="{FF2B5EF4-FFF2-40B4-BE49-F238E27FC236}">
-                <a16:creationId xmlns:a16="http://schemas.microsoft.com/office/drawing/2014/main" id="{5D056A5A-9064-4741-AE18-8DC417A52AF6}"/>
-              </a:ext>
-            </a:extLst>
-          </p:cNvPr>
-          <p:cNvSpPr>
-            <a:spLocks noGrp="1"/>
-          </p:cNvSpPr>
-          <p:nvPr>
-            <p:ph type="body" sz="quarter" idx="20"/>
-          </p:nvPr>
-        </p:nvSpPr>
-        <p:spPr/>
-        <p:txBody>
-          <a:bodyPr/>
-          <a:lstStyle/>
-          <a:p>
-            <a:r>
-              <a:rPr lang="en-US" dirty="0"/>
-              <a:t>Methodology</a:t>
-            </a:r>
-          </a:p>
-        </p:txBody>
-      </p:sp>
-      <p:sp>
-        <p:nvSpPr>
-          <p:cNvPr id="48" name="Text Placeholder 47">
-            <a:extLst>
-              <a:ext uri="{FF2B5EF4-FFF2-40B4-BE49-F238E27FC236}">
-                <a16:creationId xmlns:a16="http://schemas.microsoft.com/office/drawing/2014/main" id="{EE3DF84C-8A0A-2040-8842-5800319B346D}"/>
-              </a:ext>
-            </a:extLst>
-          </p:cNvPr>
-          <p:cNvSpPr>
-            <a:spLocks noGrp="1"/>
-          </p:cNvSpPr>
-          <p:nvPr>
-            <p:ph type="body" sz="quarter" idx="21"/>
-          </p:nvPr>
-        </p:nvSpPr>
-        <p:spPr>
-          <a:xfrm>
-            <a:off x="7966175" y="16613087"/>
-            <a:ext cx="12198751" cy="800197"/>
-          </a:xfrm>
-        </p:spPr>
-        <p:txBody>
-          <a:bodyPr/>
-          <a:lstStyle/>
-          <a:p>
-            <a:endParaRPr lang="en-US" dirty="0"/>
-          </a:p>
-        </p:txBody>
-      </p:sp>
-      <p:sp>
-        <p:nvSpPr>
-          <p:cNvPr id="49" name="Text Placeholder 48">
-            <a:extLst>
-              <a:ext uri="{FF2B5EF4-FFF2-40B4-BE49-F238E27FC236}">
-                <a16:creationId xmlns:a16="http://schemas.microsoft.com/office/drawing/2014/main" id="{F019DC3C-02A0-B140-9422-95A8BF7C064F}"/>
-              </a:ext>
-            </a:extLst>
-          </p:cNvPr>
-          <p:cNvSpPr>
-            <a:spLocks noGrp="1"/>
-          </p:cNvSpPr>
-          <p:nvPr>
-            <p:ph type="body" sz="quarter" idx="22"/>
-          </p:nvPr>
-        </p:nvSpPr>
-        <p:spPr>
-          <a:xfrm>
-            <a:off x="8011771" y="18811280"/>
-            <a:ext cx="14246124" cy="891334"/>
-          </a:xfrm>
-        </p:spPr>
-        <p:txBody>
-          <a:bodyPr/>
-          <a:lstStyle/>
-          <a:p>
-            <a:r>
-              <a:rPr lang="en-US" dirty="0"/>
-              <a:t>Power Ratio Results</a:t>
-            </a:r>
-          </a:p>
-        </p:txBody>
-      </p:sp>
-      <p:sp>
-        <p:nvSpPr>
-          <p:cNvPr id="50" name="Text Placeholder 49">
-            <a:extLst>
-              <a:ext uri="{FF2B5EF4-FFF2-40B4-BE49-F238E27FC236}">
-                <a16:creationId xmlns:a16="http://schemas.microsoft.com/office/drawing/2014/main" id="{E20E3472-4D95-F848-BA65-8A6EE060C235}"/>
-              </a:ext>
-            </a:extLst>
-          </p:cNvPr>
-          <p:cNvSpPr>
-            <a:spLocks noGrp="1"/>
-          </p:cNvSpPr>
-          <p:nvPr>
-            <p:ph type="body" sz="quarter" idx="23"/>
-          </p:nvPr>
-        </p:nvSpPr>
-        <p:spPr>
-          <a:xfrm>
-            <a:off x="7966174" y="30889399"/>
-            <a:ext cx="6908601" cy="830975"/>
-          </a:xfrm>
-        </p:spPr>
-        <p:txBody>
-          <a:bodyPr/>
-          <a:lstStyle/>
-          <a:p>
-            <a:endParaRPr lang="en-US" dirty="0"/>
-          </a:p>
-        </p:txBody>
-      </p:sp>
-      <p:sp>
-        <p:nvSpPr>
-          <p:cNvPr id="51" name="Text Placeholder 50">
-            <a:extLst>
-              <a:ext uri="{FF2B5EF4-FFF2-40B4-BE49-F238E27FC236}">
-                <a16:creationId xmlns:a16="http://schemas.microsoft.com/office/drawing/2014/main" id="{0A779AD3-032F-EB41-8895-AF29183B78D7}"/>
-              </a:ext>
-            </a:extLst>
-          </p:cNvPr>
-          <p:cNvSpPr>
-            <a:spLocks noGrp="1"/>
-          </p:cNvSpPr>
-          <p:nvPr>
-            <p:ph type="body" sz="quarter" idx="24"/>
-          </p:nvPr>
-        </p:nvSpPr>
-        <p:spPr>
-          <a:xfrm>
-            <a:off x="7966176" y="8019680"/>
-            <a:ext cx="21551586" cy="891334"/>
-          </a:xfrm>
-        </p:spPr>
-        <p:txBody>
-          <a:bodyPr/>
-          <a:lstStyle/>
-          <a:p>
-            <a:r>
-              <a:rPr lang="en-US" dirty="0"/>
-              <a:t>Experimental Setup</a:t>
-            </a:r>
-          </a:p>
-        </p:txBody>
-      </p:sp>
-      <p:sp>
-        <p:nvSpPr>
-          <p:cNvPr id="52" name="Text Placeholder 51">
-            <a:extLst>
-              <a:ext uri="{FF2B5EF4-FFF2-40B4-BE49-F238E27FC236}">
-                <a16:creationId xmlns:a16="http://schemas.microsoft.com/office/drawing/2014/main" id="{3C97E0B7-B816-8947-B695-D3F4DF9A1D0D}"/>
-              </a:ext>
-            </a:extLst>
-          </p:cNvPr>
-          <p:cNvSpPr>
-            <a:spLocks noGrp="1"/>
-          </p:cNvSpPr>
-          <p:nvPr>
-            <p:ph type="body" sz="quarter" idx="25"/>
-          </p:nvPr>
-        </p:nvSpPr>
-        <p:spPr>
-          <a:xfrm>
-            <a:off x="22698566" y="18818023"/>
-            <a:ext cx="6907325" cy="891334"/>
-          </a:xfrm>
-        </p:spPr>
-        <p:txBody>
-          <a:bodyPr/>
-          <a:lstStyle/>
-          <a:p>
-            <a:r>
-              <a:rPr lang="en-US" dirty="0"/>
-              <a:t>Conclusion</a:t>
-            </a:r>
-          </a:p>
-        </p:txBody>
-      </p:sp>
-      <p:sp>
-        <p:nvSpPr>
-          <p:cNvPr id="53" name="Text Placeholder 52">
-            <a:extLst>
-              <a:ext uri="{FF2B5EF4-FFF2-40B4-BE49-F238E27FC236}">
-                <a16:creationId xmlns:a16="http://schemas.microsoft.com/office/drawing/2014/main" id="{2C878CC6-AACC-9647-BA5F-D99707D05124}"/>
-              </a:ext>
-            </a:extLst>
-          </p:cNvPr>
-          <p:cNvSpPr>
-            <a:spLocks noGrp="1"/>
-          </p:cNvSpPr>
-          <p:nvPr>
-            <p:ph type="body" sz="quarter" idx="26"/>
-          </p:nvPr>
-        </p:nvSpPr>
-        <p:spPr>
-          <a:xfrm>
-            <a:off x="22635765" y="19868168"/>
-            <a:ext cx="6907325" cy="830975"/>
-          </a:xfrm>
-        </p:spPr>
-        <p:txBody>
-          <a:bodyPr/>
-          <a:lstStyle/>
-          <a:p>
-            <a:endParaRPr lang="en-US" dirty="0"/>
-          </a:p>
-        </p:txBody>
-      </p:sp>
-      <p:sp>
-        <p:nvSpPr>
-          <p:cNvPr id="54" name="Text Placeholder 53">
-            <a:extLst>
-              <a:ext uri="{FF2B5EF4-FFF2-40B4-BE49-F238E27FC236}">
-                <a16:creationId xmlns:a16="http://schemas.microsoft.com/office/drawing/2014/main" id="{CAD0C4E8-9E32-644D-9680-AB8E28EE55EA}"/>
-              </a:ext>
-            </a:extLst>
-          </p:cNvPr>
-          <p:cNvSpPr>
-            <a:spLocks noGrp="1"/>
-          </p:cNvSpPr>
-          <p:nvPr>
-            <p:ph type="body" sz="quarter" idx="27"/>
-          </p:nvPr>
-        </p:nvSpPr>
-        <p:spPr>
-          <a:xfrm>
-            <a:off x="22709256" y="24681262"/>
-            <a:ext cx="6907325" cy="891334"/>
-          </a:xfrm>
-        </p:spPr>
-        <p:txBody>
-          <a:bodyPr/>
-          <a:lstStyle/>
-          <a:p>
-            <a:r>
-              <a:rPr lang="en-US" dirty="0"/>
-              <a:t>Future Work</a:t>
-            </a:r>
-          </a:p>
-        </p:txBody>
-      </p:sp>
-      <p:sp>
-        <p:nvSpPr>
-          <p:cNvPr id="55" name="Text Placeholder 54">
-            <a:extLst>
-              <a:ext uri="{FF2B5EF4-FFF2-40B4-BE49-F238E27FC236}">
-                <a16:creationId xmlns:a16="http://schemas.microsoft.com/office/drawing/2014/main" id="{9753B3C2-4D25-7F41-BBC3-CF776DA4045F}"/>
-              </a:ext>
-            </a:extLst>
-          </p:cNvPr>
-          <p:cNvSpPr>
-            <a:spLocks noGrp="1"/>
-          </p:cNvSpPr>
-          <p:nvPr>
-            <p:ph type="body" sz="quarter" idx="28"/>
-          </p:nvPr>
-        </p:nvSpPr>
-        <p:spPr>
-          <a:xfrm>
-            <a:off x="22763375" y="25934181"/>
-            <a:ext cx="6853206" cy="830975"/>
-          </a:xfrm>
-        </p:spPr>
-        <p:txBody>
-          <a:bodyPr/>
-          <a:lstStyle/>
-          <a:p>
-            <a:endParaRPr lang="en-US" dirty="0"/>
-          </a:p>
-        </p:txBody>
-      </p:sp>
-      <p:sp>
-        <p:nvSpPr>
-          <p:cNvPr id="56" name="Text Placeholder 55">
-            <a:extLst>
-              <a:ext uri="{FF2B5EF4-FFF2-40B4-BE49-F238E27FC236}">
-                <a16:creationId xmlns:a16="http://schemas.microsoft.com/office/drawing/2014/main" id="{0C9FFCF2-4FCB-8A44-A58E-B7FA5F64CCC6}"/>
-              </a:ext>
-            </a:extLst>
-          </p:cNvPr>
-          <p:cNvSpPr>
-            <a:spLocks noGrp="1"/>
-          </p:cNvSpPr>
-          <p:nvPr>
-            <p:ph type="body" sz="quarter" idx="29"/>
-          </p:nvPr>
-        </p:nvSpPr>
-        <p:spPr>
-          <a:xfrm>
-            <a:off x="22635765" y="35717255"/>
-            <a:ext cx="6907325" cy="891334"/>
-          </a:xfrm>
-        </p:spPr>
-        <p:txBody>
-          <a:bodyPr/>
-          <a:lstStyle/>
-          <a:p>
-            <a:r>
-              <a:rPr lang="en-US" dirty="0"/>
-              <a:t>References</a:t>
-            </a:r>
-          </a:p>
-        </p:txBody>
-      </p:sp>
-      <p:sp>
-        <p:nvSpPr>
-          <p:cNvPr id="57" name="Text Placeholder 56">
-            <a:extLst>
-              <a:ext uri="{FF2B5EF4-FFF2-40B4-BE49-F238E27FC236}">
-                <a16:creationId xmlns:a16="http://schemas.microsoft.com/office/drawing/2014/main" id="{5CDC52D9-26D8-0B45-8C4B-7E40A410F011}"/>
-              </a:ext>
-            </a:extLst>
-          </p:cNvPr>
-          <p:cNvSpPr>
-            <a:spLocks noGrp="1"/>
-          </p:cNvSpPr>
-          <p:nvPr>
-            <p:ph type="body" sz="quarter" idx="30"/>
-          </p:nvPr>
-        </p:nvSpPr>
-        <p:spPr>
-          <a:xfrm>
-            <a:off x="22698566" y="37015300"/>
-            <a:ext cx="6910785" cy="830975"/>
-          </a:xfrm>
-        </p:spPr>
-        <p:txBody>
-          <a:bodyPr/>
-          <a:lstStyle/>
-          <a:p>
-            <a:endParaRPr lang="en-US" dirty="0"/>
-          </a:p>
-        </p:txBody>
-      </p:sp>
-      <p:sp>
-        <p:nvSpPr>
-          <p:cNvPr id="58" name="Text Placeholder 57">
-            <a:extLst>
-              <a:ext uri="{FF2B5EF4-FFF2-40B4-BE49-F238E27FC236}">
-                <a16:creationId xmlns:a16="http://schemas.microsoft.com/office/drawing/2014/main" id="{C19EA1CD-8D4D-E343-BC83-836468A253ED}"/>
-              </a:ext>
-            </a:extLst>
-          </p:cNvPr>
-          <p:cNvSpPr>
-            <a:spLocks noGrp="1"/>
-          </p:cNvSpPr>
-          <p:nvPr>
-            <p:ph type="body" sz="quarter" idx="96"/>
-          </p:nvPr>
-        </p:nvSpPr>
-        <p:spPr>
-          <a:xfrm>
-            <a:off x="621629" y="21268894"/>
-            <a:ext cx="6914059" cy="1138751"/>
-          </a:xfrm>
-        </p:spPr>
-        <p:txBody>
-          <a:bodyPr/>
-          <a:lstStyle/>
-          <a:p>
-            <a:r>
-              <a:rPr lang="en-US" dirty="0"/>
-              <a:t>Add diagram of set up of extraction beamline with distances</a:t>
-            </a:r>
-          </a:p>
-        </p:txBody>
-      </p:sp>
-      <p:sp>
-        <p:nvSpPr>
-          <p:cNvPr id="63" name="Picture Placeholder 62">
-            <a:extLst>
-              <a:ext uri="{FF2B5EF4-FFF2-40B4-BE49-F238E27FC236}">
-                <a16:creationId xmlns:a16="http://schemas.microsoft.com/office/drawing/2014/main" id="{9B2E9923-F9EF-A948-986F-9F3E04B8056B}"/>
-              </a:ext>
-            </a:extLst>
-          </p:cNvPr>
-          <p:cNvSpPr>
-            <a:spLocks noGrp="1"/>
-          </p:cNvSpPr>
-          <p:nvPr>
-            <p:ph type="pic" sz="quarter" idx="154"/>
-          </p:nvPr>
-        </p:nvSpPr>
-        <p:spPr/>
-      </p:sp>
-      <p:sp>
-        <p:nvSpPr>
-          <p:cNvPr id="64" name="Picture Placeholder 63">
-            <a:extLst>
-              <a:ext uri="{FF2B5EF4-FFF2-40B4-BE49-F238E27FC236}">
-                <a16:creationId xmlns:a16="http://schemas.microsoft.com/office/drawing/2014/main" id="{A0FD862B-3378-1A4D-B3F8-CAF99EA27905}"/>
-              </a:ext>
-            </a:extLst>
-          </p:cNvPr>
-          <p:cNvSpPr>
-            <a:spLocks noGrp="1"/>
-          </p:cNvSpPr>
-          <p:nvPr>
-            <p:ph type="pic" sz="quarter" idx="155"/>
-          </p:nvPr>
-        </p:nvSpPr>
-        <p:spPr/>
-      </p:sp>
-      <p:sp>
-        <p:nvSpPr>
-          <p:cNvPr id="65" name="Picture Placeholder 64">
-            <a:extLst>
-              <a:ext uri="{FF2B5EF4-FFF2-40B4-BE49-F238E27FC236}">
-                <a16:creationId xmlns:a16="http://schemas.microsoft.com/office/drawing/2014/main" id="{31C6CA46-52B1-4147-8928-196BB81D1982}"/>
-              </a:ext>
-            </a:extLst>
-          </p:cNvPr>
-          <p:cNvSpPr>
-            <a:spLocks noGrp="1"/>
-          </p:cNvSpPr>
-          <p:nvPr>
-            <p:ph type="pic" sz="quarter" idx="156"/>
-          </p:nvPr>
-        </p:nvSpPr>
-        <p:spPr/>
-      </p:sp>
-      <p:sp>
-        <p:nvSpPr>
-          <p:cNvPr id="23" name="Text Placeholder 22">
-            <a:extLst>
-              <a:ext uri="{FF2B5EF4-FFF2-40B4-BE49-F238E27FC236}">
-                <a16:creationId xmlns:a16="http://schemas.microsoft.com/office/drawing/2014/main" id="{06A31D38-555D-B347-9AB1-8426771A47A0}"/>
-              </a:ext>
-            </a:extLst>
-          </p:cNvPr>
-          <p:cNvSpPr>
-            <a:spLocks noGrp="1"/>
-          </p:cNvSpPr>
-          <p:nvPr>
-            <p:ph type="body" sz="quarter" idx="10"/>
-          </p:nvPr>
-        </p:nvSpPr>
-        <p:spPr>
-          <a:xfrm>
-            <a:off x="657438" y="9206151"/>
-            <a:ext cx="6914059" cy="830975"/>
-          </a:xfrm>
-        </p:spPr>
-        <p:txBody>
-          <a:bodyPr/>
-          <a:lstStyle/>
-          <a:p>
-            <a:endParaRPr lang="en-US" dirty="0"/>
-          </a:p>
-        </p:txBody>
-      </p:sp>
-      <p:sp>
-        <p:nvSpPr>
-          <p:cNvPr id="59" name="Text Placeholder 58">
-            <a:extLst>
-              <a:ext uri="{FF2B5EF4-FFF2-40B4-BE49-F238E27FC236}">
-                <a16:creationId xmlns:a16="http://schemas.microsoft.com/office/drawing/2014/main" id="{25BCA1A6-6A60-CD42-AF18-318B16F41247}"/>
-              </a:ext>
-            </a:extLst>
-          </p:cNvPr>
-          <p:cNvSpPr>
-            <a:spLocks noGrp="1"/>
-          </p:cNvSpPr>
-          <p:nvPr>
-            <p:ph type="body" sz="quarter" idx="150"/>
-          </p:nvPr>
-        </p:nvSpPr>
-        <p:spPr/>
-        <p:txBody>
-          <a:bodyPr/>
-          <a:lstStyle/>
-          <a:p>
-            <a:r>
-              <a:rPr lang="en-US" dirty="0"/>
-              <a:t>N. Intwala</a:t>
-            </a:r>
-          </a:p>
-        </p:txBody>
-      </p:sp>
-      <p:sp>
-        <p:nvSpPr>
-          <p:cNvPr id="60" name="Text Placeholder 59">
-            <a:extLst>
-              <a:ext uri="{FF2B5EF4-FFF2-40B4-BE49-F238E27FC236}">
-                <a16:creationId xmlns:a16="http://schemas.microsoft.com/office/drawing/2014/main" id="{EAE17DC8-9A61-C243-87D7-EEBE6C586492}"/>
-              </a:ext>
-            </a:extLst>
-          </p:cNvPr>
-          <p:cNvSpPr>
-            <a:spLocks noGrp="1"/>
-          </p:cNvSpPr>
-          <p:nvPr>
-            <p:ph type="body" sz="quarter" idx="151"/>
-          </p:nvPr>
-        </p:nvSpPr>
-        <p:spPr/>
-        <p:txBody>
-          <a:bodyPr/>
-          <a:lstStyle/>
-          <a:p>
-            <a:r>
-              <a:rPr lang="en-US" dirty="0"/>
-              <a:t>88-Inch Cyclotron, Nuclear Science Division		</a:t>
-            </a:r>
-          </a:p>
-        </p:txBody>
-      </p:sp>
-      <p:sp>
-        <p:nvSpPr>
-          <p:cNvPr id="67" name="Title 66">
-            <a:extLst>
-              <a:ext uri="{FF2B5EF4-FFF2-40B4-BE49-F238E27FC236}">
-                <a16:creationId xmlns:a16="http://schemas.microsoft.com/office/drawing/2014/main" id="{01CF1E6C-A300-3947-9EF1-6F64AFA4FC1C}"/>
-              </a:ext>
-            </a:extLst>
-          </p:cNvPr>
-          <p:cNvSpPr>
-            <a:spLocks noGrp="1"/>
-          </p:cNvSpPr>
-          <p:nvPr>
-            <p:ph type="title"/>
-          </p:nvPr>
-        </p:nvSpPr>
-        <p:spPr/>
-        <p:txBody>
-          <a:bodyPr/>
-          <a:lstStyle/>
-          <a:p>
-            <a:r>
-              <a:rPr lang="en-US" dirty="0"/>
-              <a:t>Bremsstrahlung Measurements of VENUS 3</a:t>
-            </a:r>
-            <a:r>
-              <a:rPr lang="en-US" baseline="30000" dirty="0"/>
-              <a:t>rd</a:t>
-            </a:r>
-            <a:r>
-              <a:rPr lang="en-US" dirty="0"/>
-              <a:t>-Generation ECR Ion Source</a:t>
-            </a:r>
-          </a:p>
-        </p:txBody>
-      </p:sp>
-      <p:sp>
-        <p:nvSpPr>
-          <p:cNvPr id="5" name="Rectangle 4">
-            <a:extLst>
-              <a:ext uri="{FF2B5EF4-FFF2-40B4-BE49-F238E27FC236}">
-                <a16:creationId xmlns:a16="http://schemas.microsoft.com/office/drawing/2014/main" id="{4D6E15B5-9A64-2EF6-AC41-F4F56774F72D}"/>
-              </a:ext>
-            </a:extLst>
-          </p:cNvPr>
-          <p:cNvSpPr/>
-          <p:nvPr/>
-        </p:nvSpPr>
-        <p:spPr>
-          <a:xfrm>
-            <a:off x="7966176" y="9193317"/>
-            <a:ext cx="14246124" cy="5911042"/>
-          </a:xfrm>
-          <a:prstGeom prst="rect">
-            <a:avLst/>
-          </a:prstGeom>
-        </p:spPr>
-        <p:style>
-          <a:lnRef idx="2">
-            <a:schemeClr val="accent1">
-              <a:shade val="15000"/>
-            </a:schemeClr>
-          </a:lnRef>
-          <a:fillRef idx="1">
-            <a:schemeClr val="accent1"/>
-          </a:fillRef>
-          <a:effectRef idx="0">
-            <a:schemeClr val="accent1"/>
-          </a:effectRef>
-          <a:fontRef idx="minor">
-            <a:schemeClr val="lt1"/>
-          </a:fontRef>
-        </p:style>
-        <p:txBody>
-          <a:bodyPr rtlCol="0" anchor="ctr"/>
-          <a:lstStyle/>
-          <a:p>
-            <a:pPr algn="ctr"/>
-            <a:r>
-              <a:rPr lang="en-US" dirty="0"/>
-              <a:t>Diagram of setup</a:t>
-            </a:r>
-          </a:p>
-        </p:txBody>
-      </p:sp>
-      <p:sp>
-        <p:nvSpPr>
-          <p:cNvPr id="7" name="Text Placeholder 55">
-            <a:extLst>
-              <a:ext uri="{FF2B5EF4-FFF2-40B4-BE49-F238E27FC236}">
-                <a16:creationId xmlns:a16="http://schemas.microsoft.com/office/drawing/2014/main" id="{B6AB0A26-CFFF-86E3-E96F-D55B0E506D03}"/>
-              </a:ext>
-            </a:extLst>
-          </p:cNvPr>
-          <p:cNvSpPr txBox="1">
-            <a:spLocks/>
-          </p:cNvSpPr>
-          <p:nvPr/>
-        </p:nvSpPr>
-        <p:spPr>
-          <a:xfrm>
-            <a:off x="22610437" y="32659404"/>
-            <a:ext cx="6907325" cy="891334"/>
-          </a:xfrm>
-          <a:prstGeom prst="rect">
-            <a:avLst/>
-          </a:prstGeom>
-          <a:solidFill>
-            <a:schemeClr val="accent1"/>
-          </a:solidFill>
-        </p:spPr>
-        <p:txBody>
-          <a:bodyPr wrap="square" lIns="182880" tIns="182880" rIns="182880" bIns="182880" anchor="ctr" anchorCtr="0">
-            <a:spAutoFit/>
-          </a:bodyPr>
-          <a:lstStyle>
-            <a:lvl1pPr marL="1507651" indent="-1507651" algn="ctr" defTabSz="4022342" rtl="0" eaLnBrk="1" fontAlgn="base" hangingPunct="1">
-              <a:spcBef>
-                <a:spcPct val="20000"/>
-              </a:spcBef>
-              <a:spcAft>
-                <a:spcPct val="0"/>
-              </a:spcAft>
-              <a:buFont typeface="Arial" charset="0"/>
-              <a:buNone/>
-              <a:defRPr sz="3392" b="1" kern="1200" baseline="0">
-                <a:solidFill>
-                  <a:schemeClr val="bg1"/>
-                </a:solidFill>
-                <a:latin typeface="+mn-lt"/>
-                <a:ea typeface="ＭＳ Ｐゴシック" charset="-128"/>
-                <a:cs typeface="ＭＳ Ｐゴシック" charset="-128"/>
-              </a:defRPr>
-            </a:lvl1pPr>
-            <a:lvl2pPr marL="3268517" indent="-1255891" algn="l" defTabSz="4022342" rtl="0" eaLnBrk="1" fontAlgn="base" hangingPunct="1">
-              <a:spcBef>
-                <a:spcPct val="20000"/>
-              </a:spcBef>
-              <a:spcAft>
-                <a:spcPct val="0"/>
-              </a:spcAft>
-              <a:buFont typeface="Arial" charset="0"/>
-              <a:buChar char="–"/>
-              <a:defRPr sz="12375" kern="1200">
-                <a:solidFill>
-                  <a:schemeClr val="tx1"/>
-                </a:solidFill>
-                <a:latin typeface="+mn-lt"/>
-                <a:ea typeface="ＭＳ Ｐゴシック" charset="-128"/>
-                <a:cs typeface="+mn-cs"/>
-              </a:defRPr>
-            </a:lvl2pPr>
-            <a:lvl3pPr marL="5027928" indent="-1005586" algn="l" defTabSz="4022342" rtl="0" eaLnBrk="1" fontAlgn="base" hangingPunct="1">
-              <a:spcBef>
-                <a:spcPct val="20000"/>
-              </a:spcBef>
-              <a:spcAft>
-                <a:spcPct val="0"/>
-              </a:spcAft>
-              <a:buFont typeface="Arial" charset="0"/>
-              <a:buChar char="•"/>
-              <a:defRPr sz="10634" kern="1200">
-                <a:solidFill>
-                  <a:schemeClr val="tx1"/>
-                </a:solidFill>
-                <a:latin typeface="+mn-lt"/>
-                <a:ea typeface="ＭＳ Ｐゴシック" charset="-128"/>
-                <a:cs typeface="+mn-cs"/>
-              </a:defRPr>
-            </a:lvl3pPr>
-            <a:lvl4pPr marL="7040554" indent="-1005586" algn="l" defTabSz="4022342" rtl="0" eaLnBrk="1" fontAlgn="base" hangingPunct="1">
-              <a:spcBef>
-                <a:spcPct val="20000"/>
-              </a:spcBef>
-              <a:spcAft>
-                <a:spcPct val="0"/>
-              </a:spcAft>
-              <a:buFont typeface="Arial" charset="0"/>
-              <a:buChar char="–"/>
-              <a:defRPr sz="8800" kern="1200">
-                <a:solidFill>
-                  <a:schemeClr val="tx1"/>
-                </a:solidFill>
-                <a:latin typeface="+mn-lt"/>
-                <a:ea typeface="ＭＳ Ｐゴシック" charset="-128"/>
-                <a:cs typeface="+mn-cs"/>
-              </a:defRPr>
-            </a:lvl4pPr>
-            <a:lvl5pPr marL="9051725" indent="-1005586" algn="l" defTabSz="4022342" rtl="0" eaLnBrk="1" fontAlgn="base" hangingPunct="1">
-              <a:spcBef>
-                <a:spcPct val="20000"/>
-              </a:spcBef>
-              <a:spcAft>
-                <a:spcPct val="0"/>
-              </a:spcAft>
-              <a:buFont typeface="Arial" charset="0"/>
-              <a:buChar char="»"/>
-              <a:defRPr sz="8800" kern="1200">
-                <a:solidFill>
-                  <a:schemeClr val="tx1"/>
-                </a:solidFill>
-                <a:latin typeface="+mn-lt"/>
-                <a:ea typeface="ＭＳ Ｐゴシック" charset="-128"/>
-                <a:cs typeface="+mn-cs"/>
-              </a:defRPr>
-            </a:lvl5pPr>
-            <a:lvl6pPr marL="11064090" indent="-1005827" algn="l" defTabSz="4023305" rtl="0" eaLnBrk="1" latinLnBrk="0" hangingPunct="1">
-              <a:spcBef>
-                <a:spcPct val="20000"/>
-              </a:spcBef>
-              <a:buFont typeface="Arial" pitchFamily="34" charset="0"/>
-              <a:buChar char="•"/>
-              <a:defRPr sz="8800" kern="1200">
-                <a:solidFill>
-                  <a:schemeClr val="tx1"/>
-                </a:solidFill>
-                <a:latin typeface="+mn-lt"/>
-                <a:ea typeface="+mn-ea"/>
-                <a:cs typeface="+mn-cs"/>
-              </a:defRPr>
-            </a:lvl6pPr>
-            <a:lvl7pPr marL="13075741" indent="-1005827" algn="l" defTabSz="4023305" rtl="0" eaLnBrk="1" latinLnBrk="0" hangingPunct="1">
-              <a:spcBef>
-                <a:spcPct val="20000"/>
-              </a:spcBef>
-              <a:buFont typeface="Arial" pitchFamily="34" charset="0"/>
-              <a:buChar char="•"/>
-              <a:defRPr sz="8800" kern="1200">
-                <a:solidFill>
-                  <a:schemeClr val="tx1"/>
-                </a:solidFill>
-                <a:latin typeface="+mn-lt"/>
-                <a:ea typeface="+mn-ea"/>
-                <a:cs typeface="+mn-cs"/>
-              </a:defRPr>
-            </a:lvl7pPr>
-            <a:lvl8pPr marL="15087394" indent="-1005827" algn="l" defTabSz="4023305" rtl="0" eaLnBrk="1" latinLnBrk="0" hangingPunct="1">
-              <a:spcBef>
-                <a:spcPct val="20000"/>
-              </a:spcBef>
-              <a:buFont typeface="Arial" pitchFamily="34" charset="0"/>
-              <a:buChar char="•"/>
-              <a:defRPr sz="8800" kern="1200">
-                <a:solidFill>
-                  <a:schemeClr val="tx1"/>
-                </a:solidFill>
-                <a:latin typeface="+mn-lt"/>
-                <a:ea typeface="+mn-ea"/>
-                <a:cs typeface="+mn-cs"/>
-              </a:defRPr>
-            </a:lvl8pPr>
-            <a:lvl9pPr marL="17099047" indent="-1005827" algn="l" defTabSz="4023305" rtl="0" eaLnBrk="1" latinLnBrk="0" hangingPunct="1">
-              <a:spcBef>
-                <a:spcPct val="20000"/>
-              </a:spcBef>
-              <a:buFont typeface="Arial" pitchFamily="34" charset="0"/>
-              <a:buChar char="•"/>
-              <a:defRPr sz="8800" kern="1200">
-                <a:solidFill>
-                  <a:schemeClr val="tx1"/>
-                </a:solidFill>
-                <a:latin typeface="+mn-lt"/>
-                <a:ea typeface="+mn-ea"/>
-                <a:cs typeface="+mn-cs"/>
-              </a:defRPr>
-            </a:lvl9pPr>
-          </a:lstStyle>
-          <a:p>
-            <a:r>
-              <a:rPr lang="en-US" dirty="0"/>
-              <a:t>Acknowledgments</a:t>
-            </a:r>
-          </a:p>
-        </p:txBody>
-      </p:sp>
-      <p:pic>
-        <p:nvPicPr>
-          <p:cNvPr id="9" name="Picture 8">
-            <a:extLst>
-              <a:ext uri="{FF2B5EF4-FFF2-40B4-BE49-F238E27FC236}">
-                <a16:creationId xmlns:a16="http://schemas.microsoft.com/office/drawing/2014/main" id="{76058962-DD50-1B29-F87D-FB32DCC7A696}"/>
-              </a:ext>
-            </a:extLst>
-          </p:cNvPr>
-          <p:cNvPicPr>
-            <a:picLocks noChangeAspect="1"/>
-          </p:cNvPicPr>
-          <p:nvPr/>
-        </p:nvPicPr>
-        <p:blipFill>
-          <a:blip r:embed="rId2"/>
-          <a:stretch>
-            <a:fillRect/>
-          </a:stretch>
-        </p:blipFill>
-        <p:spPr>
-          <a:xfrm>
-            <a:off x="8011771" y="9042768"/>
-            <a:ext cx="19125533" cy="5318222"/>
-          </a:xfrm>
-          <a:prstGeom prst="rect">
-            <a:avLst/>
-          </a:prstGeom>
-        </p:spPr>
-      </p:pic>
-      <p:sp>
-        <p:nvSpPr>
-          <p:cNvPr id="12" name="Text Placeholder 48">
-            <a:extLst>
-              <a:ext uri="{FF2B5EF4-FFF2-40B4-BE49-F238E27FC236}">
-                <a16:creationId xmlns:a16="http://schemas.microsoft.com/office/drawing/2014/main" id="{1A077120-A6AD-BC11-19CC-FE78459359E7}"/>
-              </a:ext>
-            </a:extLst>
-          </p:cNvPr>
-          <p:cNvSpPr txBox="1">
-            <a:spLocks/>
-          </p:cNvSpPr>
-          <p:nvPr/>
-        </p:nvSpPr>
-        <p:spPr>
-          <a:xfrm>
-            <a:off x="7966174" y="29225125"/>
-            <a:ext cx="14246124" cy="891334"/>
-          </a:xfrm>
-          <a:prstGeom prst="rect">
-            <a:avLst/>
-          </a:prstGeom>
-          <a:solidFill>
-            <a:schemeClr val="accent1"/>
-          </a:solidFill>
-        </p:spPr>
-        <p:txBody>
-          <a:bodyPr wrap="square" lIns="182880" tIns="182880" rIns="182880" bIns="182880" anchor="ctr" anchorCtr="0">
-            <a:spAutoFit/>
-          </a:bodyPr>
-          <a:lstStyle>
-            <a:lvl1pPr marL="1507651" indent="-1507651" algn="ctr" defTabSz="4022342" rtl="0" eaLnBrk="1" fontAlgn="base" hangingPunct="1">
-              <a:spcBef>
-                <a:spcPct val="20000"/>
-              </a:spcBef>
-              <a:spcAft>
-                <a:spcPct val="0"/>
-              </a:spcAft>
-              <a:buFont typeface="Arial" charset="0"/>
-              <a:buNone/>
-              <a:defRPr sz="3392" b="1" kern="1200" baseline="0">
-                <a:solidFill>
-                  <a:schemeClr val="bg1"/>
-                </a:solidFill>
-                <a:latin typeface="+mn-lt"/>
-                <a:ea typeface="ＭＳ Ｐゴシック" charset="-128"/>
-                <a:cs typeface="ＭＳ Ｐゴシック" charset="-128"/>
-              </a:defRPr>
-            </a:lvl1pPr>
-            <a:lvl2pPr marL="3268517" indent="-1255891" algn="l" defTabSz="4022342" rtl="0" eaLnBrk="1" fontAlgn="base" hangingPunct="1">
-              <a:spcBef>
-                <a:spcPct val="20000"/>
-              </a:spcBef>
-              <a:spcAft>
-                <a:spcPct val="0"/>
-              </a:spcAft>
-              <a:buFont typeface="Arial" charset="0"/>
-              <a:buChar char="–"/>
-              <a:defRPr sz="12375" kern="1200">
-                <a:solidFill>
-                  <a:schemeClr val="tx1"/>
-                </a:solidFill>
-                <a:latin typeface="+mn-lt"/>
-                <a:ea typeface="ＭＳ Ｐゴシック" charset="-128"/>
-                <a:cs typeface="+mn-cs"/>
-              </a:defRPr>
-            </a:lvl2pPr>
-            <a:lvl3pPr marL="5027928" indent="-1005586" algn="l" defTabSz="4022342" rtl="0" eaLnBrk="1" fontAlgn="base" hangingPunct="1">
-              <a:spcBef>
-                <a:spcPct val="20000"/>
-              </a:spcBef>
-              <a:spcAft>
-                <a:spcPct val="0"/>
-              </a:spcAft>
-              <a:buFont typeface="Arial" charset="0"/>
-              <a:buChar char="•"/>
-              <a:defRPr sz="10634" kern="1200">
-                <a:solidFill>
-                  <a:schemeClr val="tx1"/>
-                </a:solidFill>
-                <a:latin typeface="+mn-lt"/>
-                <a:ea typeface="ＭＳ Ｐゴシック" charset="-128"/>
-                <a:cs typeface="+mn-cs"/>
-              </a:defRPr>
-            </a:lvl3pPr>
-            <a:lvl4pPr marL="7040554" indent="-1005586" algn="l" defTabSz="4022342" rtl="0" eaLnBrk="1" fontAlgn="base" hangingPunct="1">
-              <a:spcBef>
-                <a:spcPct val="20000"/>
-              </a:spcBef>
-              <a:spcAft>
-                <a:spcPct val="0"/>
-              </a:spcAft>
-              <a:buFont typeface="Arial" charset="0"/>
-              <a:buChar char="–"/>
-              <a:defRPr sz="8800" kern="1200">
-                <a:solidFill>
-                  <a:schemeClr val="tx1"/>
-                </a:solidFill>
-                <a:latin typeface="+mn-lt"/>
-                <a:ea typeface="ＭＳ Ｐゴシック" charset="-128"/>
-                <a:cs typeface="+mn-cs"/>
-              </a:defRPr>
-            </a:lvl4pPr>
-            <a:lvl5pPr marL="9051725" indent="-1005586" algn="l" defTabSz="4022342" rtl="0" eaLnBrk="1" fontAlgn="base" hangingPunct="1">
-              <a:spcBef>
-                <a:spcPct val="20000"/>
-              </a:spcBef>
-              <a:spcAft>
-                <a:spcPct val="0"/>
-              </a:spcAft>
-              <a:buFont typeface="Arial" charset="0"/>
-              <a:buChar char="»"/>
-              <a:defRPr sz="8800" kern="1200">
-                <a:solidFill>
-                  <a:schemeClr val="tx1"/>
-                </a:solidFill>
-                <a:latin typeface="+mn-lt"/>
-                <a:ea typeface="ＭＳ Ｐゴシック" charset="-128"/>
-                <a:cs typeface="+mn-cs"/>
-              </a:defRPr>
-            </a:lvl5pPr>
-            <a:lvl6pPr marL="11064090" indent="-1005827" algn="l" defTabSz="4023305" rtl="0" eaLnBrk="1" latinLnBrk="0" hangingPunct="1">
-              <a:spcBef>
-                <a:spcPct val="20000"/>
-              </a:spcBef>
-              <a:buFont typeface="Arial" pitchFamily="34" charset="0"/>
-              <a:buChar char="•"/>
-              <a:defRPr sz="8800" kern="1200">
-                <a:solidFill>
-                  <a:schemeClr val="tx1"/>
-                </a:solidFill>
-                <a:latin typeface="+mn-lt"/>
-                <a:ea typeface="+mn-ea"/>
-                <a:cs typeface="+mn-cs"/>
-              </a:defRPr>
-            </a:lvl6pPr>
-            <a:lvl7pPr marL="13075741" indent="-1005827" algn="l" defTabSz="4023305" rtl="0" eaLnBrk="1" latinLnBrk="0" hangingPunct="1">
-              <a:spcBef>
-                <a:spcPct val="20000"/>
-              </a:spcBef>
-              <a:buFont typeface="Arial" pitchFamily="34" charset="0"/>
-              <a:buChar char="•"/>
-              <a:defRPr sz="8800" kern="1200">
-                <a:solidFill>
-                  <a:schemeClr val="tx1"/>
-                </a:solidFill>
-                <a:latin typeface="+mn-lt"/>
-                <a:ea typeface="+mn-ea"/>
-                <a:cs typeface="+mn-cs"/>
-              </a:defRPr>
-            </a:lvl7pPr>
-            <a:lvl8pPr marL="15087394" indent="-1005827" algn="l" defTabSz="4023305" rtl="0" eaLnBrk="1" latinLnBrk="0" hangingPunct="1">
-              <a:spcBef>
-                <a:spcPct val="20000"/>
-              </a:spcBef>
-              <a:buFont typeface="Arial" pitchFamily="34" charset="0"/>
-              <a:buChar char="•"/>
-              <a:defRPr sz="8800" kern="1200">
-                <a:solidFill>
-                  <a:schemeClr val="tx1"/>
-                </a:solidFill>
-                <a:latin typeface="+mn-lt"/>
-                <a:ea typeface="+mn-ea"/>
-                <a:cs typeface="+mn-cs"/>
-              </a:defRPr>
-            </a:lvl8pPr>
-            <a:lvl9pPr marL="17099047" indent="-1005827" algn="l" defTabSz="4023305" rtl="0" eaLnBrk="1" latinLnBrk="0" hangingPunct="1">
-              <a:spcBef>
-                <a:spcPct val="20000"/>
-              </a:spcBef>
-              <a:buFont typeface="Arial" pitchFamily="34" charset="0"/>
-              <a:buChar char="•"/>
-              <a:defRPr sz="8800" kern="1200">
-                <a:solidFill>
-                  <a:schemeClr val="tx1"/>
-                </a:solidFill>
-                <a:latin typeface="+mn-lt"/>
-                <a:ea typeface="+mn-ea"/>
-                <a:cs typeface="+mn-cs"/>
-              </a:defRPr>
-            </a:lvl9pPr>
-          </a:lstStyle>
-          <a:p>
-            <a:r>
-              <a:rPr lang="en-US" dirty="0"/>
-              <a:t>Magnetic Field Results</a:t>
-            </a:r>
-          </a:p>
-        </p:txBody>
-      </p:sp>
-      <p:pic>
-        <p:nvPicPr>
-          <p:cNvPr id="66" name="Picture Placeholder 65">
-            <a:extLst>
-              <a:ext uri="{FF2B5EF4-FFF2-40B4-BE49-F238E27FC236}">
-                <a16:creationId xmlns:a16="http://schemas.microsoft.com/office/drawing/2014/main" id="{BA2D61E0-3344-A154-AD6E-EDEC62D598C8}"/>
+                <a16:creationId xmlns:a16="http://schemas.microsoft.com/office/drawing/2014/main" id="{0028A7C9-9F08-C978-2465-04C1DBAE41DD}"/>
               </a:ext>
             </a:extLst>
           </p:cNvPr>
@@ -10401,6 +8603,43 @@
           </p:cNvPicPr>
           <p:nvPr>
             <p:ph type="pic" sz="quarter" idx="152"/>
+          </p:nvPr>
+        </p:nvPicPr>
+        <p:blipFill>
+          <a:blip r:embed="rId2">
+            <a:extLst>
+              <a:ext uri="{28A0092B-C50C-407E-A947-70E740481C1C}">
+                <a14:useLocalDpi xmlns:a14="http://schemas.microsoft.com/office/drawing/2010/main" val="0"/>
+              </a:ext>
+            </a:extLst>
+          </a:blip>
+          <a:srcRect/>
+          <a:stretch/>
+        </p:blipFill>
+        <p:spPr>
+          <a:xfrm>
+            <a:off x="8139045" y="10020635"/>
+            <a:ext cx="13897110" cy="5473109"/>
+          </a:xfrm>
+          <a:prstGeom prst="rect">
+            <a:avLst/>
+          </a:prstGeom>
+        </p:spPr>
+      </p:pic>
+      <p:pic>
+        <p:nvPicPr>
+          <p:cNvPr id="24" name="Picture Placeholder 23">
+            <a:extLst>
+              <a:ext uri="{FF2B5EF4-FFF2-40B4-BE49-F238E27FC236}">
+                <a16:creationId xmlns:a16="http://schemas.microsoft.com/office/drawing/2014/main" id="{7CCD4B83-6101-35A2-A0C9-52A6E5C3A671}"/>
+              </a:ext>
+            </a:extLst>
+          </p:cNvPr>
+          <p:cNvPicPr>
+            <a:picLocks noGrp="1" noChangeAspect="1"/>
+          </p:cNvPicPr>
+          <p:nvPr>
+            <p:ph type="pic" sz="quarter" idx="153"/>
           </p:nvPr>
         </p:nvPicPr>
         <p:blipFill>
@@ -10417,20 +8656,97 @@
         </p:blipFill>
         <p:spPr>
           <a:xfrm>
-            <a:off x="374854" y="22428188"/>
-            <a:ext cx="7196643" cy="5397482"/>
+            <a:off x="8353395" y="20441249"/>
+            <a:ext cx="13412031" cy="10462689"/>
           </a:xfrm>
           <a:prstGeom prst="rect">
             <a:avLst/>
           </a:prstGeom>
         </p:spPr>
       </p:pic>
-      <p:sp>
-        <p:nvSpPr>
-          <p:cNvPr id="73" name="Picture Placeholder 72">
+      <p:pic>
+        <p:nvPicPr>
+          <p:cNvPr id="26" name="Picture Placeholder 25">
             <a:extLst>
               <a:ext uri="{FF2B5EF4-FFF2-40B4-BE49-F238E27FC236}">
-                <a16:creationId xmlns:a16="http://schemas.microsoft.com/office/drawing/2014/main" id="{6807D8E6-3A59-B597-56E9-E1CBF71AD2AF}"/>
+                <a16:creationId xmlns:a16="http://schemas.microsoft.com/office/drawing/2014/main" id="{D10BB649-0E1C-1E40-68A4-6642A6BA1B09}"/>
+              </a:ext>
+            </a:extLst>
+          </p:cNvPr>
+          <p:cNvPicPr>
+            <a:picLocks noGrp="1" noChangeAspect="1"/>
+          </p:cNvPicPr>
+          <p:nvPr>
+            <p:ph type="pic" sz="quarter" idx="154"/>
+          </p:nvPr>
+        </p:nvPicPr>
+        <p:blipFill>
+          <a:blip r:embed="rId4" cstate="email">
+            <a:extLst>
+              <a:ext uri="{28A0092B-C50C-407E-A947-70E740481C1C}">
+                <a14:useLocalDpi xmlns:a14="http://schemas.microsoft.com/office/drawing/2010/main" val="0"/>
+              </a:ext>
+            </a:extLst>
+          </a:blip>
+          <a:stretch>
+            <a:fillRect/>
+          </a:stretch>
+        </p:blipFill>
+        <p:spPr>
+          <a:xfrm>
+            <a:off x="16693000" y="32456879"/>
+            <a:ext cx="5343155" cy="3563119"/>
+          </a:xfrm>
+          <a:prstGeom prst="rect">
+            <a:avLst/>
+          </a:prstGeom>
+        </p:spPr>
+      </p:pic>
+      <p:pic>
+        <p:nvPicPr>
+          <p:cNvPr id="30" name="Picture Placeholder 29">
+            <a:extLst>
+              <a:ext uri="{FF2B5EF4-FFF2-40B4-BE49-F238E27FC236}">
+                <a16:creationId xmlns:a16="http://schemas.microsoft.com/office/drawing/2014/main" id="{CF089CA4-10DC-5DD3-3431-5C25B12A126F}"/>
+              </a:ext>
+            </a:extLst>
+          </p:cNvPr>
+          <p:cNvPicPr>
+            <a:picLocks noGrp="1" noChangeAspect="1"/>
+          </p:cNvPicPr>
+          <p:nvPr>
+            <p:ph type="pic" sz="quarter" idx="155"/>
+          </p:nvPr>
+        </p:nvPicPr>
+        <p:blipFill>
+          <a:blip r:embed="rId5" cstate="email">
+            <a:extLst>
+              <a:ext uri="{28A0092B-C50C-407E-A947-70E740481C1C}">
+                <a14:useLocalDpi xmlns:a14="http://schemas.microsoft.com/office/drawing/2010/main" val="0"/>
+              </a:ext>
+            </a:extLst>
+          </a:blip>
+          <a:srcRect t="6406" r="50796"/>
+          <a:stretch>
+            <a:fillRect/>
+          </a:stretch>
+        </p:blipFill>
+        <p:spPr>
+          <a:xfrm>
+            <a:off x="811527" y="26260751"/>
+            <a:ext cx="6404304" cy="6302049"/>
+          </a:xfrm>
+          <a:prstGeom prst="rect">
+            <a:avLst/>
+          </a:prstGeom>
+        </p:spPr>
+      </p:pic>
+      <p:sp>
+        <p:nvSpPr>
+          <p:cNvPr id="23" name="Picture Placeholder 22">
+            <a:extLst>
+              <a:ext uri="{FF2B5EF4-FFF2-40B4-BE49-F238E27FC236}">
+                <a16:creationId xmlns:a16="http://schemas.microsoft.com/office/drawing/2014/main" id="{A1DF65FC-2FAC-A747-9F7C-3392A3F8C07B}"/>
               </a:ext>
             </a:extLst>
           </p:cNvPr>
@@ -10438,17 +8754,759 @@
             <a:spLocks noGrp="1"/>
           </p:cNvSpPr>
           <p:nvPr>
-            <p:ph type="pic" sz="quarter" idx="153"/>
+            <p:ph type="pic" sz="quarter" idx="156"/>
           </p:nvPr>
         </p:nvSpPr>
         <p:spPr/>
+      </p:sp>
+      <p:sp>
+        <p:nvSpPr>
+          <p:cNvPr id="3" name="Text Placeholder 2">
+            <a:extLst>
+              <a:ext uri="{FF2B5EF4-FFF2-40B4-BE49-F238E27FC236}">
+                <a16:creationId xmlns:a16="http://schemas.microsoft.com/office/drawing/2014/main" id="{6B54AE1F-B08D-5A40-AFDB-F5E8E834C49F}"/>
+              </a:ext>
+            </a:extLst>
+          </p:cNvPr>
+          <p:cNvSpPr>
+            <a:spLocks noGrp="1"/>
+          </p:cNvSpPr>
+          <p:nvPr>
+            <p:ph type="body" sz="quarter" idx="10"/>
+          </p:nvPr>
+        </p:nvSpPr>
+        <p:spPr>
+          <a:xfrm>
+            <a:off x="637151" y="9270396"/>
+            <a:ext cx="6914059" cy="3914896"/>
+          </a:xfrm>
+        </p:spPr>
+        <p:txBody>
+          <a:bodyPr/>
+          <a:lstStyle/>
+          <a:p>
+            <a:r>
+              <a:rPr lang="en-US" dirty="0"/>
+              <a:t>Two-frequency heating of ECR ion sources has been shown to produce 2-5 times more high-charge state ions versus single frequency heating, while also enhancing plasma stability and shifting the charge state distribution to higher charge state ions [2].</a:t>
+            </a:r>
+          </a:p>
+          <a:p>
+            <a:r>
+              <a:rPr lang="en-US" dirty="0"/>
+              <a:t>In this experiment, we explore the charge state distribution and spectral temperature dependence on the power ratio of 18 and 28 GHz heating frequencies. </a:t>
+            </a:r>
+          </a:p>
+        </p:txBody>
+      </p:sp>
+      <p:sp>
+        <p:nvSpPr>
+          <p:cNvPr id="4" name="Text Placeholder 3">
+            <a:extLst>
+              <a:ext uri="{FF2B5EF4-FFF2-40B4-BE49-F238E27FC236}">
+                <a16:creationId xmlns:a16="http://schemas.microsoft.com/office/drawing/2014/main" id="{C9BD9246-AE45-5B4D-BC8B-383042993E37}"/>
+              </a:ext>
+            </a:extLst>
+          </p:cNvPr>
+          <p:cNvSpPr>
+            <a:spLocks noGrp="1"/>
+          </p:cNvSpPr>
+          <p:nvPr>
+            <p:ph type="body" sz="quarter" idx="11"/>
+          </p:nvPr>
+        </p:nvSpPr>
+        <p:spPr/>
+        <p:txBody>
+          <a:bodyPr/>
+          <a:lstStyle/>
+          <a:p>
+            <a:r>
+              <a:rPr lang="en-US" dirty="0"/>
+              <a:t>Introduction</a:t>
+            </a:r>
+          </a:p>
+        </p:txBody>
+      </p:sp>
+      <p:sp>
+        <p:nvSpPr>
+          <p:cNvPr id="5" name="Text Placeholder 4">
+            <a:extLst>
+              <a:ext uri="{FF2B5EF4-FFF2-40B4-BE49-F238E27FC236}">
+                <a16:creationId xmlns:a16="http://schemas.microsoft.com/office/drawing/2014/main" id="{DBB67374-7DFE-0648-B892-8A086D7DFF1F}"/>
+              </a:ext>
+            </a:extLst>
+          </p:cNvPr>
+          <p:cNvSpPr>
+            <a:spLocks noGrp="1"/>
+          </p:cNvSpPr>
+          <p:nvPr>
+            <p:ph type="body" sz="quarter" idx="19"/>
+          </p:nvPr>
+        </p:nvSpPr>
+        <p:spPr>
+          <a:xfrm>
+            <a:off x="637151" y="14557926"/>
+            <a:ext cx="6915150" cy="8790076"/>
+          </a:xfrm>
+        </p:spPr>
+        <p:txBody>
+          <a:bodyPr/>
+          <a:lstStyle/>
+          <a:p>
+            <a:r>
+              <a:rPr lang="en-US" dirty="0"/>
+              <a:t>Axial x-rays emitted from the plasma travel through the 10 mm diameter extraction aperture, the 9 mm</a:t>
+            </a:r>
+            <a:r>
+              <a:rPr lang="en-US" baseline="30000" dirty="0"/>
+              <a:t>2</a:t>
+            </a:r>
+            <a:r>
+              <a:rPr lang="en-US" dirty="0"/>
+              <a:t> aperture in the Cu collimator, the 1 mm</a:t>
+            </a:r>
+            <a:r>
+              <a:rPr lang="en-US" baseline="30000" dirty="0"/>
+              <a:t>2</a:t>
+            </a:r>
+            <a:r>
+              <a:rPr lang="en-US" dirty="0"/>
+              <a:t> aperture in the W/Cu collimator, and are received by the XR-100T </a:t>
+            </a:r>
+            <a:r>
+              <a:rPr lang="en-US" dirty="0" err="1"/>
+              <a:t>CdTe</a:t>
+            </a:r>
+            <a:r>
+              <a:rPr lang="en-US" dirty="0"/>
+              <a:t> detector (Figure 1). A custom collimator alignment arm was created to hold the two collimators in place relative to each other, while allowing for fine adjustments in all three directions. Their alignment was tested with a laser held approximately 2.5 m upstream of the Cu collimator to simulate x-rays coming from VENUS’ extraction. </a:t>
+            </a:r>
+          </a:p>
+          <a:p>
+            <a:r>
+              <a:rPr lang="en-US" dirty="0"/>
+              <a:t>10-minute-long data sets were collected for each run. The O6+ beam current was optimized on the faraday cup after the analyzing magnet (BATMAN) between each run.</a:t>
+            </a:r>
+          </a:p>
+          <a:p>
+            <a:r>
+              <a:rPr lang="en-US" dirty="0"/>
+              <a:t>Analysis: to find the spectral temperature, we take the negative slope of the log of the normalized and detector-efficiency-corrected data (in the linear region). The steeper this slope is, the higher the hotter the electrons in the plasma are, which leads to a greater heat load on the superconducting magnet cryostat. </a:t>
+            </a:r>
+          </a:p>
+          <a:p>
+            <a:endParaRPr lang="en-US" dirty="0"/>
+          </a:p>
+        </p:txBody>
+      </p:sp>
+      <p:sp>
+        <p:nvSpPr>
+          <p:cNvPr id="6" name="Text Placeholder 5">
+            <a:extLst>
+              <a:ext uri="{FF2B5EF4-FFF2-40B4-BE49-F238E27FC236}">
+                <a16:creationId xmlns:a16="http://schemas.microsoft.com/office/drawing/2014/main" id="{C69C0194-CA8B-1C44-AA0E-A316F4F34E4F}"/>
+              </a:ext>
+            </a:extLst>
+          </p:cNvPr>
+          <p:cNvSpPr>
+            <a:spLocks noGrp="1"/>
+          </p:cNvSpPr>
+          <p:nvPr>
+            <p:ph type="body" sz="quarter" idx="20"/>
+          </p:nvPr>
+        </p:nvSpPr>
+        <p:spPr>
+          <a:xfrm>
+            <a:off x="634108" y="13521481"/>
+            <a:ext cx="6909693" cy="891334"/>
+          </a:xfrm>
+        </p:spPr>
+        <p:txBody>
+          <a:bodyPr/>
+          <a:lstStyle/>
+          <a:p>
+            <a:r>
+              <a:rPr lang="en-US" dirty="0"/>
+              <a:t>Methodology</a:t>
+            </a:r>
+          </a:p>
+        </p:txBody>
+      </p:sp>
+      <p:sp>
+        <p:nvSpPr>
+          <p:cNvPr id="7" name="Text Placeholder 6">
+            <a:extLst>
+              <a:ext uri="{FF2B5EF4-FFF2-40B4-BE49-F238E27FC236}">
+                <a16:creationId xmlns:a16="http://schemas.microsoft.com/office/drawing/2014/main" id="{E5F17926-1D27-354C-9B54-2F923113E1F1}"/>
+              </a:ext>
+            </a:extLst>
+          </p:cNvPr>
+          <p:cNvSpPr>
+            <a:spLocks noGrp="1"/>
+          </p:cNvSpPr>
+          <p:nvPr>
+            <p:ph type="body" sz="quarter" idx="21"/>
+          </p:nvPr>
+        </p:nvSpPr>
+        <p:spPr>
+          <a:xfrm>
+            <a:off x="8016925" y="9002891"/>
+            <a:ext cx="14141350" cy="830975"/>
+          </a:xfrm>
+        </p:spPr>
+        <p:txBody>
+          <a:bodyPr/>
+          <a:lstStyle/>
+          <a:p>
+            <a:pPr algn="ctr"/>
+            <a:r>
+              <a:rPr lang="en-US" dirty="0"/>
+              <a:t>Figure 1: Schematic of the XR-100-CdTe detector at the VENUS ion source.</a:t>
+            </a:r>
+          </a:p>
+        </p:txBody>
+      </p:sp>
+      <p:sp>
+        <p:nvSpPr>
+          <p:cNvPr id="8" name="Text Placeholder 7">
+            <a:extLst>
+              <a:ext uri="{FF2B5EF4-FFF2-40B4-BE49-F238E27FC236}">
+                <a16:creationId xmlns:a16="http://schemas.microsoft.com/office/drawing/2014/main" id="{E81E76C2-C18B-374E-9106-6A23364432F3}"/>
+              </a:ext>
+            </a:extLst>
+          </p:cNvPr>
+          <p:cNvSpPr>
+            <a:spLocks noGrp="1"/>
+          </p:cNvSpPr>
+          <p:nvPr>
+            <p:ph type="body" sz="quarter" idx="22"/>
+          </p:nvPr>
+        </p:nvSpPr>
+        <p:spPr/>
+        <p:txBody>
+          <a:bodyPr/>
+          <a:lstStyle/>
+          <a:p>
+            <a:r>
+              <a:rPr lang="en-US" dirty="0"/>
+              <a:t>Experimental Setup</a:t>
+            </a:r>
+          </a:p>
+        </p:txBody>
+      </p:sp>
+      <p:sp>
+        <p:nvSpPr>
+          <p:cNvPr id="9" name="Text Placeholder 8">
+            <a:extLst>
+              <a:ext uri="{FF2B5EF4-FFF2-40B4-BE49-F238E27FC236}">
+                <a16:creationId xmlns:a16="http://schemas.microsoft.com/office/drawing/2014/main" id="{214520F2-6D1C-6E44-A85B-A786AC903C52}"/>
+              </a:ext>
+            </a:extLst>
+          </p:cNvPr>
+          <p:cNvSpPr>
+            <a:spLocks noGrp="1"/>
+          </p:cNvSpPr>
+          <p:nvPr>
+            <p:ph type="body" sz="quarter" idx="23"/>
+          </p:nvPr>
+        </p:nvSpPr>
+        <p:spPr>
+          <a:xfrm>
+            <a:off x="8498081" y="33335418"/>
+            <a:ext cx="5877265" cy="5472245"/>
+          </a:xfrm>
+        </p:spPr>
+        <p:txBody>
+          <a:bodyPr/>
+          <a:lstStyle/>
+          <a:p>
+            <a:pPr marL="342900" indent="-342900">
+              <a:buFont typeface="Arial" panose="020B0604020202020204" pitchFamily="34" charset="0"/>
+              <a:buChar char="•"/>
+            </a:pPr>
+            <a:r>
+              <a:rPr lang="en-US" dirty="0"/>
+              <a:t>At higher total power, a lower ratio is better (&lt;5)</a:t>
+            </a:r>
+          </a:p>
+          <a:p>
+            <a:pPr marL="342900" indent="-342900">
+              <a:buFont typeface="Arial" panose="020B0604020202020204" pitchFamily="34" charset="0"/>
+              <a:buChar char="•"/>
+            </a:pPr>
+            <a:r>
+              <a:rPr lang="en-US" dirty="0"/>
+              <a:t>For lower total power, higher ratio is better</a:t>
+            </a:r>
+          </a:p>
+          <a:p>
+            <a:pPr marL="342900" indent="-342900">
+              <a:buFont typeface="Arial" panose="020B0604020202020204" pitchFamily="34" charset="0"/>
+              <a:buChar char="•"/>
+            </a:pPr>
+            <a:r>
+              <a:rPr lang="en-US" dirty="0"/>
+              <a:t>As power increases, there’s a ratio that gives the least beam, but this ratio increases with total power</a:t>
+            </a:r>
+          </a:p>
+          <a:p>
+            <a:pPr marL="342900" indent="-342900">
+              <a:buFont typeface="Arial" panose="020B0604020202020204" pitchFamily="34" charset="0"/>
+              <a:buChar char="•"/>
+            </a:pPr>
+            <a:r>
+              <a:rPr lang="en-US" dirty="0"/>
+              <a:t>Results vary with higher and lower charge state</a:t>
+            </a:r>
+          </a:p>
+          <a:p>
+            <a:pPr marL="342900" indent="-342900">
+              <a:buFont typeface="Arial" panose="020B0604020202020204" pitchFamily="34" charset="0"/>
+              <a:buChar char="•"/>
+            </a:pPr>
+            <a:r>
+              <a:rPr lang="en-US" dirty="0"/>
+              <a:t>Spectral temperature does not seem to have a dependence on total power or power ratio</a:t>
+            </a:r>
+          </a:p>
+        </p:txBody>
+      </p:sp>
+      <p:sp>
+        <p:nvSpPr>
+          <p:cNvPr id="10" name="Text Placeholder 9">
+            <a:extLst>
+              <a:ext uri="{FF2B5EF4-FFF2-40B4-BE49-F238E27FC236}">
+                <a16:creationId xmlns:a16="http://schemas.microsoft.com/office/drawing/2014/main" id="{A3685424-6DDE-F84B-8B00-7622E45CFFDB}"/>
+              </a:ext>
+            </a:extLst>
+          </p:cNvPr>
+          <p:cNvSpPr>
+            <a:spLocks noGrp="1"/>
+          </p:cNvSpPr>
+          <p:nvPr>
+            <p:ph type="body" sz="quarter" idx="24"/>
+          </p:nvPr>
+        </p:nvSpPr>
+        <p:spPr/>
+        <p:txBody>
+          <a:bodyPr/>
+          <a:lstStyle/>
+          <a:p>
+            <a:r>
+              <a:rPr lang="en-US" dirty="0"/>
+              <a:t>Two-Frequency Power Results</a:t>
+            </a:r>
+          </a:p>
+        </p:txBody>
+      </p:sp>
+      <p:sp>
+        <p:nvSpPr>
+          <p:cNvPr id="11" name="Text Placeholder 10">
+            <a:extLst>
+              <a:ext uri="{FF2B5EF4-FFF2-40B4-BE49-F238E27FC236}">
+                <a16:creationId xmlns:a16="http://schemas.microsoft.com/office/drawing/2014/main" id="{ABE3628C-DC42-C34C-A257-8F328A2CA585}"/>
+              </a:ext>
+            </a:extLst>
+          </p:cNvPr>
+          <p:cNvSpPr>
+            <a:spLocks noGrp="1"/>
+          </p:cNvSpPr>
+          <p:nvPr>
+            <p:ph type="body" sz="quarter" idx="25"/>
+          </p:nvPr>
+        </p:nvSpPr>
+        <p:spPr/>
+        <p:txBody>
+          <a:bodyPr/>
+          <a:lstStyle/>
+          <a:p>
+            <a:r>
+              <a:rPr lang="en-US" dirty="0"/>
+              <a:t>Analysis</a:t>
+            </a:r>
+          </a:p>
+        </p:txBody>
+      </p:sp>
+      <p:sp>
+        <p:nvSpPr>
+          <p:cNvPr id="12" name="Text Placeholder 11">
+            <a:extLst>
+              <a:ext uri="{FF2B5EF4-FFF2-40B4-BE49-F238E27FC236}">
+                <a16:creationId xmlns:a16="http://schemas.microsoft.com/office/drawing/2014/main" id="{DD074438-2C91-1240-BDC9-B1D5892AF67C}"/>
+              </a:ext>
+            </a:extLst>
+          </p:cNvPr>
+          <p:cNvSpPr>
+            <a:spLocks noGrp="1"/>
+          </p:cNvSpPr>
+          <p:nvPr>
+            <p:ph type="body" sz="quarter" idx="26"/>
+          </p:nvPr>
+        </p:nvSpPr>
+        <p:spPr>
+          <a:xfrm>
+            <a:off x="8016925" y="30748655"/>
+            <a:ext cx="14141350" cy="830975"/>
+          </a:xfrm>
+        </p:spPr>
+        <p:txBody>
+          <a:bodyPr/>
+          <a:lstStyle/>
+          <a:p>
+            <a:pPr algn="ctr"/>
+            <a:r>
+              <a:rPr lang="en-US" dirty="0"/>
+              <a:t>Figure 3: Beam currents of oxygen charge state vs 28 GHz to 18 GHz power ratio.</a:t>
+            </a:r>
+          </a:p>
+        </p:txBody>
+      </p:sp>
+      <p:sp>
+        <p:nvSpPr>
+          <p:cNvPr id="13" name="Text Placeholder 12">
+            <a:extLst>
+              <a:ext uri="{FF2B5EF4-FFF2-40B4-BE49-F238E27FC236}">
+                <a16:creationId xmlns:a16="http://schemas.microsoft.com/office/drawing/2014/main" id="{3D2A9BA6-CEDE-814B-979E-DEFD9C24C1E0}"/>
+              </a:ext>
+            </a:extLst>
+          </p:cNvPr>
+          <p:cNvSpPr>
+            <a:spLocks noGrp="1"/>
+          </p:cNvSpPr>
+          <p:nvPr>
+            <p:ph type="body" sz="quarter" idx="27"/>
+          </p:nvPr>
+        </p:nvSpPr>
+        <p:spPr/>
+        <p:txBody>
+          <a:bodyPr/>
+          <a:lstStyle/>
+          <a:p>
+            <a:r>
+              <a:rPr lang="en-US" dirty="0"/>
+              <a:t>Conclusion</a:t>
+            </a:r>
+          </a:p>
+        </p:txBody>
+      </p:sp>
+      <p:sp>
+        <p:nvSpPr>
+          <p:cNvPr id="14" name="Text Placeholder 13">
+            <a:extLst>
+              <a:ext uri="{FF2B5EF4-FFF2-40B4-BE49-F238E27FC236}">
+                <a16:creationId xmlns:a16="http://schemas.microsoft.com/office/drawing/2014/main" id="{E9AE433F-F067-7A44-AD2E-B91C1CE65F90}"/>
+              </a:ext>
+            </a:extLst>
+          </p:cNvPr>
+          <p:cNvSpPr>
+            <a:spLocks noGrp="1"/>
+          </p:cNvSpPr>
+          <p:nvPr>
+            <p:ph type="body" sz="quarter" idx="28"/>
+          </p:nvPr>
+        </p:nvSpPr>
+        <p:spPr>
+          <a:xfrm>
+            <a:off x="22645858" y="9270396"/>
+            <a:ext cx="6915244" cy="1815860"/>
+          </a:xfrm>
+        </p:spPr>
+        <p:txBody>
+          <a:bodyPr/>
+          <a:lstStyle/>
+          <a:p>
+            <a:r>
+              <a:rPr lang="en-US" dirty="0"/>
+              <a:t>With a constant magnetic field configuration, the oxygen beam currents depend on the ratio of 28 to 18 GHz power, but the spectral temperature of the hot electrons does not.</a:t>
+            </a:r>
+          </a:p>
+        </p:txBody>
+      </p:sp>
+      <p:sp>
+        <p:nvSpPr>
+          <p:cNvPr id="15" name="Text Placeholder 14">
+            <a:extLst>
+              <a:ext uri="{FF2B5EF4-FFF2-40B4-BE49-F238E27FC236}">
+                <a16:creationId xmlns:a16="http://schemas.microsoft.com/office/drawing/2014/main" id="{B7B7762A-139A-2946-B38E-0E2475A7C811}"/>
+              </a:ext>
+            </a:extLst>
+          </p:cNvPr>
+          <p:cNvSpPr>
+            <a:spLocks noGrp="1"/>
+          </p:cNvSpPr>
+          <p:nvPr>
+            <p:ph type="body" sz="quarter" idx="29"/>
+          </p:nvPr>
+        </p:nvSpPr>
+        <p:spPr/>
+        <p:txBody>
+          <a:bodyPr/>
+          <a:lstStyle/>
+          <a:p>
+            <a:r>
+              <a:rPr lang="en-US" dirty="0"/>
+              <a:t>References</a:t>
+            </a:r>
+          </a:p>
+        </p:txBody>
+      </p:sp>
+      <p:sp>
+        <p:nvSpPr>
+          <p:cNvPr id="16" name="Text Placeholder 15">
+            <a:extLst>
+              <a:ext uri="{FF2B5EF4-FFF2-40B4-BE49-F238E27FC236}">
+                <a16:creationId xmlns:a16="http://schemas.microsoft.com/office/drawing/2014/main" id="{5BF0EB9A-86CD-8845-BCD0-8E2D7427F637}"/>
+              </a:ext>
+            </a:extLst>
+          </p:cNvPr>
+          <p:cNvSpPr>
+            <a:spLocks noGrp="1"/>
+          </p:cNvSpPr>
+          <p:nvPr>
+            <p:ph type="body" sz="quarter" idx="30"/>
+          </p:nvPr>
+        </p:nvSpPr>
+        <p:spPr>
+          <a:xfrm>
+            <a:off x="22635766" y="32803875"/>
+            <a:ext cx="6910785" cy="2289835"/>
+          </a:xfrm>
+        </p:spPr>
+        <p:txBody>
+          <a:bodyPr/>
+          <a:lstStyle/>
+          <a:p>
+            <a:r>
+              <a:rPr lang="en-US" dirty="0"/>
+              <a:t>[1] </a:t>
+            </a:r>
+            <a:r>
+              <a:rPr lang="en-US" dirty="0" err="1"/>
+              <a:t>Lyneis</a:t>
+            </a:r>
+            <a:r>
+              <a:rPr lang="en-US" dirty="0"/>
+              <a:t>, Xie, 1995 12</a:t>
+            </a:r>
+            <a:r>
+              <a:rPr lang="en-US" baseline="30000" dirty="0"/>
+              <a:t>th</a:t>
+            </a:r>
+            <a:r>
+              <a:rPr lang="en-US" dirty="0"/>
+              <a:t> International Workshop on ECR Ion Sources</a:t>
+            </a:r>
+          </a:p>
+          <a:p>
+            <a:r>
+              <a:rPr lang="en-US" dirty="0"/>
+              <a:t>[2] R Geller (should be first)</a:t>
+            </a:r>
+          </a:p>
+          <a:p>
+            <a:r>
+              <a:rPr lang="en-US" dirty="0"/>
+              <a:t>[9] J Benitez, C </a:t>
+            </a:r>
+            <a:r>
+              <a:rPr lang="en-US" dirty="0" err="1"/>
+              <a:t>Lyneis</a:t>
+            </a:r>
+            <a:r>
+              <a:rPr lang="en-US" dirty="0"/>
+              <a:t>, L Phair, D Todd and D Xie 2017 IEEE Transactions on Plasma Science 45 7</a:t>
+            </a:r>
+          </a:p>
+        </p:txBody>
+      </p:sp>
+      <p:sp>
+        <p:nvSpPr>
+          <p:cNvPr id="48" name="Text Placeholder 47">
+            <a:extLst>
+              <a:ext uri="{FF2B5EF4-FFF2-40B4-BE49-F238E27FC236}">
+                <a16:creationId xmlns:a16="http://schemas.microsoft.com/office/drawing/2014/main" id="{60B1FD8E-3FCB-5646-B11E-31BA1EAC0379}"/>
+              </a:ext>
+            </a:extLst>
+          </p:cNvPr>
+          <p:cNvSpPr>
+            <a:spLocks noGrp="1"/>
+          </p:cNvSpPr>
+          <p:nvPr>
+            <p:ph type="body" sz="quarter" idx="157"/>
+          </p:nvPr>
+        </p:nvSpPr>
+        <p:spPr/>
+        <p:txBody>
+          <a:bodyPr/>
+          <a:lstStyle/>
+          <a:p>
+            <a:r>
+              <a:rPr lang="en-US" dirty="0"/>
+              <a:t>Future Work</a:t>
+            </a:r>
+          </a:p>
+        </p:txBody>
+      </p:sp>
+      <p:sp>
+        <p:nvSpPr>
+          <p:cNvPr id="49" name="Text Placeholder 48">
+            <a:extLst>
+              <a:ext uri="{FF2B5EF4-FFF2-40B4-BE49-F238E27FC236}">
+                <a16:creationId xmlns:a16="http://schemas.microsoft.com/office/drawing/2014/main" id="{0DA515FC-E57F-5247-BBF7-F506307424E5}"/>
+              </a:ext>
+            </a:extLst>
+          </p:cNvPr>
+          <p:cNvSpPr>
+            <a:spLocks noGrp="1"/>
+          </p:cNvSpPr>
+          <p:nvPr>
+            <p:ph type="body" sz="quarter" idx="158"/>
+          </p:nvPr>
+        </p:nvSpPr>
+        <p:spPr>
+          <a:xfrm>
+            <a:off x="22635766" y="20683712"/>
+            <a:ext cx="6910785" cy="2289835"/>
+          </a:xfrm>
+        </p:spPr>
+        <p:txBody>
+          <a:bodyPr/>
+          <a:lstStyle/>
+          <a:p>
+            <a:pPr marL="342900" indent="-342900">
+              <a:buFont typeface="Arial" panose="020B0604020202020204" pitchFamily="34" charset="0"/>
+              <a:buChar char="•"/>
+            </a:pPr>
+            <a:r>
+              <a:rPr lang="en-US" dirty="0"/>
+              <a:t>See what happens at different magnetic field configurations</a:t>
+            </a:r>
+          </a:p>
+          <a:p>
+            <a:pPr marL="342900" indent="-342900">
+              <a:buFont typeface="Arial" panose="020B0604020202020204" pitchFamily="34" charset="0"/>
+              <a:buChar char="•"/>
+            </a:pPr>
+            <a:r>
+              <a:rPr lang="en-US" dirty="0"/>
+              <a:t>Developing a machine learning framework to predict </a:t>
+            </a:r>
+            <a:r>
+              <a:rPr lang="en-US" dirty="0" err="1"/>
+              <a:t>behaviour</a:t>
+            </a:r>
+            <a:r>
+              <a:rPr lang="en-US" dirty="0"/>
+              <a:t> at higher total powers</a:t>
+            </a:r>
+          </a:p>
+          <a:p>
+            <a:pPr marL="342900" indent="-342900">
+              <a:buFont typeface="Arial" panose="020B0604020202020204" pitchFamily="34" charset="0"/>
+              <a:buChar char="•"/>
+            </a:pPr>
+            <a:r>
+              <a:rPr lang="en-US" dirty="0"/>
+              <a:t>Spectral temperature at higher powers?</a:t>
+            </a:r>
+          </a:p>
+        </p:txBody>
+      </p:sp>
+      <p:sp>
+        <p:nvSpPr>
+          <p:cNvPr id="2" name="Title 1">
+            <a:extLst>
+              <a:ext uri="{FF2B5EF4-FFF2-40B4-BE49-F238E27FC236}">
+                <a16:creationId xmlns:a16="http://schemas.microsoft.com/office/drawing/2014/main" id="{3314A58E-B95B-3748-BC1F-E1E8CF6481D8}"/>
+              </a:ext>
+            </a:extLst>
+          </p:cNvPr>
+          <p:cNvSpPr>
+            <a:spLocks noGrp="1"/>
+          </p:cNvSpPr>
+          <p:nvPr>
+            <p:ph type="title"/>
+          </p:nvPr>
+        </p:nvSpPr>
+        <p:spPr/>
+        <p:txBody>
+          <a:bodyPr/>
+          <a:lstStyle/>
+          <a:p>
+            <a:r>
+              <a:rPr lang="en-US" dirty="0"/>
+              <a:t>Two-Frequency Heating Phenomena and Spectral Temperature Measurements of Superconducting VENUS ECR Ion Source</a:t>
+            </a:r>
+          </a:p>
+        </p:txBody>
+      </p:sp>
+      <p:sp>
+        <p:nvSpPr>
+          <p:cNvPr id="17" name="Text Placeholder 16">
+            <a:extLst>
+              <a:ext uri="{FF2B5EF4-FFF2-40B4-BE49-F238E27FC236}">
+                <a16:creationId xmlns:a16="http://schemas.microsoft.com/office/drawing/2014/main" id="{C411D744-5B45-8344-BA8E-0728EC5FA6B8}"/>
+              </a:ext>
+            </a:extLst>
+          </p:cNvPr>
+          <p:cNvSpPr>
+            <a:spLocks noGrp="1"/>
+          </p:cNvSpPr>
+          <p:nvPr>
+            <p:ph type="body" sz="quarter" idx="150"/>
+          </p:nvPr>
+        </p:nvSpPr>
+        <p:spPr/>
+        <p:txBody>
+          <a:bodyPr/>
+          <a:lstStyle/>
+          <a:p>
+            <a:r>
+              <a:rPr lang="en-US" dirty="0"/>
+              <a:t>N. Intwala, J. Benitez, M. Chen, B. Peri, T. Thuillier, D. Todd</a:t>
+            </a:r>
+          </a:p>
+          <a:p>
+            <a:endParaRPr lang="en-US" dirty="0"/>
+          </a:p>
+        </p:txBody>
+      </p:sp>
+      <p:sp>
+        <p:nvSpPr>
+          <p:cNvPr id="18" name="Text Placeholder 17">
+            <a:extLst>
+              <a:ext uri="{FF2B5EF4-FFF2-40B4-BE49-F238E27FC236}">
+                <a16:creationId xmlns:a16="http://schemas.microsoft.com/office/drawing/2014/main" id="{3E323885-677D-414B-B454-D8F46AEEA878}"/>
+              </a:ext>
+            </a:extLst>
+          </p:cNvPr>
+          <p:cNvSpPr>
+            <a:spLocks noGrp="1"/>
+          </p:cNvSpPr>
+          <p:nvPr>
+            <p:ph type="body" sz="quarter" idx="151"/>
+          </p:nvPr>
+        </p:nvSpPr>
+        <p:spPr/>
+        <p:txBody>
+          <a:bodyPr/>
+          <a:lstStyle/>
+          <a:p>
+            <a:r>
+              <a:rPr lang="en-US" dirty="0"/>
+              <a:t>Lawrence Berkeley National Laboratory</a:t>
+            </a:r>
+          </a:p>
+          <a:p>
+            <a:endParaRPr lang="en-US" dirty="0"/>
+          </a:p>
+        </p:txBody>
       </p:sp>
       <p:pic>
         <p:nvPicPr>
-          <p:cNvPr id="75" name="Picture 74">
+          <p:cNvPr id="31" name="Picture 30">
             <a:extLst>
               <a:ext uri="{FF2B5EF4-FFF2-40B4-BE49-F238E27FC236}">
-                <a16:creationId xmlns:a16="http://schemas.microsoft.com/office/drawing/2014/main" id="{924EFD0C-0554-E865-5AD3-BD6183A70793}"/>
+                <a16:creationId xmlns:a16="http://schemas.microsoft.com/office/drawing/2014/main" id="{AA982A5A-C8D3-B85B-394E-32D920AE5512}"/>
               </a:ext>
             </a:extLst>
           </p:cNvPr>
@@ -10458,87 +9516,216 @@
           <p:nvPr/>
         </p:nvPicPr>
         <p:blipFill>
-          <a:blip r:embed="rId4"/>
+          <a:blip r:embed="rId6"/>
+          <a:srcRect l="8280" t="35848" r="5370" b="44216"/>
           <a:stretch>
             <a:fillRect/>
           </a:stretch>
         </p:blipFill>
         <p:spPr>
           <a:xfrm>
-            <a:off x="15713313" y="19939262"/>
-            <a:ext cx="6450066" cy="4500046"/>
+            <a:off x="9235440" y="15910560"/>
+            <a:ext cx="11612880" cy="2011680"/>
           </a:xfrm>
           <a:prstGeom prst="rect">
             <a:avLst/>
           </a:prstGeom>
         </p:spPr>
       </p:pic>
-      <p:pic>
-        <p:nvPicPr>
-          <p:cNvPr id="80" name="Picture 79">
+      <p:sp>
+        <p:nvSpPr>
+          <p:cNvPr id="33" name="Text Placeholder 6">
             <a:extLst>
               <a:ext uri="{FF2B5EF4-FFF2-40B4-BE49-F238E27FC236}">
-                <a16:creationId xmlns:a16="http://schemas.microsoft.com/office/drawing/2014/main" id="{6CD9DFBF-2CE8-7198-8B0D-15737B9144F3}"/>
+                <a16:creationId xmlns:a16="http://schemas.microsoft.com/office/drawing/2014/main" id="{60D9865C-7E24-B4A2-AB6F-F285BAD1B658}"/>
               </a:ext>
             </a:extLst>
           </p:cNvPr>
-          <p:cNvPicPr>
-            <a:picLocks noChangeAspect="1"/>
-          </p:cNvPicPr>
+          <p:cNvSpPr txBox="1">
+            <a:spLocks/>
+          </p:cNvSpPr>
           <p:nvPr/>
-        </p:nvPicPr>
-        <p:blipFill>
-          <a:blip r:embed="rId5"/>
-          <a:stretch>
-            <a:fillRect/>
-          </a:stretch>
-        </p:blipFill>
+        </p:nvSpPr>
         <p:spPr>
           <a:xfrm>
-            <a:off x="7922472" y="24433397"/>
-            <a:ext cx="7244964" cy="4517303"/>
+            <a:off x="7968469" y="18203238"/>
+            <a:ext cx="14141350" cy="1138751"/>
           </a:xfrm>
           <a:prstGeom prst="rect">
             <a:avLst/>
           </a:prstGeom>
         </p:spPr>
-      </p:pic>
-      <p:graphicFrame>
-        <p:nvGraphicFramePr>
-          <p:cNvPr id="81" name="Chart 80">
+        <p:txBody>
+          <a:bodyPr wrap="square" lIns="228589" tIns="228589" rIns="228589" bIns="228589">
+            <a:spAutoFit/>
+          </a:bodyPr>
+          <a:lstStyle>
+            <a:lvl1pPr marL="314321" indent="-314321" algn="l" defTabSz="4022342" rtl="0" eaLnBrk="0" fontAlgn="base" hangingPunct="0">
+              <a:spcBef>
+                <a:spcPct val="20000"/>
+              </a:spcBef>
+              <a:spcAft>
+                <a:spcPct val="0"/>
+              </a:spcAft>
+              <a:buFont typeface="Arial" charset="0"/>
+              <a:buNone/>
+              <a:defRPr sz="2200" kern="1200">
+                <a:solidFill>
+                  <a:srgbClr val="00313C"/>
+                </a:solidFill>
+                <a:latin typeface="+mn-lt"/>
+                <a:ea typeface="ＭＳ Ｐゴシック" charset="-128"/>
+                <a:cs typeface="ＭＳ Ｐゴシック" charset="-128"/>
+              </a:defRPr>
+            </a:lvl1pPr>
+            <a:lvl2pPr marL="1362056" indent="-523867" algn="l" defTabSz="4022342" rtl="0" eaLnBrk="0" fontAlgn="base" hangingPunct="0">
+              <a:spcBef>
+                <a:spcPct val="20000"/>
+              </a:spcBef>
+              <a:spcAft>
+                <a:spcPct val="0"/>
+              </a:spcAft>
+              <a:buFont typeface="Arial" charset="0"/>
+              <a:buChar char="–"/>
+              <a:defRPr sz="2292" kern="1200">
+                <a:solidFill>
+                  <a:schemeClr val="tx1"/>
+                </a:solidFill>
+                <a:latin typeface="Trebuchet MS" pitchFamily="34" charset="0"/>
+                <a:ea typeface="ＭＳ Ｐゴシック" charset="-128"/>
+                <a:cs typeface="+mn-cs"/>
+              </a:defRPr>
+            </a:lvl2pPr>
+            <a:lvl3pPr marL="1885924" indent="-523867" algn="l" defTabSz="4022342" rtl="0" eaLnBrk="0" fontAlgn="base" hangingPunct="0">
+              <a:spcBef>
+                <a:spcPct val="20000"/>
+              </a:spcBef>
+              <a:spcAft>
+                <a:spcPct val="0"/>
+              </a:spcAft>
+              <a:buFont typeface="Arial" charset="0"/>
+              <a:buChar char="•"/>
+              <a:defRPr sz="2292" kern="1200">
+                <a:solidFill>
+                  <a:schemeClr val="tx1"/>
+                </a:solidFill>
+                <a:latin typeface="Trebuchet MS" pitchFamily="34" charset="0"/>
+                <a:ea typeface="ＭＳ Ｐゴシック" charset="-128"/>
+                <a:cs typeface="+mn-cs"/>
+              </a:defRPr>
+            </a:lvl3pPr>
+            <a:lvl4pPr marL="2462179" indent="-576255" algn="l" defTabSz="4022342" rtl="0" eaLnBrk="0" fontAlgn="base" hangingPunct="0">
+              <a:spcBef>
+                <a:spcPct val="20000"/>
+              </a:spcBef>
+              <a:spcAft>
+                <a:spcPct val="0"/>
+              </a:spcAft>
+              <a:buFont typeface="Arial" charset="0"/>
+              <a:buChar char="–"/>
+              <a:defRPr sz="2292" kern="1200">
+                <a:solidFill>
+                  <a:schemeClr val="tx1"/>
+                </a:solidFill>
+                <a:latin typeface="Trebuchet MS" pitchFamily="34" charset="0"/>
+                <a:ea typeface="ＭＳ Ｐゴシック" charset="-128"/>
+                <a:cs typeface="+mn-cs"/>
+              </a:defRPr>
+            </a:lvl4pPr>
+            <a:lvl5pPr marL="2881273" indent="-419094" algn="l" defTabSz="4022342" rtl="0" eaLnBrk="0" fontAlgn="base" hangingPunct="0">
+              <a:spcBef>
+                <a:spcPct val="20000"/>
+              </a:spcBef>
+              <a:spcAft>
+                <a:spcPct val="0"/>
+              </a:spcAft>
+              <a:buFont typeface="Arial" charset="0"/>
+              <a:buChar char="»"/>
+              <a:defRPr sz="2292" kern="1200">
+                <a:solidFill>
+                  <a:schemeClr val="tx1"/>
+                </a:solidFill>
+                <a:latin typeface="Trebuchet MS" pitchFamily="34" charset="0"/>
+                <a:ea typeface="ＭＳ Ｐゴシック" charset="-128"/>
+                <a:cs typeface="+mn-cs"/>
+              </a:defRPr>
+            </a:lvl5pPr>
+            <a:lvl6pPr marL="11064090" indent="-1005827" algn="l" defTabSz="4023305" rtl="0" eaLnBrk="1" latinLnBrk="0" hangingPunct="1">
+              <a:spcBef>
+                <a:spcPct val="20000"/>
+              </a:spcBef>
+              <a:buFont typeface="Arial" pitchFamily="34" charset="0"/>
+              <a:buChar char="•"/>
+              <a:defRPr sz="8800" kern="1200">
+                <a:solidFill>
+                  <a:schemeClr val="tx1"/>
+                </a:solidFill>
+                <a:latin typeface="+mn-lt"/>
+                <a:ea typeface="+mn-ea"/>
+                <a:cs typeface="+mn-cs"/>
+              </a:defRPr>
+            </a:lvl6pPr>
+            <a:lvl7pPr marL="13075741" indent="-1005827" algn="l" defTabSz="4023305" rtl="0" eaLnBrk="1" latinLnBrk="0" hangingPunct="1">
+              <a:spcBef>
+                <a:spcPct val="20000"/>
+              </a:spcBef>
+              <a:buFont typeface="Arial" pitchFamily="34" charset="0"/>
+              <a:buChar char="•"/>
+              <a:defRPr sz="8800" kern="1200">
+                <a:solidFill>
+                  <a:schemeClr val="tx1"/>
+                </a:solidFill>
+                <a:latin typeface="+mn-lt"/>
+                <a:ea typeface="+mn-ea"/>
+                <a:cs typeface="+mn-cs"/>
+              </a:defRPr>
+            </a:lvl7pPr>
+            <a:lvl8pPr marL="15087394" indent="-1005827" algn="l" defTabSz="4023305" rtl="0" eaLnBrk="1" latinLnBrk="0" hangingPunct="1">
+              <a:spcBef>
+                <a:spcPct val="20000"/>
+              </a:spcBef>
+              <a:buFont typeface="Arial" pitchFamily="34" charset="0"/>
+              <a:buChar char="•"/>
+              <a:defRPr sz="8800" kern="1200">
+                <a:solidFill>
+                  <a:schemeClr val="tx1"/>
+                </a:solidFill>
+                <a:latin typeface="+mn-lt"/>
+                <a:ea typeface="+mn-ea"/>
+                <a:cs typeface="+mn-cs"/>
+              </a:defRPr>
+            </a:lvl8pPr>
+            <a:lvl9pPr marL="17099047" indent="-1005827" algn="l" defTabSz="4023305" rtl="0" eaLnBrk="1" latinLnBrk="0" hangingPunct="1">
+              <a:spcBef>
+                <a:spcPct val="20000"/>
+              </a:spcBef>
+              <a:buFont typeface="Arial" pitchFamily="34" charset="0"/>
+              <a:buChar char="•"/>
+              <a:defRPr sz="8800" kern="1200">
+                <a:solidFill>
+                  <a:schemeClr val="tx1"/>
+                </a:solidFill>
+                <a:latin typeface="+mn-lt"/>
+                <a:ea typeface="+mn-ea"/>
+                <a:cs typeface="+mn-cs"/>
+              </a:defRPr>
+            </a:lvl9pPr>
+          </a:lstStyle>
+          <a:p>
+            <a:pPr algn="ctr"/>
+            <a:r>
+              <a:rPr lang="en-US" dirty="0"/>
+              <a:t>Figure 2: An adjustable collimator alignment arm, used to align and fix both collimators in place with the center of the beamline. </a:t>
+            </a:r>
+          </a:p>
+        </p:txBody>
+      </p:sp>
+      <p:pic>
+        <p:nvPicPr>
+          <p:cNvPr id="37" name="Picture 36">
             <a:extLst>
               <a:ext uri="{FF2B5EF4-FFF2-40B4-BE49-F238E27FC236}">
-                <a16:creationId xmlns:a16="http://schemas.microsoft.com/office/drawing/2014/main" id="{2AB1109F-AB73-485A-A314-30F0F4BC0549}"/>
-              </a:ext>
-            </a:extLst>
-          </p:cNvPr>
-          <p:cNvGraphicFramePr>
-            <a:graphicFrameLocks/>
-          </p:cNvGraphicFramePr>
-          <p:nvPr>
-            <p:extLst>
-              <p:ext uri="{D42A27DB-BD31-4B8C-83A1-F6EECF244321}">
-                <p14:modId xmlns:p14="http://schemas.microsoft.com/office/powerpoint/2010/main" val="305714622"/>
-              </p:ext>
-            </p:extLst>
-          </p:nvPr>
-        </p:nvGraphicFramePr>
-        <p:xfrm>
-          <a:off x="8405676" y="20104470"/>
-          <a:ext cx="6139039" cy="4169630"/>
-        </p:xfrm>
-        <a:graphic>
-          <a:graphicData uri="http://schemas.openxmlformats.org/drawingml/2006/chart">
-            <c:chart xmlns:c="http://schemas.openxmlformats.org/drawingml/2006/chart" xmlns:r="http://schemas.openxmlformats.org/officeDocument/2006/relationships" r:id="rId6"/>
-          </a:graphicData>
-        </a:graphic>
-      </p:graphicFrame>
-      <p:pic>
-        <p:nvPicPr>
-          <p:cNvPr id="83" name="Picture 82">
-            <a:extLst>
-              <a:ext uri="{FF2B5EF4-FFF2-40B4-BE49-F238E27FC236}">
-                <a16:creationId xmlns:a16="http://schemas.microsoft.com/office/drawing/2014/main" id="{263E0FAB-8368-3B95-5532-AD2E86604F38}"/>
+                <a16:creationId xmlns:a16="http://schemas.microsoft.com/office/drawing/2014/main" id="{EDC61ACC-7B33-6BC7-5F48-008C9F7661C7}"/>
               </a:ext>
             </a:extLst>
           </p:cNvPr>
@@ -10549,1749 +9736,51 @@
         </p:nvPicPr>
         <p:blipFill>
           <a:blip r:embed="rId7"/>
-          <a:srcRect l="7464" t="34881" r="4078" b="42447"/>
+          <a:srcRect l="50000" t="6282"/>
           <a:stretch>
             <a:fillRect/>
           </a:stretch>
         </p:blipFill>
         <p:spPr>
           <a:xfrm>
-            <a:off x="17621167" y="14466092"/>
-            <a:ext cx="11896595" cy="2287806"/>
+            <a:off x="811526" y="32562800"/>
+            <a:ext cx="6499897" cy="6302049"/>
           </a:xfrm>
           <a:prstGeom prst="rect">
             <a:avLst/>
           </a:prstGeom>
         </p:spPr>
       </p:pic>
-    </p:spTree>
-  </p:cSld>
-  <p:clrMapOvr>
-    <a:masterClrMapping/>
-  </p:clrMapOvr>
-</p:sld>
-</file>
-
-<file path=ppt/slides/slide2.xml><?xml version="1.0" encoding="utf-8"?>
-<p:sld xmlns:a="http://schemas.openxmlformats.org/drawingml/2006/main" xmlns:r="http://schemas.openxmlformats.org/officeDocument/2006/relationships" xmlns:p="http://schemas.openxmlformats.org/presentationml/2006/main">
-  <p:cSld>
-    <p:spTree>
-      <p:nvGrpSpPr>
-        <p:cNvPr id="1" name=""/>
-        <p:cNvGrpSpPr/>
-        <p:nvPr/>
-      </p:nvGrpSpPr>
-      <p:grpSpPr>
-        <a:xfrm>
-          <a:off x="0" y="0"/>
-          <a:ext cx="0" cy="0"/>
-          <a:chOff x="0" y="0"/>
-          <a:chExt cx="0" cy="0"/>
-        </a:xfrm>
-      </p:grpSpPr>
-      <p:sp>
-        <p:nvSpPr>
-          <p:cNvPr id="25" name="Text Placeholder 24">
+      <p:graphicFrame>
+        <p:nvGraphicFramePr>
+          <p:cNvPr id="38" name="Chart 37">
             <a:extLst>
               <a:ext uri="{FF2B5EF4-FFF2-40B4-BE49-F238E27FC236}">
-                <a16:creationId xmlns:a16="http://schemas.microsoft.com/office/drawing/2014/main" id="{288149F0-902E-814A-9713-B9B4351B2164}"/>
+                <a16:creationId xmlns:a16="http://schemas.microsoft.com/office/drawing/2014/main" id="{555DED72-FC92-FB59-DC81-862CC08C2892}"/>
               </a:ext>
             </a:extLst>
           </p:cNvPr>
-          <p:cNvSpPr>
-            <a:spLocks noGrp="1"/>
-          </p:cNvSpPr>
+          <p:cNvGraphicFramePr>
+            <a:graphicFrameLocks/>
+          </p:cNvGraphicFramePr>
           <p:nvPr>
-            <p:ph type="body" sz="quarter" idx="10"/>
+            <p:extLst>
+              <p:ext uri="{D42A27DB-BD31-4B8C-83A1-F6EECF244321}">
+                <p14:modId xmlns:p14="http://schemas.microsoft.com/office/powerpoint/2010/main" val="1123972034"/>
+              </p:ext>
+            </p:extLst>
           </p:nvPr>
-        </p:nvSpPr>
-        <p:spPr/>
-        <p:txBody>
-          <a:bodyPr/>
-          <a:lstStyle/>
-          <a:p>
-            <a:endParaRPr lang="en-US"/>
-          </a:p>
-        </p:txBody>
-      </p:sp>
-      <p:sp>
-        <p:nvSpPr>
-          <p:cNvPr id="26" name="Text Placeholder 25">
-            <a:extLst>
-              <a:ext uri="{FF2B5EF4-FFF2-40B4-BE49-F238E27FC236}">
-                <a16:creationId xmlns:a16="http://schemas.microsoft.com/office/drawing/2014/main" id="{2705C182-AAB4-0245-A7A5-7BDC6D8EFEF5}"/>
-              </a:ext>
-            </a:extLst>
-          </p:cNvPr>
-          <p:cNvSpPr>
-            <a:spLocks noGrp="1"/>
-          </p:cNvSpPr>
-          <p:nvPr>
-            <p:ph type="body" sz="quarter" idx="11"/>
-          </p:nvPr>
-        </p:nvSpPr>
-        <p:spPr/>
-        <p:txBody>
-          <a:bodyPr/>
-          <a:lstStyle/>
-          <a:p>
-            <a:endParaRPr lang="en-US"/>
-          </a:p>
-        </p:txBody>
-      </p:sp>
-      <p:sp>
-        <p:nvSpPr>
-          <p:cNvPr id="27" name="Text Placeholder 26">
-            <a:extLst>
-              <a:ext uri="{FF2B5EF4-FFF2-40B4-BE49-F238E27FC236}">
-                <a16:creationId xmlns:a16="http://schemas.microsoft.com/office/drawing/2014/main" id="{D403AFBB-7928-E24F-B85A-F7334EE00C68}"/>
-              </a:ext>
-            </a:extLst>
-          </p:cNvPr>
-          <p:cNvSpPr>
-            <a:spLocks noGrp="1"/>
-          </p:cNvSpPr>
-          <p:nvPr>
-            <p:ph type="body" sz="quarter" idx="19"/>
-          </p:nvPr>
-        </p:nvSpPr>
-        <p:spPr/>
-        <p:txBody>
-          <a:bodyPr/>
-          <a:lstStyle/>
-          <a:p>
-            <a:endParaRPr lang="en-US"/>
-          </a:p>
-        </p:txBody>
-      </p:sp>
-      <p:sp>
-        <p:nvSpPr>
-          <p:cNvPr id="28" name="Text Placeholder 27">
-            <a:extLst>
-              <a:ext uri="{FF2B5EF4-FFF2-40B4-BE49-F238E27FC236}">
-                <a16:creationId xmlns:a16="http://schemas.microsoft.com/office/drawing/2014/main" id="{E440730D-4358-2047-85DF-2735A5DF67C2}"/>
-              </a:ext>
-            </a:extLst>
-          </p:cNvPr>
-          <p:cNvSpPr>
-            <a:spLocks noGrp="1"/>
-          </p:cNvSpPr>
-          <p:nvPr>
-            <p:ph type="body" sz="quarter" idx="20"/>
-          </p:nvPr>
-        </p:nvSpPr>
-        <p:spPr/>
-        <p:txBody>
-          <a:bodyPr/>
-          <a:lstStyle/>
-          <a:p>
-            <a:endParaRPr lang="en-US"/>
-          </a:p>
-        </p:txBody>
-      </p:sp>
-      <p:sp>
-        <p:nvSpPr>
-          <p:cNvPr id="29" name="Text Placeholder 28">
-            <a:extLst>
-              <a:ext uri="{FF2B5EF4-FFF2-40B4-BE49-F238E27FC236}">
-                <a16:creationId xmlns:a16="http://schemas.microsoft.com/office/drawing/2014/main" id="{87794298-F72B-D04F-9868-AD8E68352210}"/>
-              </a:ext>
-            </a:extLst>
-          </p:cNvPr>
-          <p:cNvSpPr>
-            <a:spLocks noGrp="1"/>
-          </p:cNvSpPr>
-          <p:nvPr>
-            <p:ph type="body" sz="quarter" idx="21"/>
-          </p:nvPr>
-        </p:nvSpPr>
-        <p:spPr/>
-        <p:txBody>
-          <a:bodyPr/>
-          <a:lstStyle/>
-          <a:p>
-            <a:endParaRPr lang="en-US"/>
-          </a:p>
-        </p:txBody>
-      </p:sp>
-      <p:sp>
-        <p:nvSpPr>
-          <p:cNvPr id="30" name="Text Placeholder 29">
-            <a:extLst>
-              <a:ext uri="{FF2B5EF4-FFF2-40B4-BE49-F238E27FC236}">
-                <a16:creationId xmlns:a16="http://schemas.microsoft.com/office/drawing/2014/main" id="{3C7DA781-A26E-D546-9594-14BF8F555763}"/>
-              </a:ext>
-            </a:extLst>
-          </p:cNvPr>
-          <p:cNvSpPr>
-            <a:spLocks noGrp="1"/>
-          </p:cNvSpPr>
-          <p:nvPr>
-            <p:ph type="body" sz="quarter" idx="22"/>
-          </p:nvPr>
-        </p:nvSpPr>
-        <p:spPr/>
-        <p:txBody>
-          <a:bodyPr/>
-          <a:lstStyle/>
-          <a:p>
-            <a:endParaRPr lang="en-US"/>
-          </a:p>
-        </p:txBody>
-      </p:sp>
-      <p:sp>
-        <p:nvSpPr>
-          <p:cNvPr id="31" name="Text Placeholder 30">
-            <a:extLst>
-              <a:ext uri="{FF2B5EF4-FFF2-40B4-BE49-F238E27FC236}">
-                <a16:creationId xmlns:a16="http://schemas.microsoft.com/office/drawing/2014/main" id="{1C3C7183-C667-0E4E-97B4-08499DF00ADA}"/>
-              </a:ext>
-            </a:extLst>
-          </p:cNvPr>
-          <p:cNvSpPr>
-            <a:spLocks noGrp="1"/>
-          </p:cNvSpPr>
-          <p:nvPr>
-            <p:ph type="body" sz="quarter" idx="23"/>
-          </p:nvPr>
-        </p:nvSpPr>
-        <p:spPr/>
-        <p:txBody>
-          <a:bodyPr/>
-          <a:lstStyle/>
-          <a:p>
-            <a:endParaRPr lang="en-US"/>
-          </a:p>
-        </p:txBody>
-      </p:sp>
-      <p:sp>
-        <p:nvSpPr>
-          <p:cNvPr id="32" name="Text Placeholder 31">
-            <a:extLst>
-              <a:ext uri="{FF2B5EF4-FFF2-40B4-BE49-F238E27FC236}">
-                <a16:creationId xmlns:a16="http://schemas.microsoft.com/office/drawing/2014/main" id="{E9A7132E-4AD4-F944-93DF-F8B02F61B0C6}"/>
-              </a:ext>
-            </a:extLst>
-          </p:cNvPr>
-          <p:cNvSpPr>
-            <a:spLocks noGrp="1"/>
-          </p:cNvSpPr>
-          <p:nvPr>
-            <p:ph type="body" sz="quarter" idx="24"/>
-          </p:nvPr>
-        </p:nvSpPr>
-        <p:spPr/>
-        <p:txBody>
-          <a:bodyPr/>
-          <a:lstStyle/>
-          <a:p>
-            <a:endParaRPr lang="en-US"/>
-          </a:p>
-        </p:txBody>
-      </p:sp>
-      <p:sp>
-        <p:nvSpPr>
-          <p:cNvPr id="33" name="Text Placeholder 32">
-            <a:extLst>
-              <a:ext uri="{FF2B5EF4-FFF2-40B4-BE49-F238E27FC236}">
-                <a16:creationId xmlns:a16="http://schemas.microsoft.com/office/drawing/2014/main" id="{E5EB56E5-9448-8A4F-9A30-F5CFE37FED20}"/>
-              </a:ext>
-            </a:extLst>
-          </p:cNvPr>
-          <p:cNvSpPr>
-            <a:spLocks noGrp="1"/>
-          </p:cNvSpPr>
-          <p:nvPr>
-            <p:ph type="body" sz="quarter" idx="25"/>
-          </p:nvPr>
-        </p:nvSpPr>
-        <p:spPr/>
-        <p:txBody>
-          <a:bodyPr/>
-          <a:lstStyle/>
-          <a:p>
-            <a:endParaRPr lang="en-US"/>
-          </a:p>
-        </p:txBody>
-      </p:sp>
-      <p:sp>
-        <p:nvSpPr>
-          <p:cNvPr id="34" name="Text Placeholder 33">
-            <a:extLst>
-              <a:ext uri="{FF2B5EF4-FFF2-40B4-BE49-F238E27FC236}">
-                <a16:creationId xmlns:a16="http://schemas.microsoft.com/office/drawing/2014/main" id="{566C5366-A1A2-F44F-9079-DBF21C098419}"/>
-              </a:ext>
-            </a:extLst>
-          </p:cNvPr>
-          <p:cNvSpPr>
-            <a:spLocks noGrp="1"/>
-          </p:cNvSpPr>
-          <p:nvPr>
-            <p:ph type="body" sz="quarter" idx="26"/>
-          </p:nvPr>
-        </p:nvSpPr>
-        <p:spPr/>
-        <p:txBody>
-          <a:bodyPr/>
-          <a:lstStyle/>
-          <a:p>
-            <a:endParaRPr lang="en-US"/>
-          </a:p>
-        </p:txBody>
-      </p:sp>
-      <p:sp>
-        <p:nvSpPr>
-          <p:cNvPr id="35" name="Text Placeholder 34">
-            <a:extLst>
-              <a:ext uri="{FF2B5EF4-FFF2-40B4-BE49-F238E27FC236}">
-                <a16:creationId xmlns:a16="http://schemas.microsoft.com/office/drawing/2014/main" id="{38C7E3A4-943C-7A49-A786-E9A1EBCA284D}"/>
-              </a:ext>
-            </a:extLst>
-          </p:cNvPr>
-          <p:cNvSpPr>
-            <a:spLocks noGrp="1"/>
-          </p:cNvSpPr>
-          <p:nvPr>
-            <p:ph type="body" sz="quarter" idx="27"/>
-          </p:nvPr>
-        </p:nvSpPr>
-        <p:spPr/>
-        <p:txBody>
-          <a:bodyPr/>
-          <a:lstStyle/>
-          <a:p>
-            <a:endParaRPr lang="en-US"/>
-          </a:p>
-        </p:txBody>
-      </p:sp>
-      <p:sp>
-        <p:nvSpPr>
-          <p:cNvPr id="36" name="Text Placeholder 35">
-            <a:extLst>
-              <a:ext uri="{FF2B5EF4-FFF2-40B4-BE49-F238E27FC236}">
-                <a16:creationId xmlns:a16="http://schemas.microsoft.com/office/drawing/2014/main" id="{7D23DDC0-4F5A-684D-9B1A-3033F3B2A6AF}"/>
-              </a:ext>
-            </a:extLst>
-          </p:cNvPr>
-          <p:cNvSpPr>
-            <a:spLocks noGrp="1"/>
-          </p:cNvSpPr>
-          <p:nvPr>
-            <p:ph type="body" sz="quarter" idx="28"/>
-          </p:nvPr>
-        </p:nvSpPr>
-        <p:spPr/>
-        <p:txBody>
-          <a:bodyPr/>
-          <a:lstStyle/>
-          <a:p>
-            <a:endParaRPr lang="en-US"/>
-          </a:p>
-        </p:txBody>
-      </p:sp>
-      <p:sp>
-        <p:nvSpPr>
-          <p:cNvPr id="37" name="Text Placeholder 36">
-            <a:extLst>
-              <a:ext uri="{FF2B5EF4-FFF2-40B4-BE49-F238E27FC236}">
-                <a16:creationId xmlns:a16="http://schemas.microsoft.com/office/drawing/2014/main" id="{0FFAD2FB-AF57-D641-95F4-F8C271F46B0E}"/>
-              </a:ext>
-            </a:extLst>
-          </p:cNvPr>
-          <p:cNvSpPr>
-            <a:spLocks noGrp="1"/>
-          </p:cNvSpPr>
-          <p:nvPr>
-            <p:ph type="body" sz="quarter" idx="29"/>
-          </p:nvPr>
-        </p:nvSpPr>
-        <p:spPr/>
-        <p:txBody>
-          <a:bodyPr/>
-          <a:lstStyle/>
-          <a:p>
-            <a:endParaRPr lang="en-US"/>
-          </a:p>
-        </p:txBody>
-      </p:sp>
-      <p:sp>
-        <p:nvSpPr>
-          <p:cNvPr id="38" name="Text Placeholder 37">
-            <a:extLst>
-              <a:ext uri="{FF2B5EF4-FFF2-40B4-BE49-F238E27FC236}">
-                <a16:creationId xmlns:a16="http://schemas.microsoft.com/office/drawing/2014/main" id="{401CA7F5-4F92-9346-B972-D4555C2C41C7}"/>
-              </a:ext>
-            </a:extLst>
-          </p:cNvPr>
-          <p:cNvSpPr>
-            <a:spLocks noGrp="1"/>
-          </p:cNvSpPr>
-          <p:nvPr>
-            <p:ph type="body" sz="quarter" idx="30"/>
-          </p:nvPr>
-        </p:nvSpPr>
-        <p:spPr/>
-        <p:txBody>
-          <a:bodyPr/>
-          <a:lstStyle/>
-          <a:p>
-            <a:endParaRPr lang="en-US"/>
-          </a:p>
-        </p:txBody>
-      </p:sp>
-      <p:sp>
-        <p:nvSpPr>
-          <p:cNvPr id="41" name="Picture Placeholder 40">
-            <a:extLst>
-              <a:ext uri="{FF2B5EF4-FFF2-40B4-BE49-F238E27FC236}">
-                <a16:creationId xmlns:a16="http://schemas.microsoft.com/office/drawing/2014/main" id="{32287127-C8D1-5941-8364-25281D704DAE}"/>
-              </a:ext>
-            </a:extLst>
-          </p:cNvPr>
-          <p:cNvSpPr>
-            <a:spLocks noGrp="1"/>
-          </p:cNvSpPr>
-          <p:nvPr>
-            <p:ph type="pic" sz="quarter" idx="152"/>
-          </p:nvPr>
-        </p:nvSpPr>
-        <p:spPr/>
-      </p:sp>
-      <p:sp>
-        <p:nvSpPr>
-          <p:cNvPr id="42" name="Picture Placeholder 41">
-            <a:extLst>
-              <a:ext uri="{FF2B5EF4-FFF2-40B4-BE49-F238E27FC236}">
-                <a16:creationId xmlns:a16="http://schemas.microsoft.com/office/drawing/2014/main" id="{834F81B4-FB6C-4240-AD7B-AEB007BF8866}"/>
-              </a:ext>
-            </a:extLst>
-          </p:cNvPr>
-          <p:cNvSpPr>
-            <a:spLocks noGrp="1"/>
-          </p:cNvSpPr>
-          <p:nvPr>
-            <p:ph type="pic" sz="quarter" idx="153"/>
-          </p:nvPr>
-        </p:nvSpPr>
-        <p:spPr/>
-      </p:sp>
-      <p:sp>
-        <p:nvSpPr>
-          <p:cNvPr id="43" name="Picture Placeholder 42">
-            <a:extLst>
-              <a:ext uri="{FF2B5EF4-FFF2-40B4-BE49-F238E27FC236}">
-                <a16:creationId xmlns:a16="http://schemas.microsoft.com/office/drawing/2014/main" id="{BCE6D234-0420-0941-AA27-3F83A11A605F}"/>
-              </a:ext>
-            </a:extLst>
-          </p:cNvPr>
-          <p:cNvSpPr>
-            <a:spLocks noGrp="1"/>
-          </p:cNvSpPr>
-          <p:nvPr>
-            <p:ph type="pic" sz="quarter" idx="154"/>
-          </p:nvPr>
-        </p:nvSpPr>
-        <p:spPr/>
-      </p:sp>
-      <p:sp>
-        <p:nvSpPr>
-          <p:cNvPr id="44" name="Picture Placeholder 43">
-            <a:extLst>
-              <a:ext uri="{FF2B5EF4-FFF2-40B4-BE49-F238E27FC236}">
-                <a16:creationId xmlns:a16="http://schemas.microsoft.com/office/drawing/2014/main" id="{38ABC2EA-8257-184B-AECA-13544325DD78}"/>
-              </a:ext>
-            </a:extLst>
-          </p:cNvPr>
-          <p:cNvSpPr>
-            <a:spLocks noGrp="1"/>
-          </p:cNvSpPr>
-          <p:nvPr>
-            <p:ph type="pic" sz="quarter" idx="155"/>
-          </p:nvPr>
-        </p:nvSpPr>
-        <p:spPr/>
-      </p:sp>
-      <p:sp>
-        <p:nvSpPr>
-          <p:cNvPr id="45" name="Picture Placeholder 44">
-            <a:extLst>
-              <a:ext uri="{FF2B5EF4-FFF2-40B4-BE49-F238E27FC236}">
-                <a16:creationId xmlns:a16="http://schemas.microsoft.com/office/drawing/2014/main" id="{96232D79-BFAF-024A-866A-3246EB1D9FC3}"/>
-              </a:ext>
-            </a:extLst>
-          </p:cNvPr>
-          <p:cNvSpPr>
-            <a:spLocks noGrp="1"/>
-          </p:cNvSpPr>
-          <p:nvPr>
-            <p:ph type="pic" sz="quarter" idx="156"/>
-          </p:nvPr>
-        </p:nvSpPr>
-        <p:spPr/>
-      </p:sp>
-      <p:sp>
-        <p:nvSpPr>
-          <p:cNvPr id="24" name="Title 23">
-            <a:extLst>
-              <a:ext uri="{FF2B5EF4-FFF2-40B4-BE49-F238E27FC236}">
-                <a16:creationId xmlns:a16="http://schemas.microsoft.com/office/drawing/2014/main" id="{792C5DBF-D3EF-3B46-80F3-DC44E38C922F}"/>
-              </a:ext>
-            </a:extLst>
-          </p:cNvPr>
-          <p:cNvSpPr>
-            <a:spLocks noGrp="1"/>
-          </p:cNvSpPr>
-          <p:nvPr>
-            <p:ph type="title"/>
-          </p:nvPr>
-        </p:nvSpPr>
-        <p:spPr/>
-        <p:txBody>
-          <a:bodyPr/>
-          <a:lstStyle/>
-          <a:p>
-            <a:endParaRPr lang="en-US"/>
-          </a:p>
-        </p:txBody>
-      </p:sp>
-      <p:sp>
-        <p:nvSpPr>
-          <p:cNvPr id="39" name="Text Placeholder 38">
-            <a:extLst>
-              <a:ext uri="{FF2B5EF4-FFF2-40B4-BE49-F238E27FC236}">
-                <a16:creationId xmlns:a16="http://schemas.microsoft.com/office/drawing/2014/main" id="{422D691D-F26A-F840-B5D1-4A8C84A883F2}"/>
-              </a:ext>
-            </a:extLst>
-          </p:cNvPr>
-          <p:cNvSpPr>
-            <a:spLocks noGrp="1"/>
-          </p:cNvSpPr>
-          <p:nvPr>
-            <p:ph type="body" sz="quarter" idx="150"/>
-          </p:nvPr>
-        </p:nvSpPr>
-        <p:spPr/>
-        <p:txBody>
-          <a:bodyPr/>
-          <a:lstStyle/>
-          <a:p>
-            <a:endParaRPr lang="en-US"/>
-          </a:p>
-        </p:txBody>
-      </p:sp>
-      <p:sp>
-        <p:nvSpPr>
-          <p:cNvPr id="40" name="Text Placeholder 39">
-            <a:extLst>
-              <a:ext uri="{FF2B5EF4-FFF2-40B4-BE49-F238E27FC236}">
-                <a16:creationId xmlns:a16="http://schemas.microsoft.com/office/drawing/2014/main" id="{9F0F64A0-1EF2-2645-B79E-2A35FF5C517E}"/>
-              </a:ext>
-            </a:extLst>
-          </p:cNvPr>
-          <p:cNvSpPr>
-            <a:spLocks noGrp="1"/>
-          </p:cNvSpPr>
-          <p:nvPr>
-            <p:ph type="body" sz="quarter" idx="151"/>
-          </p:nvPr>
-        </p:nvSpPr>
-        <p:spPr/>
-        <p:txBody>
-          <a:bodyPr/>
-          <a:lstStyle/>
-          <a:p>
-            <a:endParaRPr lang="en-US" dirty="0"/>
-          </a:p>
-        </p:txBody>
-      </p:sp>
-    </p:spTree>
-    <p:extLst>
-      <p:ext uri="{BB962C8B-B14F-4D97-AF65-F5344CB8AC3E}">
-        <p14:creationId xmlns:p14="http://schemas.microsoft.com/office/powerpoint/2010/main" val="2351822133"/>
-      </p:ext>
-    </p:extLst>
-  </p:cSld>
-  <p:clrMapOvr>
-    <a:masterClrMapping/>
-  </p:clrMapOvr>
-</p:sld>
-</file>
-
-<file path=ppt/slides/slide3.xml><?xml version="1.0" encoding="utf-8"?>
-<p:sld xmlns:a="http://schemas.openxmlformats.org/drawingml/2006/main" xmlns:r="http://schemas.openxmlformats.org/officeDocument/2006/relationships" xmlns:p="http://schemas.openxmlformats.org/presentationml/2006/main">
-  <p:cSld>
-    <p:spTree>
-      <p:nvGrpSpPr>
-        <p:cNvPr id="1" name=""/>
-        <p:cNvGrpSpPr/>
-        <p:nvPr/>
-      </p:nvGrpSpPr>
-      <p:grpSpPr>
-        <a:xfrm>
-          <a:off x="0" y="0"/>
-          <a:ext cx="0" cy="0"/>
-          <a:chOff x="0" y="0"/>
-          <a:chExt cx="0" cy="0"/>
-        </a:xfrm>
-      </p:grpSpPr>
-      <p:sp>
-        <p:nvSpPr>
-          <p:cNvPr id="19" name="Picture Placeholder 18">
-            <a:extLst>
-              <a:ext uri="{FF2B5EF4-FFF2-40B4-BE49-F238E27FC236}">
-                <a16:creationId xmlns:a16="http://schemas.microsoft.com/office/drawing/2014/main" id="{A9BE0DEE-281F-1A49-8CAD-3F2811158A73}"/>
-              </a:ext>
-            </a:extLst>
-          </p:cNvPr>
-          <p:cNvSpPr>
-            <a:spLocks noGrp="1"/>
-          </p:cNvSpPr>
-          <p:nvPr>
-            <p:ph type="pic" sz="quarter" idx="152"/>
-          </p:nvPr>
-        </p:nvSpPr>
-        <p:spPr/>
-      </p:sp>
-      <p:sp>
-        <p:nvSpPr>
-          <p:cNvPr id="20" name="Picture Placeholder 19">
-            <a:extLst>
-              <a:ext uri="{FF2B5EF4-FFF2-40B4-BE49-F238E27FC236}">
-                <a16:creationId xmlns:a16="http://schemas.microsoft.com/office/drawing/2014/main" id="{B7F8D0D8-D9AA-9E45-A55E-531BD3FB8E21}"/>
-              </a:ext>
-            </a:extLst>
-          </p:cNvPr>
-          <p:cNvSpPr>
-            <a:spLocks noGrp="1"/>
-          </p:cNvSpPr>
-          <p:nvPr>
-            <p:ph type="pic" sz="quarter" idx="153"/>
-          </p:nvPr>
-        </p:nvSpPr>
-        <p:spPr/>
-      </p:sp>
-      <p:sp>
-        <p:nvSpPr>
-          <p:cNvPr id="21" name="Picture Placeholder 20">
-            <a:extLst>
-              <a:ext uri="{FF2B5EF4-FFF2-40B4-BE49-F238E27FC236}">
-                <a16:creationId xmlns:a16="http://schemas.microsoft.com/office/drawing/2014/main" id="{3EC48666-0F8D-4C4A-8BBE-C83FD24EE10E}"/>
-              </a:ext>
-            </a:extLst>
-          </p:cNvPr>
-          <p:cNvSpPr>
-            <a:spLocks noGrp="1"/>
-          </p:cNvSpPr>
-          <p:nvPr>
-            <p:ph type="pic" sz="quarter" idx="154"/>
-          </p:nvPr>
-        </p:nvSpPr>
-        <p:spPr/>
-      </p:sp>
-      <p:sp>
-        <p:nvSpPr>
-          <p:cNvPr id="22" name="Picture Placeholder 21">
-            <a:extLst>
-              <a:ext uri="{FF2B5EF4-FFF2-40B4-BE49-F238E27FC236}">
-                <a16:creationId xmlns:a16="http://schemas.microsoft.com/office/drawing/2014/main" id="{878B0CFC-1BA0-3844-9441-0777D51CC3F9}"/>
-              </a:ext>
-            </a:extLst>
-          </p:cNvPr>
-          <p:cNvSpPr>
-            <a:spLocks noGrp="1"/>
-          </p:cNvSpPr>
-          <p:nvPr>
-            <p:ph type="pic" sz="quarter" idx="155"/>
-          </p:nvPr>
-        </p:nvSpPr>
-        <p:spPr/>
-      </p:sp>
-      <p:sp>
-        <p:nvSpPr>
-          <p:cNvPr id="23" name="Picture Placeholder 22">
-            <a:extLst>
-              <a:ext uri="{FF2B5EF4-FFF2-40B4-BE49-F238E27FC236}">
-                <a16:creationId xmlns:a16="http://schemas.microsoft.com/office/drawing/2014/main" id="{A1DF65FC-2FAC-A747-9F7C-3392A3F8C07B}"/>
-              </a:ext>
-            </a:extLst>
-          </p:cNvPr>
-          <p:cNvSpPr>
-            <a:spLocks noGrp="1"/>
-          </p:cNvSpPr>
-          <p:nvPr>
-            <p:ph type="pic" sz="quarter" idx="156"/>
-          </p:nvPr>
-        </p:nvSpPr>
-        <p:spPr/>
-      </p:sp>
-      <p:sp>
-        <p:nvSpPr>
-          <p:cNvPr id="3" name="Text Placeholder 2">
-            <a:extLst>
-              <a:ext uri="{FF2B5EF4-FFF2-40B4-BE49-F238E27FC236}">
-                <a16:creationId xmlns:a16="http://schemas.microsoft.com/office/drawing/2014/main" id="{6B54AE1F-B08D-5A40-AFDB-F5E8E834C49F}"/>
-              </a:ext>
-            </a:extLst>
-          </p:cNvPr>
-          <p:cNvSpPr>
-            <a:spLocks noGrp="1"/>
-          </p:cNvSpPr>
-          <p:nvPr>
-            <p:ph type="body" sz="quarter" idx="10"/>
-          </p:nvPr>
-        </p:nvSpPr>
-        <p:spPr/>
-        <p:txBody>
-          <a:bodyPr/>
-          <a:lstStyle/>
-          <a:p>
-            <a:endParaRPr lang="en-US"/>
-          </a:p>
-        </p:txBody>
-      </p:sp>
-      <p:sp>
-        <p:nvSpPr>
-          <p:cNvPr id="4" name="Text Placeholder 3">
-            <a:extLst>
-              <a:ext uri="{FF2B5EF4-FFF2-40B4-BE49-F238E27FC236}">
-                <a16:creationId xmlns:a16="http://schemas.microsoft.com/office/drawing/2014/main" id="{C9BD9246-AE45-5B4D-BC8B-383042993E37}"/>
-              </a:ext>
-            </a:extLst>
-          </p:cNvPr>
-          <p:cNvSpPr>
-            <a:spLocks noGrp="1"/>
-          </p:cNvSpPr>
-          <p:nvPr>
-            <p:ph type="body" sz="quarter" idx="11"/>
-          </p:nvPr>
-        </p:nvSpPr>
-        <p:spPr/>
-        <p:txBody>
-          <a:bodyPr/>
-          <a:lstStyle/>
-          <a:p>
-            <a:endParaRPr lang="en-US"/>
-          </a:p>
-        </p:txBody>
-      </p:sp>
-      <p:sp>
-        <p:nvSpPr>
-          <p:cNvPr id="5" name="Text Placeholder 4">
-            <a:extLst>
-              <a:ext uri="{FF2B5EF4-FFF2-40B4-BE49-F238E27FC236}">
-                <a16:creationId xmlns:a16="http://schemas.microsoft.com/office/drawing/2014/main" id="{DBB67374-7DFE-0648-B892-8A086D7DFF1F}"/>
-              </a:ext>
-            </a:extLst>
-          </p:cNvPr>
-          <p:cNvSpPr>
-            <a:spLocks noGrp="1"/>
-          </p:cNvSpPr>
-          <p:nvPr>
-            <p:ph type="body" sz="quarter" idx="19"/>
-          </p:nvPr>
-        </p:nvSpPr>
-        <p:spPr/>
-        <p:txBody>
-          <a:bodyPr/>
-          <a:lstStyle/>
-          <a:p>
-            <a:endParaRPr lang="en-US"/>
-          </a:p>
-        </p:txBody>
-      </p:sp>
-      <p:sp>
-        <p:nvSpPr>
-          <p:cNvPr id="6" name="Text Placeholder 5">
-            <a:extLst>
-              <a:ext uri="{FF2B5EF4-FFF2-40B4-BE49-F238E27FC236}">
-                <a16:creationId xmlns:a16="http://schemas.microsoft.com/office/drawing/2014/main" id="{C69C0194-CA8B-1C44-AA0E-A316F4F34E4F}"/>
-              </a:ext>
-            </a:extLst>
-          </p:cNvPr>
-          <p:cNvSpPr>
-            <a:spLocks noGrp="1"/>
-          </p:cNvSpPr>
-          <p:nvPr>
-            <p:ph type="body" sz="quarter" idx="20"/>
-          </p:nvPr>
-        </p:nvSpPr>
-        <p:spPr/>
-        <p:txBody>
-          <a:bodyPr/>
-          <a:lstStyle/>
-          <a:p>
-            <a:endParaRPr lang="en-US"/>
-          </a:p>
-        </p:txBody>
-      </p:sp>
-      <p:sp>
-        <p:nvSpPr>
-          <p:cNvPr id="7" name="Text Placeholder 6">
-            <a:extLst>
-              <a:ext uri="{FF2B5EF4-FFF2-40B4-BE49-F238E27FC236}">
-                <a16:creationId xmlns:a16="http://schemas.microsoft.com/office/drawing/2014/main" id="{E5F17926-1D27-354C-9B54-2F923113E1F1}"/>
-              </a:ext>
-            </a:extLst>
-          </p:cNvPr>
-          <p:cNvSpPr>
-            <a:spLocks noGrp="1"/>
-          </p:cNvSpPr>
-          <p:nvPr>
-            <p:ph type="body" sz="quarter" idx="21"/>
-          </p:nvPr>
-        </p:nvSpPr>
-        <p:spPr/>
-        <p:txBody>
-          <a:bodyPr/>
-          <a:lstStyle/>
-          <a:p>
-            <a:endParaRPr lang="en-US" dirty="0"/>
-          </a:p>
-        </p:txBody>
-      </p:sp>
-      <p:sp>
-        <p:nvSpPr>
-          <p:cNvPr id="8" name="Text Placeholder 7">
-            <a:extLst>
-              <a:ext uri="{FF2B5EF4-FFF2-40B4-BE49-F238E27FC236}">
-                <a16:creationId xmlns:a16="http://schemas.microsoft.com/office/drawing/2014/main" id="{E81E76C2-C18B-374E-9106-6A23364432F3}"/>
-              </a:ext>
-            </a:extLst>
-          </p:cNvPr>
-          <p:cNvSpPr>
-            <a:spLocks noGrp="1"/>
-          </p:cNvSpPr>
-          <p:nvPr>
-            <p:ph type="body" sz="quarter" idx="22"/>
-          </p:nvPr>
-        </p:nvSpPr>
-        <p:spPr/>
-        <p:txBody>
-          <a:bodyPr/>
-          <a:lstStyle/>
-          <a:p>
-            <a:r>
-              <a:rPr lang="en-US" dirty="0"/>
-              <a:t>Experimental Setup</a:t>
-            </a:r>
-          </a:p>
-        </p:txBody>
-      </p:sp>
-      <p:sp>
-        <p:nvSpPr>
-          <p:cNvPr id="9" name="Text Placeholder 8">
-            <a:extLst>
-              <a:ext uri="{FF2B5EF4-FFF2-40B4-BE49-F238E27FC236}">
-                <a16:creationId xmlns:a16="http://schemas.microsoft.com/office/drawing/2014/main" id="{214520F2-6D1C-6E44-A85B-A786AC903C52}"/>
-              </a:ext>
-            </a:extLst>
-          </p:cNvPr>
-          <p:cNvSpPr>
-            <a:spLocks noGrp="1"/>
-          </p:cNvSpPr>
-          <p:nvPr>
-            <p:ph type="body" sz="quarter" idx="23"/>
-          </p:nvPr>
-        </p:nvSpPr>
-        <p:spPr/>
-        <p:txBody>
-          <a:bodyPr/>
-          <a:lstStyle/>
-          <a:p>
-            <a:endParaRPr lang="en-US"/>
-          </a:p>
-        </p:txBody>
-      </p:sp>
-      <p:sp>
-        <p:nvSpPr>
-          <p:cNvPr id="10" name="Text Placeholder 9">
-            <a:extLst>
-              <a:ext uri="{FF2B5EF4-FFF2-40B4-BE49-F238E27FC236}">
-                <a16:creationId xmlns:a16="http://schemas.microsoft.com/office/drawing/2014/main" id="{A3685424-6DDE-F84B-8B00-7622E45CFFDB}"/>
-              </a:ext>
-            </a:extLst>
-          </p:cNvPr>
-          <p:cNvSpPr>
-            <a:spLocks noGrp="1"/>
-          </p:cNvSpPr>
-          <p:nvPr>
-            <p:ph type="body" sz="quarter" idx="24"/>
-          </p:nvPr>
-        </p:nvSpPr>
-        <p:spPr/>
-        <p:txBody>
-          <a:bodyPr/>
-          <a:lstStyle/>
-          <a:p>
-            <a:endParaRPr lang="en-US"/>
-          </a:p>
-        </p:txBody>
-      </p:sp>
-      <p:sp>
-        <p:nvSpPr>
-          <p:cNvPr id="11" name="Text Placeholder 10">
-            <a:extLst>
-              <a:ext uri="{FF2B5EF4-FFF2-40B4-BE49-F238E27FC236}">
-                <a16:creationId xmlns:a16="http://schemas.microsoft.com/office/drawing/2014/main" id="{ABE3628C-DC42-C34C-A257-8F328A2CA585}"/>
-              </a:ext>
-            </a:extLst>
-          </p:cNvPr>
-          <p:cNvSpPr>
-            <a:spLocks noGrp="1"/>
-          </p:cNvSpPr>
-          <p:nvPr>
-            <p:ph type="body" sz="quarter" idx="25"/>
-          </p:nvPr>
-        </p:nvSpPr>
-        <p:spPr/>
-        <p:txBody>
-          <a:bodyPr/>
-          <a:lstStyle/>
-          <a:p>
-            <a:endParaRPr lang="en-US"/>
-          </a:p>
-        </p:txBody>
-      </p:sp>
-      <p:sp>
-        <p:nvSpPr>
-          <p:cNvPr id="12" name="Text Placeholder 11">
-            <a:extLst>
-              <a:ext uri="{FF2B5EF4-FFF2-40B4-BE49-F238E27FC236}">
-                <a16:creationId xmlns:a16="http://schemas.microsoft.com/office/drawing/2014/main" id="{DD074438-2C91-1240-BDC9-B1D5892AF67C}"/>
-              </a:ext>
-            </a:extLst>
-          </p:cNvPr>
-          <p:cNvSpPr>
-            <a:spLocks noGrp="1"/>
-          </p:cNvSpPr>
-          <p:nvPr>
-            <p:ph type="body" sz="quarter" idx="26"/>
-          </p:nvPr>
-        </p:nvSpPr>
-        <p:spPr/>
-        <p:txBody>
-          <a:bodyPr/>
-          <a:lstStyle/>
-          <a:p>
-            <a:endParaRPr lang="en-US"/>
-          </a:p>
-        </p:txBody>
-      </p:sp>
-      <p:sp>
-        <p:nvSpPr>
-          <p:cNvPr id="13" name="Text Placeholder 12">
-            <a:extLst>
-              <a:ext uri="{FF2B5EF4-FFF2-40B4-BE49-F238E27FC236}">
-                <a16:creationId xmlns:a16="http://schemas.microsoft.com/office/drawing/2014/main" id="{3D2A9BA6-CEDE-814B-979E-DEFD9C24C1E0}"/>
-              </a:ext>
-            </a:extLst>
-          </p:cNvPr>
-          <p:cNvSpPr>
-            <a:spLocks noGrp="1"/>
-          </p:cNvSpPr>
-          <p:nvPr>
-            <p:ph type="body" sz="quarter" idx="27"/>
-          </p:nvPr>
-        </p:nvSpPr>
-        <p:spPr/>
-        <p:txBody>
-          <a:bodyPr/>
-          <a:lstStyle/>
-          <a:p>
-            <a:endParaRPr lang="en-US"/>
-          </a:p>
-        </p:txBody>
-      </p:sp>
-      <p:sp>
-        <p:nvSpPr>
-          <p:cNvPr id="14" name="Text Placeholder 13">
-            <a:extLst>
-              <a:ext uri="{FF2B5EF4-FFF2-40B4-BE49-F238E27FC236}">
-                <a16:creationId xmlns:a16="http://schemas.microsoft.com/office/drawing/2014/main" id="{E9AE433F-F067-7A44-AD2E-B91C1CE65F90}"/>
-              </a:ext>
-            </a:extLst>
-          </p:cNvPr>
-          <p:cNvSpPr>
-            <a:spLocks noGrp="1"/>
-          </p:cNvSpPr>
-          <p:nvPr>
-            <p:ph type="body" sz="quarter" idx="28"/>
-          </p:nvPr>
-        </p:nvSpPr>
-        <p:spPr/>
-        <p:txBody>
-          <a:bodyPr/>
-          <a:lstStyle/>
-          <a:p>
-            <a:endParaRPr lang="en-US"/>
-          </a:p>
-        </p:txBody>
-      </p:sp>
-      <p:sp>
-        <p:nvSpPr>
-          <p:cNvPr id="15" name="Text Placeholder 14">
-            <a:extLst>
-              <a:ext uri="{FF2B5EF4-FFF2-40B4-BE49-F238E27FC236}">
-                <a16:creationId xmlns:a16="http://schemas.microsoft.com/office/drawing/2014/main" id="{B7B7762A-139A-2946-B38E-0E2475A7C811}"/>
-              </a:ext>
-            </a:extLst>
-          </p:cNvPr>
-          <p:cNvSpPr>
-            <a:spLocks noGrp="1"/>
-          </p:cNvSpPr>
-          <p:nvPr>
-            <p:ph type="body" sz="quarter" idx="29"/>
-          </p:nvPr>
-        </p:nvSpPr>
-        <p:spPr/>
-        <p:txBody>
-          <a:bodyPr/>
-          <a:lstStyle/>
-          <a:p>
-            <a:endParaRPr lang="en-US"/>
-          </a:p>
-        </p:txBody>
-      </p:sp>
-      <p:sp>
-        <p:nvSpPr>
-          <p:cNvPr id="16" name="Text Placeholder 15">
-            <a:extLst>
-              <a:ext uri="{FF2B5EF4-FFF2-40B4-BE49-F238E27FC236}">
-                <a16:creationId xmlns:a16="http://schemas.microsoft.com/office/drawing/2014/main" id="{5BF0EB9A-86CD-8845-BCD0-8E2D7427F637}"/>
-              </a:ext>
-            </a:extLst>
-          </p:cNvPr>
-          <p:cNvSpPr>
-            <a:spLocks noGrp="1"/>
-          </p:cNvSpPr>
-          <p:nvPr>
-            <p:ph type="body" sz="quarter" idx="30"/>
-          </p:nvPr>
-        </p:nvSpPr>
-        <p:spPr/>
-        <p:txBody>
-          <a:bodyPr/>
-          <a:lstStyle/>
-          <a:p>
-            <a:endParaRPr lang="en-US"/>
-          </a:p>
-        </p:txBody>
-      </p:sp>
-      <p:sp>
-        <p:nvSpPr>
-          <p:cNvPr id="48" name="Text Placeholder 47">
-            <a:extLst>
-              <a:ext uri="{FF2B5EF4-FFF2-40B4-BE49-F238E27FC236}">
-                <a16:creationId xmlns:a16="http://schemas.microsoft.com/office/drawing/2014/main" id="{60B1FD8E-3FCB-5646-B11E-31BA1EAC0379}"/>
-              </a:ext>
-            </a:extLst>
-          </p:cNvPr>
-          <p:cNvSpPr>
-            <a:spLocks noGrp="1"/>
-          </p:cNvSpPr>
-          <p:nvPr>
-            <p:ph type="body" sz="quarter" idx="157"/>
-          </p:nvPr>
-        </p:nvSpPr>
-        <p:spPr/>
-        <p:txBody>
-          <a:bodyPr/>
-          <a:lstStyle/>
-          <a:p>
-            <a:endParaRPr lang="en-US"/>
-          </a:p>
-        </p:txBody>
-      </p:sp>
-      <p:sp>
-        <p:nvSpPr>
-          <p:cNvPr id="49" name="Text Placeholder 48">
-            <a:extLst>
-              <a:ext uri="{FF2B5EF4-FFF2-40B4-BE49-F238E27FC236}">
-                <a16:creationId xmlns:a16="http://schemas.microsoft.com/office/drawing/2014/main" id="{0DA515FC-E57F-5247-BBF7-F506307424E5}"/>
-              </a:ext>
-            </a:extLst>
-          </p:cNvPr>
-          <p:cNvSpPr>
-            <a:spLocks noGrp="1"/>
-          </p:cNvSpPr>
-          <p:nvPr>
-            <p:ph type="body" sz="quarter" idx="158"/>
-          </p:nvPr>
-        </p:nvSpPr>
-        <p:spPr/>
-        <p:txBody>
-          <a:bodyPr/>
-          <a:lstStyle/>
-          <a:p>
-            <a:endParaRPr lang="en-US"/>
-          </a:p>
-        </p:txBody>
-      </p:sp>
-      <p:sp>
-        <p:nvSpPr>
-          <p:cNvPr id="2" name="Title 1">
-            <a:extLst>
-              <a:ext uri="{FF2B5EF4-FFF2-40B4-BE49-F238E27FC236}">
-                <a16:creationId xmlns:a16="http://schemas.microsoft.com/office/drawing/2014/main" id="{3314A58E-B95B-3748-BC1F-E1E8CF6481D8}"/>
-              </a:ext>
-            </a:extLst>
-          </p:cNvPr>
-          <p:cNvSpPr>
-            <a:spLocks noGrp="1"/>
-          </p:cNvSpPr>
-          <p:nvPr>
-            <p:ph type="title"/>
-          </p:nvPr>
-        </p:nvSpPr>
-        <p:spPr/>
-        <p:txBody>
-          <a:bodyPr/>
-          <a:lstStyle/>
-          <a:p>
-            <a:endParaRPr lang="en-US"/>
-          </a:p>
-        </p:txBody>
-      </p:sp>
-      <p:sp>
-        <p:nvSpPr>
-          <p:cNvPr id="17" name="Text Placeholder 16">
-            <a:extLst>
-              <a:ext uri="{FF2B5EF4-FFF2-40B4-BE49-F238E27FC236}">
-                <a16:creationId xmlns:a16="http://schemas.microsoft.com/office/drawing/2014/main" id="{C411D744-5B45-8344-BA8E-0728EC5FA6B8}"/>
-              </a:ext>
-            </a:extLst>
-          </p:cNvPr>
-          <p:cNvSpPr>
-            <a:spLocks noGrp="1"/>
-          </p:cNvSpPr>
-          <p:nvPr>
-            <p:ph type="body" sz="quarter" idx="150"/>
-          </p:nvPr>
-        </p:nvSpPr>
-        <p:spPr/>
-        <p:txBody>
-          <a:bodyPr/>
-          <a:lstStyle/>
-          <a:p>
-            <a:endParaRPr lang="en-US"/>
-          </a:p>
-        </p:txBody>
-      </p:sp>
-      <p:sp>
-        <p:nvSpPr>
-          <p:cNvPr id="18" name="Text Placeholder 17">
-            <a:extLst>
-              <a:ext uri="{FF2B5EF4-FFF2-40B4-BE49-F238E27FC236}">
-                <a16:creationId xmlns:a16="http://schemas.microsoft.com/office/drawing/2014/main" id="{3E323885-677D-414B-B454-D8F46AEEA878}"/>
-              </a:ext>
-            </a:extLst>
-          </p:cNvPr>
-          <p:cNvSpPr>
-            <a:spLocks noGrp="1"/>
-          </p:cNvSpPr>
-          <p:nvPr>
-            <p:ph type="body" sz="quarter" idx="151"/>
-          </p:nvPr>
-        </p:nvSpPr>
-        <p:spPr/>
-        <p:txBody>
-          <a:bodyPr/>
-          <a:lstStyle/>
-          <a:p>
-            <a:endParaRPr lang="en-US"/>
-          </a:p>
-        </p:txBody>
-      </p:sp>
-    </p:spTree>
-  </p:cSld>
-  <p:clrMapOvr>
-    <a:masterClrMapping/>
-  </p:clrMapOvr>
-</p:sld>
-</file>
-
-<file path=ppt/slides/slide4.xml><?xml version="1.0" encoding="utf-8"?>
-<p:sld xmlns:a="http://schemas.openxmlformats.org/drawingml/2006/main" xmlns:r="http://schemas.openxmlformats.org/officeDocument/2006/relationships" xmlns:p="http://schemas.openxmlformats.org/presentationml/2006/main">
-  <p:cSld>
-    <p:spTree>
-      <p:nvGrpSpPr>
-        <p:cNvPr id="1" name=""/>
-        <p:cNvGrpSpPr/>
-        <p:nvPr/>
-      </p:nvGrpSpPr>
-      <p:grpSpPr>
-        <a:xfrm>
-          <a:off x="0" y="0"/>
-          <a:ext cx="0" cy="0"/>
-          <a:chOff x="0" y="0"/>
-          <a:chExt cx="0" cy="0"/>
-        </a:xfrm>
-      </p:grpSpPr>
-      <p:sp>
-        <p:nvSpPr>
-          <p:cNvPr id="27" name="Text Placeholder 26">
-            <a:extLst>
-              <a:ext uri="{FF2B5EF4-FFF2-40B4-BE49-F238E27FC236}">
-                <a16:creationId xmlns:a16="http://schemas.microsoft.com/office/drawing/2014/main" id="{A86EDD2F-88B5-2A4F-8CDD-5E3C5BE51BA9}"/>
-              </a:ext>
-            </a:extLst>
-          </p:cNvPr>
-          <p:cNvSpPr>
-            <a:spLocks noGrp="1"/>
-          </p:cNvSpPr>
-          <p:nvPr>
-            <p:ph type="body" sz="quarter" idx="10"/>
-          </p:nvPr>
-        </p:nvSpPr>
-        <p:spPr/>
-        <p:txBody>
-          <a:bodyPr/>
-          <a:lstStyle/>
-          <a:p>
-            <a:endParaRPr lang="en-US"/>
-          </a:p>
-        </p:txBody>
-      </p:sp>
-      <p:sp>
-        <p:nvSpPr>
-          <p:cNvPr id="28" name="Text Placeholder 27">
-            <a:extLst>
-              <a:ext uri="{FF2B5EF4-FFF2-40B4-BE49-F238E27FC236}">
-                <a16:creationId xmlns:a16="http://schemas.microsoft.com/office/drawing/2014/main" id="{1869E260-3FBC-9841-BA07-0EB6125826F5}"/>
-              </a:ext>
-            </a:extLst>
-          </p:cNvPr>
-          <p:cNvSpPr>
-            <a:spLocks noGrp="1"/>
-          </p:cNvSpPr>
-          <p:nvPr>
-            <p:ph type="body" sz="quarter" idx="11"/>
-          </p:nvPr>
-        </p:nvSpPr>
-        <p:spPr/>
-        <p:txBody>
-          <a:bodyPr/>
-          <a:lstStyle/>
-          <a:p>
-            <a:endParaRPr lang="en-US"/>
-          </a:p>
-        </p:txBody>
-      </p:sp>
-      <p:sp>
-        <p:nvSpPr>
-          <p:cNvPr id="29" name="Text Placeholder 28">
-            <a:extLst>
-              <a:ext uri="{FF2B5EF4-FFF2-40B4-BE49-F238E27FC236}">
-                <a16:creationId xmlns:a16="http://schemas.microsoft.com/office/drawing/2014/main" id="{7CB78F16-AEEA-C34D-A4B6-F128A349C709}"/>
-              </a:ext>
-            </a:extLst>
-          </p:cNvPr>
-          <p:cNvSpPr>
-            <a:spLocks noGrp="1"/>
-          </p:cNvSpPr>
-          <p:nvPr>
-            <p:ph type="body" sz="quarter" idx="19"/>
-          </p:nvPr>
-        </p:nvSpPr>
-        <p:spPr/>
-        <p:txBody>
-          <a:bodyPr/>
-          <a:lstStyle/>
-          <a:p>
-            <a:endParaRPr lang="en-US"/>
-          </a:p>
-        </p:txBody>
-      </p:sp>
-      <p:sp>
-        <p:nvSpPr>
-          <p:cNvPr id="30" name="Text Placeholder 29">
-            <a:extLst>
-              <a:ext uri="{FF2B5EF4-FFF2-40B4-BE49-F238E27FC236}">
-                <a16:creationId xmlns:a16="http://schemas.microsoft.com/office/drawing/2014/main" id="{0693568A-CFDB-6E40-9D8F-0B17B526B7F5}"/>
-              </a:ext>
-            </a:extLst>
-          </p:cNvPr>
-          <p:cNvSpPr>
-            <a:spLocks noGrp="1"/>
-          </p:cNvSpPr>
-          <p:nvPr>
-            <p:ph type="body" sz="quarter" idx="20"/>
-          </p:nvPr>
-        </p:nvSpPr>
-        <p:spPr/>
-        <p:txBody>
-          <a:bodyPr/>
-          <a:lstStyle/>
-          <a:p>
-            <a:endParaRPr lang="en-US"/>
-          </a:p>
-        </p:txBody>
-      </p:sp>
-      <p:sp>
-        <p:nvSpPr>
-          <p:cNvPr id="31" name="Text Placeholder 30">
-            <a:extLst>
-              <a:ext uri="{FF2B5EF4-FFF2-40B4-BE49-F238E27FC236}">
-                <a16:creationId xmlns:a16="http://schemas.microsoft.com/office/drawing/2014/main" id="{AA09FDB5-350A-8E41-BEDC-9E1BB1B3AEEC}"/>
-              </a:ext>
-            </a:extLst>
-          </p:cNvPr>
-          <p:cNvSpPr>
-            <a:spLocks noGrp="1"/>
-          </p:cNvSpPr>
-          <p:nvPr>
-            <p:ph type="body" sz="quarter" idx="21"/>
-          </p:nvPr>
-        </p:nvSpPr>
-        <p:spPr/>
-        <p:txBody>
-          <a:bodyPr/>
-          <a:lstStyle/>
-          <a:p>
-            <a:endParaRPr lang="en-US"/>
-          </a:p>
-        </p:txBody>
-      </p:sp>
-      <p:sp>
-        <p:nvSpPr>
-          <p:cNvPr id="32" name="Text Placeholder 31">
-            <a:extLst>
-              <a:ext uri="{FF2B5EF4-FFF2-40B4-BE49-F238E27FC236}">
-                <a16:creationId xmlns:a16="http://schemas.microsoft.com/office/drawing/2014/main" id="{D73F927B-30BA-AA48-BCB1-173F34F1E707}"/>
-              </a:ext>
-            </a:extLst>
-          </p:cNvPr>
-          <p:cNvSpPr>
-            <a:spLocks noGrp="1"/>
-          </p:cNvSpPr>
-          <p:nvPr>
-            <p:ph type="body" sz="quarter" idx="22"/>
-          </p:nvPr>
-        </p:nvSpPr>
-        <p:spPr/>
-        <p:txBody>
-          <a:bodyPr/>
-          <a:lstStyle/>
-          <a:p>
-            <a:endParaRPr lang="en-US"/>
-          </a:p>
-        </p:txBody>
-      </p:sp>
-      <p:sp>
-        <p:nvSpPr>
-          <p:cNvPr id="33" name="Text Placeholder 32">
-            <a:extLst>
-              <a:ext uri="{FF2B5EF4-FFF2-40B4-BE49-F238E27FC236}">
-                <a16:creationId xmlns:a16="http://schemas.microsoft.com/office/drawing/2014/main" id="{5F4B5F2B-8C0D-F840-AE53-8FC80D27B118}"/>
-              </a:ext>
-            </a:extLst>
-          </p:cNvPr>
-          <p:cNvSpPr>
-            <a:spLocks noGrp="1"/>
-          </p:cNvSpPr>
-          <p:nvPr>
-            <p:ph type="body" sz="quarter" idx="23"/>
-          </p:nvPr>
-        </p:nvSpPr>
-        <p:spPr/>
-        <p:txBody>
-          <a:bodyPr/>
-          <a:lstStyle/>
-          <a:p>
-            <a:endParaRPr lang="en-US"/>
-          </a:p>
-        </p:txBody>
-      </p:sp>
-      <p:sp>
-        <p:nvSpPr>
-          <p:cNvPr id="34" name="Text Placeholder 33">
-            <a:extLst>
-              <a:ext uri="{FF2B5EF4-FFF2-40B4-BE49-F238E27FC236}">
-                <a16:creationId xmlns:a16="http://schemas.microsoft.com/office/drawing/2014/main" id="{B20B203F-EFC6-7E4E-BBE7-C5BAC47FA902}"/>
-              </a:ext>
-            </a:extLst>
-          </p:cNvPr>
-          <p:cNvSpPr>
-            <a:spLocks noGrp="1"/>
-          </p:cNvSpPr>
-          <p:nvPr>
-            <p:ph type="body" sz="quarter" idx="24"/>
-          </p:nvPr>
-        </p:nvSpPr>
-        <p:spPr/>
-        <p:txBody>
-          <a:bodyPr/>
-          <a:lstStyle/>
-          <a:p>
-            <a:endParaRPr lang="en-US"/>
-          </a:p>
-        </p:txBody>
-      </p:sp>
-      <p:sp>
-        <p:nvSpPr>
-          <p:cNvPr id="35" name="Text Placeholder 34">
-            <a:extLst>
-              <a:ext uri="{FF2B5EF4-FFF2-40B4-BE49-F238E27FC236}">
-                <a16:creationId xmlns:a16="http://schemas.microsoft.com/office/drawing/2014/main" id="{5CEFA13B-6CCA-5C4D-9496-CF1EB28DF97E}"/>
-              </a:ext>
-            </a:extLst>
-          </p:cNvPr>
-          <p:cNvSpPr>
-            <a:spLocks noGrp="1"/>
-          </p:cNvSpPr>
-          <p:nvPr>
-            <p:ph type="body" sz="quarter" idx="25"/>
-          </p:nvPr>
-        </p:nvSpPr>
-        <p:spPr/>
-        <p:txBody>
-          <a:bodyPr/>
-          <a:lstStyle/>
-          <a:p>
-            <a:endParaRPr lang="en-US"/>
-          </a:p>
-        </p:txBody>
-      </p:sp>
-      <p:sp>
-        <p:nvSpPr>
-          <p:cNvPr id="36" name="Text Placeholder 35">
-            <a:extLst>
-              <a:ext uri="{FF2B5EF4-FFF2-40B4-BE49-F238E27FC236}">
-                <a16:creationId xmlns:a16="http://schemas.microsoft.com/office/drawing/2014/main" id="{DCAFB76E-A55F-CC43-80BB-A259C076F406}"/>
-              </a:ext>
-            </a:extLst>
-          </p:cNvPr>
-          <p:cNvSpPr>
-            <a:spLocks noGrp="1"/>
-          </p:cNvSpPr>
-          <p:nvPr>
-            <p:ph type="body" sz="quarter" idx="26"/>
-          </p:nvPr>
-        </p:nvSpPr>
-        <p:spPr/>
-        <p:txBody>
-          <a:bodyPr/>
-          <a:lstStyle/>
-          <a:p>
-            <a:endParaRPr lang="en-US"/>
-          </a:p>
-        </p:txBody>
-      </p:sp>
-      <p:sp>
-        <p:nvSpPr>
-          <p:cNvPr id="37" name="Text Placeholder 36">
-            <a:extLst>
-              <a:ext uri="{FF2B5EF4-FFF2-40B4-BE49-F238E27FC236}">
-                <a16:creationId xmlns:a16="http://schemas.microsoft.com/office/drawing/2014/main" id="{08ED6032-66AF-9245-BB3A-21BE28F1D413}"/>
-              </a:ext>
-            </a:extLst>
-          </p:cNvPr>
-          <p:cNvSpPr>
-            <a:spLocks noGrp="1"/>
-          </p:cNvSpPr>
-          <p:nvPr>
-            <p:ph type="body" sz="quarter" idx="27"/>
-          </p:nvPr>
-        </p:nvSpPr>
-        <p:spPr/>
-        <p:txBody>
-          <a:bodyPr/>
-          <a:lstStyle/>
-          <a:p>
-            <a:endParaRPr lang="en-US"/>
-          </a:p>
-        </p:txBody>
-      </p:sp>
-      <p:sp>
-        <p:nvSpPr>
-          <p:cNvPr id="38" name="Text Placeholder 37">
-            <a:extLst>
-              <a:ext uri="{FF2B5EF4-FFF2-40B4-BE49-F238E27FC236}">
-                <a16:creationId xmlns:a16="http://schemas.microsoft.com/office/drawing/2014/main" id="{5C19AC5C-205C-8C4B-A4FE-A1E17AF98D27}"/>
-              </a:ext>
-            </a:extLst>
-          </p:cNvPr>
-          <p:cNvSpPr>
-            <a:spLocks noGrp="1"/>
-          </p:cNvSpPr>
-          <p:nvPr>
-            <p:ph type="body" sz="quarter" idx="28"/>
-          </p:nvPr>
-        </p:nvSpPr>
-        <p:spPr/>
-        <p:txBody>
-          <a:bodyPr/>
-          <a:lstStyle/>
-          <a:p>
-            <a:endParaRPr lang="en-US"/>
-          </a:p>
-        </p:txBody>
-      </p:sp>
-      <p:sp>
-        <p:nvSpPr>
-          <p:cNvPr id="39" name="Text Placeholder 38">
-            <a:extLst>
-              <a:ext uri="{FF2B5EF4-FFF2-40B4-BE49-F238E27FC236}">
-                <a16:creationId xmlns:a16="http://schemas.microsoft.com/office/drawing/2014/main" id="{F632243F-E429-9E4D-B270-1C839AAB6667}"/>
-              </a:ext>
-            </a:extLst>
-          </p:cNvPr>
-          <p:cNvSpPr>
-            <a:spLocks noGrp="1"/>
-          </p:cNvSpPr>
-          <p:nvPr>
-            <p:ph type="body" sz="quarter" idx="29"/>
-          </p:nvPr>
-        </p:nvSpPr>
-        <p:spPr/>
-        <p:txBody>
-          <a:bodyPr/>
-          <a:lstStyle/>
-          <a:p>
-            <a:endParaRPr lang="en-US"/>
-          </a:p>
-        </p:txBody>
-      </p:sp>
-      <p:sp>
-        <p:nvSpPr>
-          <p:cNvPr id="40" name="Text Placeholder 39">
-            <a:extLst>
-              <a:ext uri="{FF2B5EF4-FFF2-40B4-BE49-F238E27FC236}">
-                <a16:creationId xmlns:a16="http://schemas.microsoft.com/office/drawing/2014/main" id="{A1EAA2E7-20E6-144D-825B-3A500B3CD7DF}"/>
-              </a:ext>
-            </a:extLst>
-          </p:cNvPr>
-          <p:cNvSpPr>
-            <a:spLocks noGrp="1"/>
-          </p:cNvSpPr>
-          <p:nvPr>
-            <p:ph type="body" sz="quarter" idx="30"/>
-          </p:nvPr>
-        </p:nvSpPr>
-        <p:spPr/>
-        <p:txBody>
-          <a:bodyPr/>
-          <a:lstStyle/>
-          <a:p>
-            <a:endParaRPr lang="en-US"/>
-          </a:p>
-        </p:txBody>
-      </p:sp>
-      <p:sp>
-        <p:nvSpPr>
-          <p:cNvPr id="43" name="Picture Placeholder 42">
-            <a:extLst>
-              <a:ext uri="{FF2B5EF4-FFF2-40B4-BE49-F238E27FC236}">
-                <a16:creationId xmlns:a16="http://schemas.microsoft.com/office/drawing/2014/main" id="{3A85CDB9-BDFB-9B47-A705-C071267BF6B9}"/>
-              </a:ext>
-            </a:extLst>
-          </p:cNvPr>
-          <p:cNvSpPr>
-            <a:spLocks noGrp="1"/>
-          </p:cNvSpPr>
-          <p:nvPr>
-            <p:ph type="pic" sz="quarter" idx="152"/>
-          </p:nvPr>
-        </p:nvSpPr>
-        <p:spPr/>
-      </p:sp>
-      <p:sp>
-        <p:nvSpPr>
-          <p:cNvPr id="44" name="Picture Placeholder 43">
-            <a:extLst>
-              <a:ext uri="{FF2B5EF4-FFF2-40B4-BE49-F238E27FC236}">
-                <a16:creationId xmlns:a16="http://schemas.microsoft.com/office/drawing/2014/main" id="{4B13DA49-14B8-8F46-AE24-F4E0B9904723}"/>
-              </a:ext>
-            </a:extLst>
-          </p:cNvPr>
-          <p:cNvSpPr>
-            <a:spLocks noGrp="1"/>
-          </p:cNvSpPr>
-          <p:nvPr>
-            <p:ph type="pic" sz="quarter" idx="153"/>
-          </p:nvPr>
-        </p:nvSpPr>
-        <p:spPr/>
-      </p:sp>
-      <p:sp>
-        <p:nvSpPr>
-          <p:cNvPr id="45" name="Picture Placeholder 44">
-            <a:extLst>
-              <a:ext uri="{FF2B5EF4-FFF2-40B4-BE49-F238E27FC236}">
-                <a16:creationId xmlns:a16="http://schemas.microsoft.com/office/drawing/2014/main" id="{9AA78D82-B8E4-404B-839F-DCA532D15B36}"/>
-              </a:ext>
-            </a:extLst>
-          </p:cNvPr>
-          <p:cNvSpPr>
-            <a:spLocks noGrp="1"/>
-          </p:cNvSpPr>
-          <p:nvPr>
-            <p:ph type="pic" sz="quarter" idx="154"/>
-          </p:nvPr>
-        </p:nvSpPr>
-        <p:spPr/>
-      </p:sp>
-      <p:sp>
-        <p:nvSpPr>
-          <p:cNvPr id="46" name="Picture Placeholder 45">
-            <a:extLst>
-              <a:ext uri="{FF2B5EF4-FFF2-40B4-BE49-F238E27FC236}">
-                <a16:creationId xmlns:a16="http://schemas.microsoft.com/office/drawing/2014/main" id="{C87D3BE8-A31A-8349-A5D5-DAD835C20CA7}"/>
-              </a:ext>
-            </a:extLst>
-          </p:cNvPr>
-          <p:cNvSpPr>
-            <a:spLocks noGrp="1"/>
-          </p:cNvSpPr>
-          <p:nvPr>
-            <p:ph type="pic" sz="quarter" idx="155"/>
-          </p:nvPr>
-        </p:nvSpPr>
-        <p:spPr/>
-      </p:sp>
-      <p:sp>
-        <p:nvSpPr>
-          <p:cNvPr id="47" name="Picture Placeholder 46">
-            <a:extLst>
-              <a:ext uri="{FF2B5EF4-FFF2-40B4-BE49-F238E27FC236}">
-                <a16:creationId xmlns:a16="http://schemas.microsoft.com/office/drawing/2014/main" id="{494DBBE6-8D66-8643-97B5-D0AFCBC60B60}"/>
-              </a:ext>
-            </a:extLst>
-          </p:cNvPr>
-          <p:cNvSpPr>
-            <a:spLocks noGrp="1"/>
-          </p:cNvSpPr>
-          <p:nvPr>
-            <p:ph type="pic" sz="quarter" idx="156"/>
-          </p:nvPr>
-        </p:nvSpPr>
-        <p:spPr/>
-      </p:sp>
-      <p:sp>
-        <p:nvSpPr>
-          <p:cNvPr id="48" name="Text Placeholder 47">
-            <a:extLst>
-              <a:ext uri="{FF2B5EF4-FFF2-40B4-BE49-F238E27FC236}">
-                <a16:creationId xmlns:a16="http://schemas.microsoft.com/office/drawing/2014/main" id="{6703A71B-63B0-D747-9424-D2D069659543}"/>
-              </a:ext>
-            </a:extLst>
-          </p:cNvPr>
-          <p:cNvSpPr>
-            <a:spLocks noGrp="1"/>
-          </p:cNvSpPr>
-          <p:nvPr>
-            <p:ph type="body" sz="quarter" idx="157"/>
-          </p:nvPr>
-        </p:nvSpPr>
-        <p:spPr/>
-        <p:txBody>
-          <a:bodyPr/>
-          <a:lstStyle/>
-          <a:p>
-            <a:endParaRPr lang="en-US"/>
-          </a:p>
-        </p:txBody>
-      </p:sp>
-      <p:sp>
-        <p:nvSpPr>
-          <p:cNvPr id="49" name="Text Placeholder 48">
-            <a:extLst>
-              <a:ext uri="{FF2B5EF4-FFF2-40B4-BE49-F238E27FC236}">
-                <a16:creationId xmlns:a16="http://schemas.microsoft.com/office/drawing/2014/main" id="{B7DA6D7F-FCB1-D844-ACD6-2A0DC5E28DC3}"/>
-              </a:ext>
-            </a:extLst>
-          </p:cNvPr>
-          <p:cNvSpPr>
-            <a:spLocks noGrp="1"/>
-          </p:cNvSpPr>
-          <p:nvPr>
-            <p:ph type="body" sz="quarter" idx="158"/>
-          </p:nvPr>
-        </p:nvSpPr>
-        <p:spPr/>
-        <p:txBody>
-          <a:bodyPr/>
-          <a:lstStyle/>
-          <a:p>
-            <a:endParaRPr lang="en-US"/>
-          </a:p>
-        </p:txBody>
-      </p:sp>
-      <p:sp>
-        <p:nvSpPr>
-          <p:cNvPr id="26" name="Title 25">
-            <a:extLst>
-              <a:ext uri="{FF2B5EF4-FFF2-40B4-BE49-F238E27FC236}">
-                <a16:creationId xmlns:a16="http://schemas.microsoft.com/office/drawing/2014/main" id="{885AB436-8292-9D45-B2C3-08FB2CDD3DED}"/>
-              </a:ext>
-            </a:extLst>
-          </p:cNvPr>
-          <p:cNvSpPr>
-            <a:spLocks noGrp="1"/>
-          </p:cNvSpPr>
-          <p:nvPr>
-            <p:ph type="title"/>
-          </p:nvPr>
-        </p:nvSpPr>
-        <p:spPr/>
-        <p:txBody>
-          <a:bodyPr/>
-          <a:lstStyle/>
-          <a:p>
-            <a:endParaRPr lang="en-US" dirty="0"/>
-          </a:p>
-        </p:txBody>
-      </p:sp>
-      <p:sp>
-        <p:nvSpPr>
-          <p:cNvPr id="41" name="Text Placeholder 40">
-            <a:extLst>
-              <a:ext uri="{FF2B5EF4-FFF2-40B4-BE49-F238E27FC236}">
-                <a16:creationId xmlns:a16="http://schemas.microsoft.com/office/drawing/2014/main" id="{2526BDEC-2399-1E4A-AE27-9A2E947056F0}"/>
-              </a:ext>
-            </a:extLst>
-          </p:cNvPr>
-          <p:cNvSpPr>
-            <a:spLocks noGrp="1"/>
-          </p:cNvSpPr>
-          <p:nvPr>
-            <p:ph type="body" sz="quarter" idx="150"/>
-          </p:nvPr>
-        </p:nvSpPr>
-        <p:spPr/>
-        <p:txBody>
-          <a:bodyPr/>
-          <a:lstStyle/>
-          <a:p>
-            <a:endParaRPr lang="en-US" dirty="0"/>
-          </a:p>
-        </p:txBody>
-      </p:sp>
-      <p:sp>
-        <p:nvSpPr>
-          <p:cNvPr id="42" name="Text Placeholder 41">
-            <a:extLst>
-              <a:ext uri="{FF2B5EF4-FFF2-40B4-BE49-F238E27FC236}">
-                <a16:creationId xmlns:a16="http://schemas.microsoft.com/office/drawing/2014/main" id="{A25BC4A5-BA85-8243-A982-CA7604A083D0}"/>
-              </a:ext>
-            </a:extLst>
-          </p:cNvPr>
-          <p:cNvSpPr>
-            <a:spLocks noGrp="1"/>
-          </p:cNvSpPr>
-          <p:nvPr>
-            <p:ph type="body" sz="quarter" idx="151"/>
-          </p:nvPr>
-        </p:nvSpPr>
-        <p:spPr/>
-        <p:txBody>
-          <a:bodyPr/>
-          <a:lstStyle/>
-          <a:p>
-            <a:endParaRPr lang="en-US" dirty="0"/>
-          </a:p>
-        </p:txBody>
-      </p:sp>
+        </p:nvGraphicFramePr>
+        <p:xfrm>
+          <a:off x="16477667" y="36019998"/>
+          <a:ext cx="5343155" cy="3048000"/>
+        </p:xfrm>
+        <a:graphic>
+          <a:graphicData uri="http://schemas.openxmlformats.org/drawingml/2006/chart">
+            <c:chart xmlns:c="http://schemas.openxmlformats.org/drawingml/2006/chart" xmlns:r="http://schemas.openxmlformats.org/officeDocument/2006/relationships" r:id="rId8"/>
+          </a:graphicData>
+        </a:graphic>
+      </p:graphicFrame>
     </p:spTree>
   </p:cSld>
   <p:clrMapOvr>
